--- a/slides/modern-dotnet-configuration.pptx
+++ b/slides/modern-dotnet-configuration.pptx
@@ -58,9 +58,10 @@
     <p:sldId id="306" r:id="rId52"/>
     <p:sldId id="307" r:id="rId53"/>
     <p:sldId id="308" r:id="rId54"/>
+    <p:sldId id="309" r:id="rId55"/>
   </p:sldIdLst>
   <p:notesMasterIdLst>
-    <p:notesMasterId r:id="rId55"/>
+    <p:notesMasterId r:id="rId56"/>
   </p:notesMasterIdLst>
   <p:sldSz cx="12192000" cy="6858000"/>
   <p:notesSz cx="6858000" cy="12192000"/>
@@ -2056,7 +2057,21 @@
   dotnet user-secrets set "ApiKey" "value" --file app.cs
 A five-line single-file app reading configuration with no .csproj anywhere.
 Worth its own slide at 90. At 60, one sentence.
-Failure mode #4: TRUST. Name it.</a:t>
+Failure mode #4: TRUST. Name it.
+ON SCREEN: the repo holds a GUID. Your laptop holds the actual secret, in
+plaintext, in a file anyone with your login can read.
+SAY IT PLAINLY: "This is not encryption. This is not a vault. The whole
+feature is a convention for putting the file somewhere git will never see."
+That is not a criticism - it is exactly the right tool for the job it has. But
+half the room believes it is encrypted, and the ones who believe that are the
+ones who will reach for it in production.
+WHERE IT SITS IN THE CHAIN - say it, do not slide it:
+Development environment ONLY. Above the JSON files, below environment
+variables and the command line. The precedence table already showed the rank;
+point back at it rather than repeating it.
+Storage paths, for the record - and tell them NOT to write code against these:
+  Windows       %APPDATA%MicrosoftUserSecrets&lt;id&gt;secrets.json
+  Linux/macOS   ~/.microsoft/usersecrets/&lt;id&gt;/secrets.json</a:t>
             </a:r>
             <a:endParaRPr lang="en-US" dirty="0"/>
           </a:p>
@@ -2144,22 +2159,25 @@
           <a:p>
             <a:r>
               <a:rPr lang="en-US" dirty="0"/>
-              <a:t>[31-39 min] "WORKS ON MY MACHINE" - S4.2 gotcha
-Snippet: lifted from d07
-60-min: keep if at all possible - this is the block's whole payoff
-THE #1 "works on my machine" configuration story:
-launchSettings.json environment variables OVERRIDE machine and user environment
-variables during local F5 / dotnet run - and launchSettings.json is a
-DEVELOPMENT-ONLY file that never deploys.
-So: you set an env var, you run locally, nothing changes, you conclude env vars
-don't work. Or worse - it works locally because of launchSettings, and the value
-simply isn't there in production.
-Show the two side by side: the env var you set, and the launchSettings entry
-that quietly beats it. Then the same app with that entry deleted.
-CLOSE THE STAGE HERE:
-"That's stage one's signature failure. The fix isn't a better laptop - it's
-letting the platform supply the values. That's stage two."
-Failure mode #1 (ORDER) and #2 (SHAPE) both live here.</a:t>
+              <a:t>[S4.4] USER SECRETS - THE COMMANDS
+Snippet: lifted from d09
+60-min: keep, fast
+Five commands and one .NET 10 addition. Do not read them out. Let people
+photograph it and say what matters instead.
+WHAT MATTERS:
+- 'init' writes the UserSecretsId into the .csproj. That id is the only thing
+  the repo ever learns about your secrets.
+- Values are set by KEY PATH using the colon form - "Weather:ApiKey", not
+  nested JSON. The provider flattens it exactly like everything else.
+- Bulk load exists: pipe a JSON file into 'dotnet user-secrets set'. Useful
+  when onboarding someone. Do not then commit that JSON file.
+THE .NET 10 LINE IS THE ONE TO CALL OUT:
+'dotnet run app.cs' programs get a stable UserSecretsId derived from a hash of
+the FILE PATH. A single-file app with no .csproj anywhere still gets user
+secrets, addressed with --file.
+That is genuinely new and it lands well - a five-line program reading
+configuration properly with no project file. Worth mentioning that moving the
+file changes the hash, and therefore changes which secrets it sees.</a:t>
             </a:r>
             <a:endParaRPr lang="en-US" dirty="0"/>
           </a:p>
@@ -2247,16 +2265,22 @@
           <a:p>
             <a:r>
               <a:rPr lang="en-US" dirty="0"/>
-              <a:t>[39-51 min] OPTIONS - S5
-60-min: 8 min - this block survives the cut nearly intact
-The longest non-flag block in the talk, and correctly so. This is where
-"configuration" stops being strings and starts being types you can validate.
-Snippets here: d11 binding, d12 ValidateOnStart, d13 the three interfaces.
-The three-interfaces before/after pair is the longest beat in the talk.
-DO NOT RUSH IT.
-This is also the answer to the thesis objection from S1.3 - "then nothing is
-knowable." Binding plus validation is what makes a configurable value MORE
-knowable than a constant.</a:t>
+              <a:t>[31-39 min] "WORKS ON MY MACHINE" - S4.2 gotcha
+Snippet: lifted from d07
+60-min: keep if at all possible - this is the block's whole payoff
+THE #1 "works on my machine" configuration story:
+launchSettings.json environment variables OVERRIDE machine and user environment
+variables during local F5 / dotnet run - and launchSettings.json is a
+DEVELOPMENT-ONLY file that never deploys.
+So: you set an env var, you run locally, nothing changes, you conclude env vars
+don't work. Or worse - it works locally because of launchSettings, and the value
+simply isn't there in production.
+Show the two side by side: the env var you set, and the launchSettings entry
+that quietly beats it. Then the same app with that entry deleted.
+CLOSE THE STAGE HERE:
+"That's stage one's signature failure. The fix isn't a better laptop - it's
+letting the platform supply the values. That's stage two."
+Failure mode #1 (ORDER) and #2 (SHAPE) both live here.</a:t>
             </a:r>
             <a:endParaRPr lang="en-US" dirty="0"/>
           </a:p>
@@ -2344,24 +2368,16 @@
           <a:p>
             <a:r>
               <a:rPr lang="en-US" dirty="0"/>
-              <a:t>[39-51 min] STOP INJECTING ICONFIGURATION - S5.1
-60-min: keep
-THE DON'T:
-  public sealed class WeatherClient(IConfiguration config)
-      =&gt; CallAsync(config["Weather:ApiBaseUrl"]!,
-                   int.Parse(config["Weather:TimeoutSeconds"]!));
-Four things wrong: stringly typed, unvalidated, untestable, re-parsed on every call.
-Plus that null-forgiving '!' is anti-pattern #3 all by itself.
-THE DO:
-  sealed class WeatherOptions with const SectionName, [Required][Url] ApiBaseUrl,
-  [Range(1,300)] TimeoutSeconds, [Range(0,10)] Retries, [Required][MinLength(8)] ApiKey
-  - required init properties, defaults where sensible.
-  public sealed class WeatherClient(IOptions&lt;WeatherOptions&gt; options)
-THE ARGUMENT: the class now DECLARES EXACTLY WHAT IT NEEDS. You can read the
-options type and know the whole configuration surface of that component. You
-cannot do that with IConfiguration - it's a bag of everything.
-Say the word "seam" again. This is the same ownership argument from S1.1 #5,
-just inside the codebase instead of between teams.</a:t>
+              <a:t>[39-51 min] OPTIONS - S5
+60-min: 8 min - this block survives the cut nearly intact
+The longest non-flag block in the talk, and correctly so. This is where
+"configuration" stops being strings and starts being types you can validate.
+Snippets here: d11 binding, d12 ValidateOnStart, d13 the three interfaces.
+The three-interfaces before/after pair is the longest beat in the talk.
+DO NOT RUSH IT.
+This is also the answer to the thesis objection from S1.3 - "then nothing is
+knowable." Binding plus validation is what makes a configurable value MORE
+knowable than a constant.</a:t>
             </a:r>
             <a:endParaRPr lang="en-US" dirty="0"/>
           </a:p>
@@ -2449,25 +2465,24 @@
           <a:p>
             <a:r>
               <a:rPr lang="en-US" dirty="0"/>
-              <a:t>[39-51 min] REGISTRATION - S5.2
-Snippet: lifted from d11
-60-min: merge into the previous slide if tight
-  builder.Services
-      .AddOptions&lt;WeatherOptions&gt;()
-      .Bind(builder.Configuration.GetSection(WeatherOptions.SectionName))
-      .ValidateDataAnnotations()
-      .Validate(o =&gt; o.Retries == 0 || o.TimeoutSeconds &gt;= 5,
-                "TimeoutSeconds must be &gt;= 5 when retries are enabled.")
-      .ValidateOnStart();
-Or the shorthand that makes fail-fast the DEFAULT POSTURE:
-  builder.Services
-      .AddOptionsWithValidateOnStart&lt;WeatherOptions&gt;()
-      .Bind(builder.Configuration.GetSection(WeatherOptions.SectionName))
-      .ValidateDataAnnotations();
-Prefer the second form in every sample you show from here on. Modeling the good
-default matters more than showing the long form.
-ValidateDataAnnotations lives in Microsoft.Extensions.Options.DataAnnotations,
-referenced implicitly by the web SDK - so it just works and people wonder why.</a:t>
+              <a:t>[39-51 min] STOP INJECTING ICONFIGURATION - S5.1
+60-min: keep
+THE DON'T:
+  public sealed class WeatherClient(IConfiguration config)
+      =&gt; CallAsync(config["Weather:ApiBaseUrl"]!,
+                   int.Parse(config["Weather:TimeoutSeconds"]!));
+Four things wrong: stringly typed, unvalidated, untestable, re-parsed on every call.
+Plus that null-forgiving '!' is anti-pattern #3 all by itself.
+THE DO:
+  sealed class WeatherOptions with const SectionName, [Required][Url] ApiBaseUrl,
+  [Range(1,300)] TimeoutSeconds, [Range(0,10)] Retries, [Required][MinLength(8)] ApiKey
+  - required init properties, defaults where sensible.
+  public sealed class WeatherClient(IOptions&lt;WeatherOptions&gt; options)
+THE ARGUMENT: the class now DECLARES EXACTLY WHAT IT NEEDS. You can read the
+options type and know the whole configuration surface of that component. You
+cannot do that with IConfiguration - it's a bag of everything.
+Say the word "seam" again. This is the same ownership argument from S1.1 #5,
+just inside the codebase instead of between teams.</a:t>
             </a:r>
             <a:endParaRPr lang="en-US" dirty="0"/>
           </a:p>
@@ -2555,27 +2570,25 @@
           <a:p>
             <a:r>
               <a:rPr lang="en-US" dirty="0"/>
-              <a:t>[39-51 min] THE THREE INTERFACES - S5.3
-Snippet: lifted from d13. THE LONGEST BEAT IN THE TALK. DO NOT RUSH IT.
-60-min: NEVER CUT
-  IOptions&lt;T&gt;          Singleton  no re-read     value can't change at runtime
-  IOptionsSnapshot&lt;T&gt;  SCOPED     once per scope per-request consistency (web)
-  IOptionsMonitor&lt;T&gt;   Singleton  yes + OnChange singletons &amp; background services
-BEFORE / AFTER PAIR: all three interfaces on one slide, then the same three
-after appsettings.json changed underneath the running app.
-Three different answers to the same question. That image is the slide.
-THE CLASSIC BUG: injecting IOptionsSnapshot&lt;T&gt; into a singleton. It's scoped -
-the container either throws at validation, or you capture the first scope's value
-forever. Anti-pattern #4.
-THE OTHER CLASSIC BUG: caching _monitor.CurrentValue in a field at construction.
-That quietly turns a monitor back into an IOptions&lt;T&gt;. Anti-pattern #5.
-Read CurrentValue at the point of use, every time.
-TWO CONVENTIONS IN THE BACKGROUND SERVICE SAMPLE - say them, people copy this code:
-- OnChange returns an IDisposable registration. HOLD IT AND DISPOSE IT or you leak
-  the subscription.
-- The log message is a TEMPLATE with named placeholders, never an interpolated
-  string. Structured logging is the house rule.
-Failure mode #3: LIFETIME. Name it here.</a:t>
+              <a:t>[39-51 min] REGISTRATION - S5.2
+Snippet: lifted from d11
+60-min: merge into the previous slide if tight
+  builder.Services
+      .AddOptions&lt;WeatherOptions&gt;()
+      .Bind(builder.Configuration.GetSection(WeatherOptions.SectionName))
+      .ValidateDataAnnotations()
+      .Validate(o =&gt; o.Retries == 0 || o.TimeoutSeconds &gt;= 5,
+                "TimeoutSeconds must be &gt;= 5 when retries are enabled.")
+      .ValidateOnStart();
+Or the shorthand that makes fail-fast the DEFAULT POSTURE:
+  builder.Services
+      .AddOptionsWithValidateOnStart&lt;WeatherOptions&gt;()
+      .Bind(builder.Configuration.GetSection(WeatherOptions.SectionName))
+      .ValidateDataAnnotations();
+Prefer the second form in every sample you show from here on. Modeling the good
+default matters more than showing the long form.
+ValidateDataAnnotations lives in Microsoft.Extensions.Options.DataAnnotations,
+referenced implicitly by the web SDK - so it just works and people wonder why.</a:t>
             </a:r>
             <a:endParaRPr lang="en-US" dirty="0"/>
           </a:p>
@@ -2663,25 +2676,27 @@
           <a:p>
             <a:r>
               <a:rPr lang="en-US" dirty="0"/>
-              <a:t>[39-51 min] VALIDATION - S5.5
-Snippet: lifted from d12
+              <a:t>[39-51 min] THE THREE INTERFACES - S5.3
+Snippet: lifted from d13. THE LONGEST BEAT IN THE TALK. DO NOT RUSH IT.
 60-min: NEVER CUT
-FAIL FAST IS THE WHOLE POINT.
-Without ValidateOnStart(), validation runs LAZILY on first .Value access - a bad
-deploy looks healthy until the first request reaches the affected code path. With
-it, the process refuses to start. That's exactly the behavior you want during a
-rolling deployment: the bad instance never takes traffic.
-Bad config = no start. Show the startup exception naming the offending property.
-NESTED OBJECTS AND COLLECTIONS ARE NOT VALIDATED BY DEFAULT. Opt in:
-  [Required, ValidateObjectMembers]  on the nested object
-  [ValidateEnumeratedItems]          on the collection
-This surprises people who think [Required] recurses. It doesn't.
-COMPLEX / CROSS-FIELD / SERVICE-DEPENDENT rules belong in a class:
-  IValidateOptions&lt;T&gt;, registered with
-  services.TryAddEnumerable(ServiceDescriptor.Singleton&lt;IValidateOptions&lt;T&gt;, V&gt;())
-  (TryAddEnumerable, not Add - otherwise duplicate registrations pile up.)
-Tie back to S1.3: this is the answer to "everything is configurable and nothing is
-knowable." A validated option is more knowable than a buried constant.</a:t>
+  IOptions&lt;T&gt;          Singleton  no re-read     value can't change at runtime
+  IOptionsSnapshot&lt;T&gt;  SCOPED     once per scope per-request consistency (web)
+  IOptionsMonitor&lt;T&gt;   Singleton  yes + OnChange singletons &amp; background services
+BEFORE / AFTER PAIR: all three interfaces on one slide, then the same three
+after appsettings.json changed underneath the running app.
+Three different answers to the same question. That image is the slide.
+THE CLASSIC BUG: injecting IOptionsSnapshot&lt;T&gt; into a singleton. It's scoped -
+the container either throws at validation, or you capture the first scope's value
+forever. Anti-pattern #4.
+THE OTHER CLASSIC BUG: caching _monitor.CurrentValue in a field at construction.
+That quietly turns a monitor back into an IOptions&lt;T&gt;. Anti-pattern #5.
+Read CurrentValue at the point of use, every time.
+TWO CONVENTIONS IN THE BACKGROUND SERVICE SAMPLE - say them, people copy this code:
+- OnChange returns an IDisposable registration. HOLD IT AND DISPOSE IT or you leak
+  the subscription.
+- The log message is a TEMPLATE with named placeholders, never an interpolated
+  string. Structured logging is the house rule.
+Failure mode #3: LIFETIME. Name it here.</a:t>
             </a:r>
             <a:endParaRPr lang="en-US" dirty="0"/>
           </a:p>
@@ -2769,25 +2784,25 @@
           <a:p>
             <a:r>
               <a:rPr lang="en-US" dirty="0"/>
-              <a:t>[39-51 min] NAMED OPTIONS + GENERATORS - S5.4, S5.6
-60-min: CUT the generator half to a single sentence
-NAMED OPTIONS - for "same shape, several times": multiple API clients, queues.
-  services.Configure&lt;EndpointOptions&gt;("primary", config.GetSection("Endpoints:Primary"));
-  services.Configure&lt;EndpointOptions&gt;("secondary", ...);
-  then monitor.Get("primary")
-Configure&lt;T&gt;(section) with no name is shorthand for Options.DefaultName ("").
-SOURCE GENERATORS - binding and validation both default to REFLECTION. Two opt-ins:
-  &lt;EnableConfigurationBindingGenerator&gt;true&lt;/EnableConfigurationBindingGenerator&gt;
-  [OptionsValidator]
-  public sealed partial class ValidateWeatherOptions : IValidateOptions&lt;WeatherOptions&gt;;
-  (empty partial - the generator writes the implementation)
-The options validation generator is ON BY DEFAULT when the project references
-Microsoft.Extensions.Options 8+ or builds an ASP.NET Core app. It rewrites
-[Range], [MinLength], [MaxLength], [Length] into generated equivalents.
-With [OptionsValidator] you do NOT also call ValidateDataAnnotations().
-OPTIONAL (d17, 90 min only): PublishAot=true surfaces IL2026 / IL3050 warnings
-from reflection binding; turn both generators on and they disappear.
-Niche. At 60 minutes this is one slide.</a:t>
+              <a:t>[39-51 min] VALIDATION - S5.5
+Snippet: lifted from d12
+60-min: NEVER CUT
+FAIL FAST IS THE WHOLE POINT.
+Without ValidateOnStart(), validation runs LAZILY on first .Value access - a bad
+deploy looks healthy until the first request reaches the affected code path. With
+it, the process refuses to start. That's exactly the behavior you want during a
+rolling deployment: the bad instance never takes traffic.
+Bad config = no start. Show the startup exception naming the offending property.
+NESTED OBJECTS AND COLLECTIONS ARE NOT VALIDATED BY DEFAULT. Opt in:
+  [Required, ValidateObjectMembers]  on the nested object
+  [ValidateEnumeratedItems]          on the collection
+This surprises people who think [Required] recurses. It doesn't.
+COMPLEX / CROSS-FIELD / SERVICE-DEPENDENT rules belong in a class:
+  IValidateOptions&lt;T&gt;, registered with
+  services.TryAddEnumerable(ServiceDescriptor.Singleton&lt;IValidateOptions&lt;T&gt;, V&gt;())
+  (TryAddEnumerable, not Add - otherwise duplicate registrations pile up.)
+Tie back to S1.3: this is the answer to "everything is configurable and nothing is
+knowable." A validated option is more knowable than a buried constant.</a:t>
             </a:r>
             <a:endParaRPr lang="en-US" dirty="0"/>
           </a:p>
@@ -2987,17 +3002,25 @@
           <a:p>
             <a:r>
               <a:rPr lang="en-US" dirty="0"/>
-              <a:t>[51-59 min] STAGE 2 - DEPLOYMENT
-60-min: compress to 4 min, one slide
-THE PROBLEM THIS STAGE SOLVES:
-One artifact, many environments. The platform supplies the values.
-Sources: environment variables, command line, key-per-file mounts, Key Vault.
-Close the block on its signature failure - "the value didn't make it" - which is
-what pushes you to stage three.
-RULE OF THUMB TO LAND HERE (S7.3 #1):
-One artifact, many environments. If you build a different binary per environment,
-you have reintroduced Web.Release.config. Configuration is a deployment-time
-input, not a build input.</a:t>
+              <a:t>[39-51 min] NAMED OPTIONS + GENERATORS - S5.4, S5.6
+60-min: CUT the generator half to a single sentence
+NAMED OPTIONS - for "same shape, several times": multiple API clients, queues.
+  services.Configure&lt;EndpointOptions&gt;("primary", config.GetSection("Endpoints:Primary"));
+  services.Configure&lt;EndpointOptions&gt;("secondary", ...);
+  then monitor.Get("primary")
+Configure&lt;T&gt;(section) with no name is shorthand for Options.DefaultName ("").
+SOURCE GENERATORS - binding and validation both default to REFLECTION. Two opt-ins:
+  &lt;EnableConfigurationBindingGenerator&gt;true&lt;/EnableConfigurationBindingGenerator&gt;
+  [OptionsValidator]
+  public sealed partial class ValidateWeatherOptions : IValidateOptions&lt;WeatherOptions&gt;;
+  (empty partial - the generator writes the implementation)
+The options validation generator is ON BY DEFAULT when the project references
+Microsoft.Extensions.Options 8+ or builds an ASP.NET Core app. It rewrites
+[Range], [MinLength], [MaxLength], [Length] into generated equivalents.
+With [OptionsValidator] you do NOT also call ValidateDataAnnotations().
+OPTIONAL (d17, 90 min only): PublishAot=true surfaces IL2026 / IL3050 warnings
+from reflection binding; turn both generators on and they disappear.
+Niche. At 60 minutes this is one slide.</a:t>
             </a:r>
             <a:endParaRPr lang="en-US" dirty="0"/>
           </a:p>
@@ -3085,27 +3108,17 @@
           <a:p>
             <a:r>
               <a:rPr lang="en-US" dirty="0"/>
-              <a:t>[51-59 min] ENVIRONMENT VARIABLES - S4.2
-Snippet: lifted from d04
-60-min: keep - this is the core of the compressed stage-2 slide
-The workhorse in containers and every PaaS.
-':' IS NOT PORTABLE in env var names. '__' is, and maps to ':'.
-  Weather__ApiBaseUrl        -&gt; Weather:ApiBaseUrl
-  ConnectionStrings__Default -&gt; ConnectionStrings:Default
-Arrays use the index as a segment:
-  Weather__AllowedOrigins__0, Weather__AllowedOrigins__1
-PREFIXES:
-  AddEnvironmentVariables(prefix: "MYAPP_") loads only matching variables AND
-  STRIPS the prefix from the key.
-  MYAPP_Weather__TimeoutSeconds -&gt; Weather:TimeoutSeconds
-  Useful for isolating one app on a shared host.
-DOTNET_ and ASPNETCORE_ are RESERVED for host settings. Don't reuse them for app
-config - you'll get behavior you didn't ask for.
-Failure mode #2: SHAPE. This is where it lives - the key you set doesn't produce
-the key the binder is looking for. Single underscore instead of double is the
-most common version.
-ALSO SAY (it comes back in S8): changing an environment variable on a running
-container does NOTHING. Env vars are read once at startup. Restart the container.</a:t>
+              <a:t>[51-59 min] STAGE 2 - DEPLOYMENT
+60-min: compress to 4 min, one slide
+THE PROBLEM THIS STAGE SOLVES:
+One artifact, many environments. The platform supplies the values.
+Sources: environment variables, command line, key-per-file mounts, Key Vault.
+Close the block on its signature failure - "the value didn't make it" - which is
+what pushes you to stage three.
+RULE OF THUMB TO LAND HERE (S7.3 #1):
+One artifact, many environments. If you build a different binary per environment,
+you have reintroduced Web.Release.config. Configuration is a deployment-time
+input, not a build input.</a:t>
             </a:r>
             <a:endParaRPr lang="en-US" dirty="0"/>
           </a:p>
@@ -3193,29 +3206,27 @@
           <a:p>
             <a:r>
               <a:rPr lang="en-US" dirty="0"/>
-              <a:t>[51-59 min] CONNSTR PREFIXES - S4.2 - .NET 10 DELTA
-Snippet: lifted from d05
-60-min: keep as one line on the deployment slide - it's a good "new in 10" beat
-Certain prefixed environment variables are rewritten into the ConnectionStrings:
-section. This is an App Service compatibility behavior that most people have
-never heard of.
-.NET 9 recognized FOUR. .NET 10 recognizes ELEVEN.
-  CUSTOMCONNSTR_{KEY}       -&gt; ConnectionStrings:{KEY}
-  MYSQLCONNSTR_{KEY}        -&gt; + _ProviderName MySql.Data.MySqlClient
-  SQLCONNSTR_{KEY}          -&gt; + _ProviderName System.Data.SqlClient
-  SQLAZURECONNSTR_{KEY}     -&gt; + _ProviderName System.Data.SqlClient
-  NEW IN 10:
-  POSTGRESQLCONNSTR_{KEY}   -&gt; + _ProviderName Npgsql
-  DOCDBCONNSTR_{KEY}        (Cosmos DB)
-  REDISCACHECONNSTR_{KEY}
-  SERVICEBUSCONNSTR_{KEY}
-  EVENTHUBCONNSTR_{KEY}
-  NOTIFICATIONHUBCONNSTR_{KEY}
-  APIHUBCONNSTR_{KEY}
-d05 SHOWS: set POSTGRESQLCONNSTR_Default, then
-Configuration.GetConnectionString("Default") resolving on .NET 10 where it
-wouldn't have on .NET 9.
-Short, concrete, and it's a genuinely new thing - good energy beat here.</a:t>
+              <a:t>[51-59 min] ENVIRONMENT VARIABLES - S4.2
+Snippet: lifted from d04
+60-min: keep - this is the core of the compressed stage-2 slide
+The workhorse in containers and every PaaS.
+':' IS NOT PORTABLE in env var names. '__' is, and maps to ':'.
+  Weather__ApiBaseUrl        -&gt; Weather:ApiBaseUrl
+  ConnectionStrings__Default -&gt; ConnectionStrings:Default
+Arrays use the index as a segment:
+  Weather__AllowedOrigins__0, Weather__AllowedOrigins__1
+PREFIXES:
+  AddEnvironmentVariables(prefix: "MYAPP_") loads only matching variables AND
+  STRIPS the prefix from the key.
+  MYAPP_Weather__TimeoutSeconds -&gt; Weather:TimeoutSeconds
+  Useful for isolating one app on a shared host.
+DOTNET_ and ASPNETCORE_ are RESERVED for host settings. Don't reuse them for app
+config - you'll get behavior you didn't ask for.
+Failure mode #2: SHAPE. This is where it lives - the key you set doesn't produce
+the key the binder is looking for. Single underscore instead of double is the
+most common version.
+ALSO SAY (it comes back in S8): changing an environment variable on a running
+container does NOTHING. Env vars are read once at startup. Restart the container.</a:t>
             </a:r>
             <a:endParaRPr lang="en-US" dirty="0"/>
           </a:p>
@@ -3303,22 +3314,29 @@
           <a:p>
             <a:r>
               <a:rPr lang="en-US" dirty="0"/>
-              <a:t>[51-59 min] KEY-PER-FILE - S4.7
-Snippet: lifted from d23, or name it and move on
-60-min: CUT to a name on the deployment slide
-Docker secrets and Kubernetes mounted secrets are ONE FILE PER VALUE. This is how
-you consume them without an Azure round trip.
-  builder.Configuration.AddKeyPerFile(directoryPath: "/run/secrets", optional: true);
-File NAME is the key, file CONTENTS are the value, '__' is the delimiter.
-A file named Weather__ApiKey containing abc123 becomes Weather:ApiKey = abc123.
-THE PATH MUST BE ABSOLUTE. Relative paths fail in a way that looks like "the
-provider isn't working."
-This is the right answer for AKS and Docker Swarm and it costs nothing. Worth
-naming even when you skip the snippet - half the room is on Kubernetes and has been
-shelling secrets in through env vars.
-FORWARD REF to S8: key-per-file DOES reload (it's a file provider) - but on
-Kubernetes those mounts are symlink swaps, not in-place writes, so the watcher
-may or may not see them. Treat restart as the contract.</a:t>
+              <a:t>[51-59 min] CONNSTR PREFIXES - S4.2 - .NET 10 DELTA
+Snippet: lifted from d05
+60-min: keep as one line on the deployment slide - it's a good "new in 10" beat
+Certain prefixed environment variables are rewritten into the ConnectionStrings:
+section. This is an App Service compatibility behavior that most people have
+never heard of.
+.NET 9 recognized FOUR. .NET 10 recognizes ELEVEN.
+  CUSTOMCONNSTR_{KEY}       -&gt; ConnectionStrings:{KEY}
+  MYSQLCONNSTR_{KEY}        -&gt; + _ProviderName MySql.Data.MySqlClient
+  SQLCONNSTR_{KEY}          -&gt; + _ProviderName System.Data.SqlClient
+  SQLAZURECONNSTR_{KEY}     -&gt; + _ProviderName System.Data.SqlClient
+  NEW IN 10:
+  POSTGRESQLCONNSTR_{KEY}   -&gt; + _ProviderName Npgsql
+  DOCDBCONNSTR_{KEY}        (Cosmos DB)
+  REDISCACHECONNSTR_{KEY}
+  SERVICEBUSCONNSTR_{KEY}
+  EVENTHUBCONNSTR_{KEY}
+  NOTIFICATIONHUBCONNSTR_{KEY}
+  APIHUBCONNSTR_{KEY}
+d05 SHOWS: set POSTGRESQLCONNSTR_Default, then
+Configuration.GetConnectionString("Default") resolving on .NET 10 where it
+wouldn't have on .NET 9.
+Short, concrete, and it's a genuinely new thing - good energy beat here.</a:t>
             </a:r>
             <a:endParaRPr lang="en-US" dirty="0"/>
           </a:p>
@@ -3406,32 +3424,24 @@
           <a:p>
             <a:r>
               <a:rPr lang="en-US" dirty="0"/>
-              <a:t>[51-59 min] KEY VAULT - S4.5
-Snippet: lifted from d18. No Azure dependency now - it is code on a slide.
-60-min: one slide covers it; the mechanics were never visual anyway.
-  builder.Configuration.AddAzureKeyVault(
-      new Uri($"https://{name}.vault.azure.net/"),
-      new DefaultAzureCredential());
-  - guarded by if (!builder.Environment.IsDevelopment())
-FOUR THINGS THAT ACTUALLY MATTER:
-1. SECRET NAMING. Key Vault forbids ':' in secret names. The default
-   KeyVaultSecretManager maps '--' to the delimiter:
-   secret Weather--ApiKey  -&gt;  key Weather:ApiKey
-   This is failure mode #2 (SHAPE) wearing a cloud hat.
-2. REGISTER IT LAST so it overrides the file providers it's meant to replace.
-3. NO RELOAD BY DEFAULT. Secrets are cached for the life of the process.
-   ReloadInterval defaults to NULL - meaning never. Opt into polling:
-     new AzureKeyVaultConfigurationOptions { ReloadInterval = TimeSpan.FromMinutes(30) }
-   Tie to S7.3 #6: "It's in Key Vault" plus a process that caches it forever is a
-   secret you cannot rotate.
-4. EXPIRED SECRETS ARE STILL LOADED by default. Disabled secrets never are.
-   Filter with a custom KeyVaultSecretManager overriding Load(SecretProperties).
-CREDENTIALS: DefaultAzureCredential is the DEV CONVENIENCE chain (CLI, VS, env
-vars, managed identity). In production prefer ManagedIdentityCredential
-explicitly - narrower, and it FAILS FAST instead of silently walking the chain.
-User-assigned identity: set AZURE_CLIENT_ID.
-ISOLATION: one vault per app AND per environment. Don't multiplex with name
-prefixes - that's anti-pattern #9.</a:t>
+              <a:t>[51-59 min] KEY-PER-FILE - S4.7
+Snippet: lifted from d23, or name it and move on
+60-min: CUT to a name on the deployment slide
+Docker secrets and Kubernetes mounted secrets are ONE FILE PER VALUE. This is how
+you consume them without an Azure round trip.
+  builder.Configuration.AddKeyPerFile(directoryPath: "/run/secrets", optional: true);
+File NAME is the key, file CONTENTS are the value, '__' is the delimiter.
+A file named Weather__ApiKey containing abc123 becomes Weather:ApiKey = abc123.
+THE PATH MUST BE ABSOLUTE. Relative paths fail in a way that looks like "the
+provider isn't working."
+This is the right answer for AKS and Docker Swarm and it costs nothing. Worth
+naming even when you skip the snippet - half the room is on Kubernetes and has been
+shelling secrets in through env vars.
+RELOAD - GET THIS RIGHT: the 3-argument overload above does NOT reload.
+AddKeyPerFile(dir, optional) resolves to reloadOnChange: false. You only get
+a watcher from the 4-argument overload. And even then, on Kubernetes those
+mounts are symlink swaps rather than in-place writes, so the watcher may or
+may not fire. Treat restart as the contract.</a:t>
             </a:r>
             <a:endParaRPr lang="en-US" dirty="0"/>
           </a:p>
@@ -3519,28 +3529,32 @@
           <a:p>
             <a:r>
               <a:rPr lang="en-US" dirty="0"/>
-              <a:t>[S4.8] IN-MEMORY - THE TESTING PROVIDER
-Snippet: lifted from d24
-60-min: cut the slide, keep the sentence
-Added LAST, so it beats everything. That is the entire trick.
-This is the right answer for WebApplicationFactory integration tests: you get
-the real application, the real provider chain, the real binding and validation
-- and then you overwrite exactly the handful of keys the test cares about.
-WHY IT BEATS THE ALTERNATIVES:
-- Mocking IConfiguration tests your mock, not your configuration.
-- A test appsettings.json is a second file to keep in sync with the first.
-- Environment variables in a test runner leak between tests.
-Say the ordering point out loud, because it is the whole reason this works:
-AddInMemoryCollection is appended, and reads walk the chain in reverse. It
-does not matter what appsettings.json says. It does not matter what the
-developer has in user secrets. The dictionary wins.
-SAME TRICK FOR FEATURE FLAGS - forward reference to S6.7. A flag is just
-configuration, so you set feature_management:feature_flags:0:enabled here and
-test both sides of the branch. That is the slide people photograph in the
-flags block.
-The other use, if anyone asks: in-memory as code DEFAULTS, added FIRST so
-everything overrides it. Rarer, but it is how you ship a sane fallback
-without a file.</a:t>
+              <a:t>[51-59 min] KEY VAULT - S4.5
+Snippet: lifted from d18. No Azure dependency now - it is code on a slide.
+60-min: one slide covers it; the mechanics were never visual anyway.
+  builder.Configuration.AddAzureKeyVault(
+      new Uri($"https://{name}.vault.azure.net/"),
+      new DefaultAzureCredential());
+  - guarded by if (!builder.Environment.IsDevelopment())
+FOUR THINGS THAT ACTUALLY MATTER:
+1. SECRET NAMING. Key Vault forbids ':' in secret names. The default
+   KeyVaultSecretManager maps '--' to the delimiter:
+   secret Weather--ApiKey  -&gt;  key Weather:ApiKey
+   This is failure mode #2 (SHAPE) wearing a cloud hat.
+2. REGISTER IT LAST so it overrides the file providers it's meant to replace.
+3. NO RELOAD BY DEFAULT. Secrets are cached for the life of the process.
+   ReloadInterval defaults to NULL - meaning never. Opt into polling:
+     new AzureKeyVaultConfigurationOptions { ReloadInterval = TimeSpan.FromMinutes(30) }
+   Tie to S7.3 #6: "It's in Key Vault" plus a process that caches it forever is a
+   secret you cannot rotate.
+4. EXPIRED SECRETS ARE STILL LOADED by default. Disabled secrets never are.
+   Filter with a custom KeyVaultSecretManager overriding Load(SecretProperties).
+CREDENTIALS: DefaultAzureCredential is the DEV CONVENIENCE chain (CLI, VS, env
+vars, managed identity). In production prefer ManagedIdentityCredential
+explicitly - narrower, and it FAILS FAST instead of silently walking the chain.
+User-assigned identity: set AZURE_CLIENT_ID.
+ISOLATION: one vault per app AND per environment. Don't multiplex with name
+prefixes - that's anti-pattern #9.</a:t>
             </a:r>
             <a:endParaRPr lang="en-US" dirty="0"/>
           </a:p>
@@ -3628,29 +3642,28 @@
           <a:p>
             <a:r>
               <a:rPr lang="en-US" dirty="0"/>
-              <a:t>[S4.10] CUSTOM PROVIDER - THE EXTENSIBILITY POINT
-Snippet: lifted from d25
-60-min: cut - point at the repo
-Two types. That is the whole contract.
-  IConfigurationSource   - a factory. Build() hands back a provider.
-  ConfigurationProvider  - has a protected IDictionary&lt;string,string?&gt; Data
-                           and a virtual Load(). Fill the dictionary.
-Then an extension method so it reads like every other provider:
-  builder.Configuration.AddSqlConfiguration(connectionString);
-THREE THINGS TO LAND, THEN MOVE ON:
-1. Load() RUNS ONCE, at build time. It is not lazy. If you want refresh you
-   schedule it yourself and call OnReload() - that is what fires the change
-   token that makes IOptionsMonitor wake up. Point back at the three
-   interfaces slide when you say it.
-2. A provider that THROWS in Load() takes the app down at startup. That
-   sounds like a bug and is frequently the feature - it is the same
-   fail-fast posture as ValidateOnStart.
-3. Good real targets: a database-backed provider, a .env reader, a provider
-   that pulls from your own internal config service. Bad target: anything
-   you could have done with the eleven providers that already exist.
-Do not live-code this. Show the shape, say the three things, point at d25 in
-the repo. It is interesting to about six people in the room and they will
-read the code later.</a:t>
+              <a:t>[S4.8] IN-MEMORY - THE TESTING PROVIDER
+Snippet: lifted from d24
+60-min: cut the slide, keep the sentence
+Added LAST, so it beats everything. That is the entire trick.
+This is the right answer for WebApplicationFactory integration tests: you get
+the real application, the real provider chain, the real binding and validation
+- and then you overwrite exactly the handful of keys the test cares about.
+WHY IT BEATS THE ALTERNATIVES:
+- Mocking IConfiguration tests your mock, not your configuration.
+- A test appsettings.json is a second file to keep in sync with the first.
+- Environment variables in a test runner leak between tests.
+Say the ordering point out loud, because it is the whole reason this works:
+AddInMemoryCollection is appended, and reads walk the chain in reverse. It
+does not matter what appsettings.json says. It does not matter what the
+developer has in user secrets. The dictionary wins.
+SAME TRICK FOR FEATURE FLAGS - forward reference to S6.7. A flag is just
+configuration, so you set feature_management:feature_flags:0:enabled here and
+test both sides of the branch. That is the slide people photograph in the
+flags block.
+The other use, if anyone asks: in-memory as code DEFAULTS, added FIRST so
+everything overrides it. Rarer, but it is how you ship a sane fallback
+without a file.</a:t>
             </a:r>
             <a:endParaRPr lang="en-US" dirty="0"/>
           </a:p>
@@ -3738,15 +3751,29 @@
           <a:p>
             <a:r>
               <a:rPr lang="en-US" dirty="0"/>
-              <a:t>[59-64 min] STAGE 3 - SHARED
-60-min: compress to 3 min - labels + sentinel key only
-THE PROBLEM THIS STAGE SOLVES:
-Many apps and instances; values that change without a deploy.
-Note this block is only 5 minutes even at 90, because S6 now carries App
-Configuration's most interesting behavior. Show the sentinel key here and let
-feature flags do the rest.
-Close on the signature failure - "it changed, but not everywhere at once" -
-which is what forces the discipline: sentinel keys, validation, flag hygiene.</a:t>
+              <a:t>[S4.10] CUSTOM PROVIDER - THE EXTENSIBILITY POINT
+Snippet: lifted from d25
+60-min: cut - point at the repo
+Two types. That is the whole contract.
+  IConfigurationSource   - a factory. Build() hands back a provider.
+  ConfigurationProvider  - has a protected IDictionary&lt;string,string?&gt; Data
+                           and a virtual Load(). Fill the dictionary.
+Then an extension method so it reads like every other provider:
+  builder.Configuration.AddSqlConfiguration(connectionString);
+THREE THINGS TO LAND, THEN MOVE ON:
+1. Load() RUNS ONCE, at build time. It is not lazy. If you want refresh you
+   schedule it yourself and call OnReload() - that is what fires the change
+   token that makes IOptionsMonitor wake up. Point back at the three
+   interfaces slide when you say it.
+2. A provider that THROWS in Load() takes the app down at startup. That
+   sounds like a bug and is frequently the feature - it is the same
+   fail-fast posture as ValidateOnStart.
+3. Good real targets: a database-backed provider, a .env reader, a provider
+   that pulls from your own internal config service. Bad target: anything
+   you could have done with the eleven providers that already exist.
+Do not live-code this. Show the shape, say the three things, point at d25 in
+the repo. It is interesting to about six people in the room and they will
+read the code later.</a:t>
             </a:r>
             <a:endParaRPr lang="en-US" dirty="0"/>
           </a:p>
@@ -3834,38 +3861,15 @@
           <a:p>
             <a:r>
               <a:rPr lang="en-US" dirty="0"/>
-              <a:t>[59-64 min] APP CONFIGURATION - S4.6
-Snippet: lifted from d20. No Azure dependency now.
-60-min: keep, compressed - labels and the sentinel key are the two ideas
-Packages: Microsoft.Extensions.Configuration.AzureAppConfiguration
-        + Microsoft.Azure.AppConfiguration.AspNetCore (refresh middleware)
-THE SIX THINGS WORTH SAYING:
-1. LABELS ARE THE ENVIRONMENT AXIS. One store, Development/Staging/Production
-   labels, Selected in order so labeled values overlay unlabeled defaults.
-   Select("Weather:*", LabelFilter.Null) then Select("Weather:*", envName).
-   Load a SLICE, not the whole store.
-2. REFRESH IS NOT AUTOMATIC. You must call ConfigureRefresh and then RegisterAll()
-   or Register(key). Feature flags are the exception - UseFeatureFlags self-registers.
-   This trips up everyone exactly once.
-3. REFRESH IS ACTIVITY-DRIVEN in ASP.NET Core. The middleware checks on an
-   incoming request once the interval has elapsed. AN IDLE APP NEVER REFRESHES.
-   Background services must inject IConfigurationRefresherProvider and call
-   TryRefreshAsync() themselves. Say this slowly - it's the #1 surprise.
-   Also: app.UseAzureAppConfiguration() must go EARLY in the pipeline, or another
-   middleware short-circuits before refresh ever runs.
-4. THE SENTINEL KEY PATTERN - the thing to actually take home.
-   Instead of RegisterAll(), watch ONE key you bump AFTER every other edit lands:
-     refresh.Register("Weather:Sentinel", refreshAll: true)
-   So a multi-key change is picked up ATOMICALLY rather than half-applied.
-   This is the direct answer to stage three's signature failure.
-5. FAILURE MODE IS GRACEFUL - a failed refresh keeps last known-good and retries.
-   A failed connection AT STARTUP is not graceful. That's a crash unless you
-   handle it.
-6. KEY VAULT REFERENCES live in the store as pointers with a distinct content
-   type; ConfigureKeyVault dereferences them. Give them their OWN cadence with
-   SetSecretRefreshInterval(key, TimeSpan) - a rotated secret is otherwise cached
-   forever. (Same rotation argument as the Key Vault slide.)
-Also exists: Map() rewrites keys on the way in, e.g. App__Settings__X -&gt; App:Settings:X.</a:t>
+              <a:t>[59-64 min] STAGE 3 - SHARED
+60-min: compress to 3 min - labels + sentinel key only
+THE PROBLEM THIS STAGE SOLVES:
+Many apps and instances; values that change without a deploy.
+Note this block is only 5 minutes even at 90, because S6 now carries App
+Configuration's most interesting behavior. Show the sentinel key here and let
+feature flags do the rest.
+Close on the signature failure - "it changed, but not everywhere at once" -
+which is what forces the discipline: sentinel keys, validation, flag hygiene.</a:t>
             </a:r>
             <a:endParaRPr lang="en-US" dirty="0"/>
           </a:p>
@@ -3953,31 +3957,49 @@
           <a:p>
             <a:r>
               <a:rPr lang="en-US" dirty="0"/>
-              <a:t>[S8] RELOAD SEMANTICS
-60-min: show the table, do NOT walk it
-  appsettings*.json   YES, when reloadOnChange: true (host default)  FileSystemWatcher
-  User secrets        YES                                            file watcher
-  Environment vars    NO - read once at startup
-  Command line        NO - read once at startup
-  Azure Key Vault     only if ReloadInterval is set (default: NEVER) polling
-  App Configuration   YES, with ConfigureRefresh + a trigger         polling on activity
-  Key-per-file        YES (file provider)                            file watcher
-  In-memory           NO
-  Custom              your call - OnReload()
-FOUR CONSEQUENCES - say these out loud, the table alone doesn't land them:
-- Changing an environment variable on a running container does NOTHING.
-  Restart the container.
-- reloadOnChange on a Kubernetes ConfigMap mount is UNRELIABLE - symlink swaps,
-  not in-place writes. The watcher may or may not see them. Treat restart as the
-  contract.
-- A single file save often fires the watcher TWICE (write + metadata). Debounce
-  anything expensive hanging off OnChange.
-- "CONFIG RELOADED" DOES NOT MEAN "APP RECONFIGURED." Reloading configuration
-  does not reconfigure things that read it once at startup: Kestrel endpoints,
-  the DI graph, HttpClient handler pipelines.
-RULE OF THUMB (S7.3 #4): prefer restart to hot reload unless hot reload is a
-requirement someone actually asked for. Hot reload is a distributed-systems
-problem wearing a config hat.</a:t>
+              <a:t>[59-64 min] APP CONFIGURATION - S4.6
+Snippet: lifted from d20. No Azure dependency now.
+60-min: keep, compressed - labels and the sentinel key are the two ideas
+Packages: Microsoft.Extensions.Configuration.AzureAppConfiguration
+        + Microsoft.Azure.AppConfiguration.AspNetCore (refresh middleware)
+THE SIX THINGS WORTH SAYING:
+1. LABELS ARE THE ENVIRONMENT AXIS. One store, Development/Staging/Production
+   labels, Selected in order so labeled values overlay unlabeled defaults.
+   Select("Weather:*", LabelFilter.Null) then Select("Weather:*", envName).
+   Load a SLICE, not the whole store.
+2. REFRESH IS NOT AUTOMATIC. You must call ConfigureRefresh and then RegisterAll()
+   or Register(key). Feature flags are the exception - UseFeatureFlags self-registers.
+   This trips up everyone exactly once.
+3. REFRESH IS ACTIVITY-DRIVEN in ASP.NET Core. The middleware checks on an
+   incoming request once the interval has elapsed. AN IDLE APP NEVER REFRESHES.
+   It is also ASYNCHRONOUS: the request that TRIGGERS the refresh does not
+   block on it and may still serve the OLD values. Later requests see the new
+   ones. Say this - people assume the triggering request gets the update.
+   Background services must inject IConfigurationRefresherProvider and call
+   TryRefreshAsync() themselves. Say this slowly - it's the #1 surprise.
+   Also: app.UseAzureAppConfiguration() must go EARLY in the pipeline, or another
+   middleware short-circuits before refresh ever runs.
+4. THE SENTINEL KEY PATTERN - the thing to actually take home.
+   Instead of RegisterAll(), watch ONE key you bump AFTER every other edit lands:
+     refresh.Register("Weather:Sentinel", refreshAll: true)
+   Update the sentinel LAST. Each instance then reloads the selected values
+   together in one refresh, so no single process sees a half-applied edit.
+   Do NOT say "atomic" - the store is not transactional across keys, and
+   instances refresh independently, so they do not all switch at the same
+   moment. It answers "half-applied", not "everywhere at once".
+5. FAILURE MODE IS GRACEFUL - a failed refresh keeps last known-good and retries.
+   STARTUP now retries with backoff, bounded by ConfigureStartupOptions =&gt;
+   options.Timeout. If it still cannot load when that budget runs out the
+   failure surfaces during startup and normally aborts the process. So
+   "a failed connection at startup crashes you" is true but incomplete -
+   it retries first.
+6. KEY VAULT REFERENCES live in the store as pointers with a distinct content
+   type; ConfigureKeyVault dereferences them. Give them their OWN cadence with
+   SetSecretRefreshInterval(key, TimeSpan) - a rotated secret is otherwise cached
+   forever. MINIMUM is one minute; anything shorter is floored. This is the
+   App Configuration provider resolving Key Vault REFERENCES, not the
+   standalone Key Vault provider, which has its own ReloadInterval. (Same rotation argument as the Key Vault slide.)
+Also exists: Map() rewrites keys on the way in, e.g. App__Settings__X -&gt; App:Settings:X.</a:t>
             </a:r>
             <a:endParaRPr lang="en-US" dirty="0"/>
           </a:p>
@@ -4163,21 +4185,31 @@
           <a:p>
             <a:r>
               <a:rPr lang="en-US" dirty="0"/>
-              <a:t>[64-84 min] FEATURE FLAGS - S6
-60-min: 10 min - S6.1-6.4 plus S6.6. Cut variants entirely.
-ROUGHLY A QUARTER OF THE TALK. Not an appendix to Azure App Configuration - this
-is the second half of the thesis from S1.3, and the only part of the
-configuration story where a value changes while someone is watching.
-NOTE FOR THE ABSTRACT: the submitted abstract does not mention feature flags. It
-only implies them via "Azure App Configuration." If this abstract ever gets
-resubmitted, add a clause. At 60 minutes especially, 20% of the room's time is
-going somewhere the abstract didn't promise.
-Block breakdown at 90:
-  64-67  S6.1  a flag is just configuration
-  67-72  S6.2-6.3  flags with zero cloud            d28
-  72-77  S6.4  filters + the per-call gotcha        d29, d30
-  77-80  S6.5  variants                             d31 (optional)
-  80-84  S6.6 flag debt + S6.8 counterargument      d32</a:t>
+              <a:t>[S8] RELOAD SEMANTICS
+60-min: show the table, do NOT walk it
+  appsettings*.json   YES, when reloadOnChange: true (host default)  FileSystemWatcher
+  User secrets        YES                                            file watcher
+  Environment vars    NO - read once at startup
+  Command line        NO - read once at startup
+  Azure Key Vault     only if ReloadInterval is set (default: NEVER) polling
+  App Configuration   YES, with ConfigureRefresh + a trigger         polling on activity
+  Key-per-file        ONLY with the 4-arg overload                   file watcher
+  In-memory           NO
+  Custom              your call - OnReload()
+FOUR CONSEQUENCES - say these out loud, the table alone doesn't land them:
+- Changing an environment variable on a running container does NOTHING.
+  Restart the container.
+- reloadOnChange on a Kubernetes ConfigMap mount is UNRELIABLE - symlink swaps,
+  not in-place writes. The watcher may or may not see them. Treat restart as the
+  contract.
+- A single file save often fires the watcher TWICE (write + metadata). Debounce
+  anything expensive hanging off OnChange.
+- "CONFIG RELOADED" DOES NOT MEAN "APP RECONFIGURED." Reloading configuration
+  does not reconfigure things that read it once at startup: Kestrel endpoints,
+  the DI graph, HttpClient handler pipelines.
+RULE OF THUMB (S7.3 #4): prefer restart to hot reload unless hot reload is a
+requirement someone actually asked for. Hot reload is a distributed-systems
+problem wearing a config hat.</a:t>
             </a:r>
             <a:endParaRPr lang="en-US" dirty="0"/>
           </a:p>
@@ -4265,6 +4297,108 @@
           <a:p>
             <a:r>
               <a:rPr lang="en-US" dirty="0"/>
+              <a:t>[64-84 min] FEATURE FLAGS - S6
+60-min: 10 min - S6.1-6.4 plus S6.6. Cut variants entirely.
+ROUGHLY A QUARTER OF THE TALK. Not an appendix to Azure App Configuration - this
+is the second half of the thesis from S1.3, and the only part of the
+configuration story where a value changes while someone is watching.
+NOTE FOR THE ABSTRACT: the submitted abstract does not mention feature flags. It
+only implies them via "Azure App Configuration." If this abstract ever gets
+resubmitted, add a clause. At 60 minutes especially, 20% of the room's time is
+going somewhere the abstract didn't promise.
+Block breakdown at 90:
+  64-67  S6.1  a flag is just configuration
+  67-72  S6.2-6.3  flags with zero cloud            d28
+  72-77  S6.4  filters + the per-call gotcha        d29, d30
+  77-80  S6.5  variants                             d31 (optional)
+  80-84  S6.6 flag debt + S6.8 counterargument      d32</a:t>
+            </a:r>
+            <a:endParaRPr lang="en-US" dirty="0"/>
+          </a:p>
+        </p:txBody>
+      </p:sp>
+      <p:sp>
+        <p:nvSpPr>
+          <p:cNvPr id="4" name="Slide Number Placeholder 3"/>
+          <p:cNvSpPr>
+            <a:spLocks noGrp="1"/>
+          </p:cNvSpPr>
+          <p:nvPr>
+            <p:ph type="sldNum" sz="quarter" idx="10"/>
+          </p:nvPr>
+        </p:nvSpPr>
+        <p:spPr/>
+        <p:txBody>
+          <a:bodyPr/>
+          <a:lstStyle/>
+          <a:p>
+            <a:fld id="{F7021451-1387-4CA6-816F-3879F97B5CBC}" type="slidenum">
+              <a:rPr lang="en-US"/>
+              <a:t>41</a:t>
+            </a:fld>
+            <a:endParaRPr lang="en-US"/>
+          </a:p>
+        </p:txBody>
+      </p:sp>
+    </p:spTree>
+    <p:extLst>
+      <p:ext uri="{BB962C8B-B14F-4D97-AF65-F5344CB8AC3E}">
+        <p14:creationId xmlns:p14="http://schemas.microsoft.com/office/powerpoint/2010/main" val="1024086991"/>
+      </p:ext>
+    </p:extLst>
+  </p:cSld>
+  <p:clrMapOvr>
+    <a:masterClrMapping/>
+  </p:clrMapOvr>
+</p:notes>
+</file>
+
+<file path=ppt/notesSlides/notesSlide42.xml><?xml version="1.0" encoding="utf-8"?>
+<p:notes xmlns:a="http://schemas.openxmlformats.org/drawingml/2006/main" xmlns:r="http://schemas.openxmlformats.org/officeDocument/2006/relationships" xmlns:p="http://schemas.openxmlformats.org/presentationml/2006/main">
+  <p:cSld>
+    <p:spTree>
+      <p:nvGrpSpPr>
+        <p:cNvPr id="1" name=""/>
+        <p:cNvGrpSpPr/>
+        <p:nvPr/>
+      </p:nvGrpSpPr>
+      <p:grpSpPr>
+        <a:xfrm>
+          <a:off x="0" y="0"/>
+          <a:ext cx="0" cy="0"/>
+          <a:chOff x="0" y="0"/>
+          <a:chExt cx="0" cy="0"/>
+        </a:xfrm>
+      </p:grpSpPr>
+      <p:sp>
+        <p:nvSpPr>
+          <p:cNvPr id="2" name="Slide Image Placeholder 1"/>
+          <p:cNvSpPr>
+            <a:spLocks noGrp="1" noRot="1" noChangeAspect="1"/>
+          </p:cNvSpPr>
+          <p:nvPr>
+            <p:ph type="sldImg"/>
+          </p:nvPr>
+        </p:nvSpPr>
+        <p:spPr/>
+      </p:sp>
+      <p:sp>
+        <p:nvSpPr>
+          <p:cNvPr id="3" name="Notes Placeholder 2"/>
+          <p:cNvSpPr>
+            <a:spLocks noGrp="1"/>
+          </p:cNvSpPr>
+          <p:nvPr>
+            <p:ph type="body" idx="1"/>
+          </p:nvPr>
+        </p:nvSpPr>
+        <p:spPr/>
+        <p:txBody>
+          <a:bodyPr/>
+          <a:lstStyle/>
+          <a:p>
+            <a:r>
+              <a:rPr lang="en-US" dirty="0"/>
               <a:t>[64-67 min] FLAGS ARE CONFIGURATION - S6.1
 60-min: keep - this is the load-bearing idea of the whole flags block
 Microsoft.FeatureManagement IS BUILT ON IConfiguration.
@@ -4306,7 +4440,7 @@
           <a:p>
             <a:fld id="{F7021451-1387-4CA6-816F-3879F97B5CBC}" type="slidenum">
               <a:rPr lang="en-US"/>
-              <a:t>41</a:t>
+              <a:t>42</a:t>
             </a:fld>
             <a:endParaRPr lang="en-US"/>
           </a:p>
@@ -4325,7 +4459,7 @@
 </p:notes>
 </file>
 
-<file path=ppt/notesSlides/notesSlide42.xml><?xml version="1.0" encoding="utf-8"?>
+<file path=ppt/notesSlides/notesSlide43.xml><?xml version="1.0" encoding="utf-8"?>
 <p:notes xmlns:a="http://schemas.openxmlformats.org/drawingml/2006/main" xmlns:r="http://schemas.openxmlformats.org/officeDocument/2006/relationships" xmlns:p="http://schemas.openxmlformats.org/presentationml/2006/main">
   <p:cSld>
     <p:spTree>
@@ -4423,116 +4557,6 @@
           <a:p>
             <a:fld id="{F7021451-1387-4CA6-816F-3879F97B5CBC}" type="slidenum">
               <a:rPr lang="en-US"/>
-              <a:t>42</a:t>
-            </a:fld>
-            <a:endParaRPr lang="en-US"/>
-          </a:p>
-        </p:txBody>
-      </p:sp>
-    </p:spTree>
-    <p:extLst>
-      <p:ext uri="{BB962C8B-B14F-4D97-AF65-F5344CB8AC3E}">
-        <p14:creationId xmlns:p14="http://schemas.microsoft.com/office/powerpoint/2010/main" val="1024086991"/>
-      </p:ext>
-    </p:extLst>
-  </p:cSld>
-  <p:clrMapOvr>
-    <a:masterClrMapping/>
-  </p:clrMapOvr>
-</p:notes>
-</file>
-
-<file path=ppt/notesSlides/notesSlide43.xml><?xml version="1.0" encoding="utf-8"?>
-<p:notes xmlns:a="http://schemas.openxmlformats.org/drawingml/2006/main" xmlns:r="http://schemas.openxmlformats.org/officeDocument/2006/relationships" xmlns:p="http://schemas.openxmlformats.org/presentationml/2006/main">
-  <p:cSld>
-    <p:spTree>
-      <p:nvGrpSpPr>
-        <p:cNvPr id="1" name=""/>
-        <p:cNvGrpSpPr/>
-        <p:nvPr/>
-      </p:nvGrpSpPr>
-      <p:grpSpPr>
-        <a:xfrm>
-          <a:off x="0" y="0"/>
-          <a:ext cx="0" cy="0"/>
-          <a:chOff x="0" y="0"/>
-          <a:chExt cx="0" cy="0"/>
-        </a:xfrm>
-      </p:grpSpPr>
-      <p:sp>
-        <p:nvSpPr>
-          <p:cNvPr id="2" name="Slide Image Placeholder 1"/>
-          <p:cNvSpPr>
-            <a:spLocks noGrp="1" noRot="1" noChangeAspect="1"/>
-          </p:cNvSpPr>
-          <p:nvPr>
-            <p:ph type="sldImg"/>
-          </p:nvPr>
-        </p:nvSpPr>
-        <p:spPr/>
-      </p:sp>
-      <p:sp>
-        <p:nvSpPr>
-          <p:cNvPr id="3" name="Notes Placeholder 2"/>
-          <p:cNvSpPr>
-            <a:spLocks noGrp="1"/>
-          </p:cNvSpPr>
-          <p:nvPr>
-            <p:ph type="body" idx="1"/>
-          </p:nvPr>
-        </p:nvSpPr>
-        <p:spPr/>
-        <p:txBody>
-          <a:bodyPr/>
-          <a:lstStyle/>
-          <a:p>
-            <a:r>
-              <a:rPr lang="en-US" dirty="0"/>
-              <a:t>[72-77 min] FILTERS - S6.4
-Snippets: lifted from d29 and d30
-60-min: KEEP THE GOTCHA even if you cut the filter catalogue. Never-cut list.
-BUILT IN, registered automatically by AddFeatureManagement() - except targeting,
-which needs .WithTargeting&lt;T&gt;():
-  Microsoft.Percentage   progressive rollout: 5% -&gt; 25% -&gt; 100%
-  Microsoft.TimeWindow   scheduled enable/disable, Recurrence for daily/weekly
-  Microsoft.Targeting    named users, groups, per-group percentages, exclusions
-Targeting needs an ITargetingContextAccessor so the library knows who the current
-user is:
-  services.AddFeatureManagement().WithTargeting&lt;HttpContextTargetingContextAccessor&gt;();
-*** THE SLIDE THAT EARNS ITS OWN MINUTE ***
-PLAIN Microsoft.Percentage IS EVALUATED PER CALL, NOT PER USER.
-A 50% flag checked twice in one request can answer DIFFERENTLY EACH TIME. A user
-can watch the feature flicker between page loads. Nav bar says new checkout,
-checkout page says old.
-THIS IS THE MOST COMMON FEATURE-FLAG BUG IN THE WILD.
-THE FIX: targeting, or variant allocation with a seed. That's what gives a STABLE
-per-user assignment.
-d29 is the flicker, d30 the stable version. If you only have room for one,
-show the flicker and describe the fix - the bug is the memorable half.
-CUSTOM FILTERS: implement IFeatureFilter (one method, EvaluateAsync), register
-with .AddFeatureFilter&lt;TenantFilter&gt;(). Good example: a flag enabled per tenant.</a:t>
-            </a:r>
-            <a:endParaRPr lang="en-US" dirty="0"/>
-          </a:p>
-        </p:txBody>
-      </p:sp>
-      <p:sp>
-        <p:nvSpPr>
-          <p:cNvPr id="4" name="Slide Number Placeholder 3"/>
-          <p:cNvSpPr>
-            <a:spLocks noGrp="1"/>
-          </p:cNvSpPr>
-          <p:nvPr>
-            <p:ph type="sldNum" sz="quarter" idx="10"/>
-          </p:nvPr>
-        </p:nvSpPr>
-        <p:spPr/>
-        <p:txBody>
-          <a:bodyPr/>
-          <a:lstStyle/>
-          <a:p>
-            <a:fld id="{F7021451-1387-4CA6-816F-3879F97B5CBC}" type="slidenum">
-              <a:rPr lang="en-US"/>
               <a:t>43</a:t>
             </a:fld>
             <a:endParaRPr lang="en-US"/>
@@ -4598,23 +4622,29 @@
           <a:p>
             <a:r>
               <a:rPr lang="en-US" dirty="0"/>
-              <a:t>[77-80 min] VARIANTS - S6.5
-Snippet: lifted from d31 - optional even at 90
-60-min: CUT. Mention in one sentence that flags can return values, move on.
-A variant flag returns a VALUE - string, number, bool, or a whole configuration
-object - instead of a boolean. This is where feature flags and the options
-pattern meet, which is why it belongs in THIS talk and not a generic flags talk.
-  Variant variant = await features.GetVariantAsync("CheckoutLayout", ct);
-  variant.Configuration.Bind(settings);   // it's an IConfigurationSection -
-                                          // bind it like anything else
-That last line is the whole point. Land it and you can move on.
-ALLOCATION is evaluated in order: user -&gt; group -&gt; percentile, falling back to
-default_when_enabled, or default_when_disabled when the flag is off.
-A SEED makes percentile assignment stable, and consistent ACROSS flags that share
-the same seed. (This is the fix for the S6.4 gotcha.)
-status_override (None / Enabled / Disabled) lets a variant flag also answer
-IsEnabledAsync, so you can adopt variants without rewriting existing call sites.
-You cannot override a flag whose enabled is false.</a:t>
+              <a:t>[72-77 min] FILTERS - S6.4
+Snippets: lifted from d29 and d30
+60-min: KEEP THE GOTCHA even if you cut the filter catalogue. Never-cut list.
+BUILT IN, registered automatically by AddFeatureManagement() - except targeting,
+which needs .WithTargeting&lt;T&gt;():
+  Microsoft.Percentage   progressive rollout: 5% -&gt; 25% -&gt; 100%
+  Microsoft.TimeWindow   scheduled enable/disable, Recurrence for daily/weekly
+  Microsoft.Targeting    named users, groups, per-group percentages, exclusions
+Targeting needs an ITargetingContextAccessor so the library knows who the current
+user is:
+  services.AddFeatureManagement().WithTargeting&lt;HttpContextTargetingContextAccessor&gt;();
+*** THE SLIDE THAT EARNS ITS OWN MINUTE ***
+PLAIN Microsoft.Percentage IS EVALUATED PER CALL, NOT PER USER.
+A 50% flag checked twice in one request can answer DIFFERENTLY EACH TIME. A user
+can watch the feature flicker between page loads. Nav bar says new checkout,
+checkout page says old.
+THIS IS THE MOST COMMON FEATURE-FLAG BUG IN THE WILD.
+THE FIX: targeting, or variant allocation with a seed. That's what gives a STABLE
+per-user assignment.
+d29 is the flicker, d30 the stable version. If you only have room for one,
+show the flicker and describe the fix - the bug is the memorable half.
+CUSTOM FILTERS: implement IFeatureFilter (one method, EvaluateAsync), register
+with .AddFeatureFilter&lt;TenantFilter&gt;(). Good example: a flag enabled per tenant.</a:t>
             </a:r>
             <a:endParaRPr lang="en-US" dirty="0"/>
           </a:p>
@@ -4702,33 +4732,23 @@
           <a:p>
             <a:r>
               <a:rPr lang="en-US" dirty="0"/>
-              <a:t>[80-84 min] FLAG DEBT - S6.6
-Snippet: lifted from d32, the flag inventory endpoint
-60-min: NEVER CUT. This is the closing argument.
-THIS SECTION IS WHAT SEPARATES THE TALK FROM THE DOCUMENTATION.
-It's the thing nobody else in the room will say.
-Every flag is a permanent if-statement with an owner and an expiry date.
-- A FLAG DOUBLES YOUR CODE PATHS. Ten live flags is up to 1,024 nominal
-  combinations. You test maybe three of them.
-- NAME FLAGS FOR THEIR REMOVAL.
-  "NewCheckout" never gets deleted. It'll be there in 2031 and it will still be
-  called New.
-  "Checkout_V2_Rollout_2026Q1" files its own expiry.
-- CATEGORIZE ON CREATION - lifetime differs by an ORDER OF MAGNITUDE:
-    release     days to weeks    delete after rollout
-    experiment  weeks            delete after the decision
-    ops / kill  permanent        and that's fine
-    permission  permanent        and arguably not a flag at all - that's authorization
-- DELETING A FLAG IS A CODE CHANGE, NOT A CONFIG CHANGE. Turning it off in the
-  portal and walking away leaves the dead branch compiling forever. This is the
-  sentence people need to hear.
-- INVENTORY THEM. GetFeatureNamesAsync() enumerates every flag the app knows
-  about. A health endpoint listing flags and their current state is a five-minute
-  build and THE ONE PEOPLE WILL ACTUALLY STEAL. That's d32.
-TESTING (S6.7): flags are configuration, so the in-memory provider is the whole
-story - or substitute IVariantFeatureManager outright.
-THE RULE: test BOTH SIDES of every live flag, or you're shipping an untested
-branch behind a switch someone can flip at 2am.</a:t>
+              <a:t>[77-80 min] VARIANTS - S6.5
+Snippet: lifted from d31 - optional even at 90
+60-min: CUT. Mention in one sentence that flags can return values, move on.
+A variant flag returns a VALUE - string, number, bool, or a whole configuration
+object - instead of a boolean. This is where feature flags and the options
+pattern meet, which is why it belongs in THIS talk and not a generic flags talk.
+  Variant variant = await features.GetVariantAsync("CheckoutLayout", ct);
+  variant.Configuration.Bind(settings);   // it's an IConfigurationSection -
+                                          // bind it like anything else
+That last line is the whole point. Land it and you can move on.
+ALLOCATION is evaluated in order: user -&gt; group -&gt; percentile, falling back to
+default_when_enabled, or default_when_disabled when the flag is off.
+A SEED makes percentile assignment stable, and consistent ACROSS flags that share
+the same seed. (This is the fix for the S6.4 gotcha.)
+status_override (None / Enabled / Disabled) lets a variant flag also answer
+IsEnabledAsync, so you can adopt variants without rewriting existing call sites.
+You cannot override a flag whose enabled is false.</a:t>
             </a:r>
             <a:endParaRPr lang="en-US" dirty="0"/>
           </a:p>
@@ -4816,21 +4836,33 @@
           <a:p>
             <a:r>
               <a:rPr lang="en-US" dirty="0"/>
-              <a:t>[80-84 min] THE COUNTERARGUMENT - S6.8
-60-min: keep - it's 45 seconds and it closes the loop
-Someone in the room is going to think it, so say it first:
-FLAGS CONVERT A DEPLOYMENT PROBLEM INTO A RUNTIME PROBLEM.
-You gain instant rollback. You lose "the code that ran is the code in the commit."
-A flag flipped in a portal is a PRODUCTION CHANGE WITH NO PR, NO REVIEW, AND NO
-DIFF - unless the store keeps history and you treat flag changes as deploys.
-Azure App Configuration keeps revisions. Use them.
-THE THROUGH-LINE CLOSES HERE:
-That is the SAME TRADE as S1.2's build-time-to-runtime move, one level up.
-Constants -&gt; web.config -&gt; Generic Host was trading build-time for runtime.
-Deploys -&gt; feature flags is the same trade again, one level up.
-Call back to the history slide explicitly. This is the moment the talk becomes
-one argument instead of a tour of providers.
-End the flags block on JUDGMENT, not tooling.</a:t>
+              <a:t>[80-84 min] FLAG DEBT - S6.6
+Snippet: lifted from d32, the flag inventory endpoint
+60-min: NEVER CUT. This is the closing argument.
+THIS SECTION IS WHAT SEPARATES THE TALK FROM THE DOCUMENTATION.
+It's the thing nobody else in the room will say.
+Every flag is a permanent if-statement with an owner and an expiry date.
+- A FLAG DOUBLES YOUR CODE PATHS. Ten live flags is up to 1,024 nominal
+  combinations. You test maybe three of them.
+- NAME FLAGS FOR THEIR REMOVAL.
+  "NewCheckout" never gets deleted. It'll be there in 2031 and it will still be
+  called New.
+  "Checkout_V2_Rollout_2026Q1" files its own expiry.
+- CATEGORIZE ON CREATION - lifetime differs by an ORDER OF MAGNITUDE:
+    release     days to weeks    delete after rollout
+    experiment  weeks            delete after the decision
+    ops / kill  permanent        and that's fine
+    permission  permanent        and arguably not a flag at all - that's authorization
+- DELETING A FLAG IS A CODE CHANGE, NOT A CONFIG CHANGE. Turning it off in the
+  portal and walking away leaves the dead branch compiling forever. This is the
+  sentence people need to hear.
+- INVENTORY THEM. GetFeatureNamesAsync() enumerates every flag the app knows
+  about. A health endpoint listing flags and their current state is a five-minute
+  build and THE ONE PEOPLE WILL ACTUALLY STEAL. That's d32.
+TESTING (S6.7): flags are configuration, so the in-memory provider is the whole
+story - or substitute IVariantFeatureManager outright.
+THE RULE: test BOTH SIDES of every live flag, or you're shipping an untested
+branch behind a switch someone can flip at 2am.</a:t>
             </a:r>
             <a:endParaRPr lang="en-US" dirty="0"/>
           </a:p>
@@ -4918,22 +4950,21 @@
           <a:p>
             <a:r>
               <a:rPr lang="en-US" dirty="0"/>
-              <a:t>[84-87 min] THREE BUCKETS - S7.1
-60-min: keep
-  NON-SECRET, PER-ENVIRONMENT
-    base URLs, timeouts, retry counts, log levels, feature toggles
-    -&gt; appsettings.{Env}.json in the repo, or App Configuration
-  SECRET
-    API keys, connection strings with passwords, client secrets
-    -&gt; user secrets (dev) -&gt; Key Vault or the platform's secret store (prod)
-  PER-INSTANCE / PER-DEPLOYMENT
-    environment name, instance id, port, region
-    -&gt; environment variables, set by the platform
-THE LINE TO SAY:
-"If a value is in the wrong bucket, no amount of provider tuning fixes it."
-That's the diagnostic. Most configuration pain people bring to you is a bucketing
-error, not a provider error - and they've been trying to solve it with provider
-order.</a:t>
+              <a:t>[80-84 min] THE COUNTERARGUMENT - S6.8
+60-min: keep - it's 45 seconds and it closes the loop
+Someone in the room is going to think it, so say it first:
+FLAGS CONVERT A DEPLOYMENT PROBLEM INTO A RUNTIME PROBLEM.
+You gain instant rollback. You lose "the code that ran is the code in the commit."
+A flag flipped in a portal is a PRODUCTION CHANGE WITH NO PR, NO REVIEW, AND NO
+DIFF - unless the store keeps history and you treat flag changes as deploys.
+Azure App Configuration keeps revisions. Use them.
+THE THROUGH-LINE CLOSES HERE:
+That is the SAME TRADE as S1.2's build-time-to-runtime move, one level up.
+Constants -&gt; web.config -&gt; Generic Host was trading build-time for runtime.
+Deploys -&gt; feature flags is the same trade again, one level up.
+Call back to the history slide explicitly. This is the moment the talk becomes
+one argument instead of a tour of providers.
+End the flags block on JUDGMENT, not tooling.</a:t>
             </a:r>
             <a:endParaRPr lang="en-US" dirty="0"/>
           </a:p>
@@ -5021,33 +5052,22 @@
           <a:p>
             <a:r>
               <a:rPr lang="en-US" dirty="0"/>
-              <a:t>[84-87 min] CHOOSING A STRATEGY - S7.2, S7.3
-60-min: keep - this is the one people photograph. Pause on it.
-LEAVE THIS UP LONGER THAN FEELS COMFORTABLE. Count to five. Let them get the shot.
-  ASP.NET Core on App Service   JSON + App Service settings; KV refs
-                                App Service settings RESTART the app;
-                                App Configuration doesn't
-  Container / AKS               JSON baked in + orchestrator env vars;
-                                key-per-file mount or KV via workload identity
-  Many microservices            App Configuration, labels + per-app key prefix;
-                                KV references; sentinel key + refresh
-  Worker / background service   JSON + env vars; KV via managed identity;
-                                IOptionsMonitor + explicit TryRefreshAsync
-  Console / CLI                 JSON + command line + env vars; user secrets in
-                                dev; NO hot reload - short-lived process
-  Desktop (WinForms/WPF/MAUI)   JSON next to the EXE + per-user AppData;
-                                NO SECRETS IN THE CLIENT
-SIX RULES OF THUMB (S7.3) - read 1, 2, and 5 aloud at minimum:
-  1. One artifact, many environments. A different binary per environment is
-     Web.Release.config again.
-  2. Commit defaults, never secrets. appsettings.json should be safe to publish.
-  3. Reach for cloud configuration when you have a REAL reason: more than one app
-     sharing values, or a need to change without a deploy. One app that redeploys
-     in five minutes does not need App Configuration.
-  4. Prefer restart to hot reload unless someone asked for hot reload.
-  5. Validate at startup, always. Cheapest guardrail on every strategy above.
-  6. Secrets get a rotation story or they aren't secure.
-Rule 2 is on the never-cut list at any talk length.</a:t>
+              <a:t>[84-87 min] THREE BUCKETS - S7.1
+60-min: keep
+  NON-SECRET, PER-ENVIRONMENT
+    base URLs, timeouts, retry counts, log levels, feature toggles
+    -&gt; appsettings.{Env}.json in the repo, or App Configuration
+  SECRET
+    API keys, connection strings with passwords, client secrets
+    -&gt; user secrets (dev) -&gt; Key Vault or the platform's secret store (prod)
+  PER-INSTANCE / PER-DEPLOYMENT
+    environment name, instance id, port, region
+    -&gt; environment variables, set by the platform
+THE LINE TO SAY:
+"If a value is in the wrong bucket, no amount of provider tuning fixes it."
+That's the diagnostic. Most configuration pain people bring to you is a bucketing
+error, not a provider error - and they've been trying to solve it with provider
+order.</a:t>
             </a:r>
             <a:endParaRPr lang="en-US" dirty="0"/>
           </a:p>
@@ -5135,24 +5155,33 @@
           <a:p>
             <a:r>
               <a:rPr lang="en-US" dirty="0"/>
-              <a:t>[87-90 min] ANTI-PATTERNS - S10
-60-min: keep, rapid-fire
-Read these FAST. Don't explain them - by now the audience has seen every one.
-The point is recognition, not instruction. If they're calling out the four
-failure modes before you do, this slide is working.
- 1. Secrets committed in appsettings.json - or worse, appsettings.Production.json.
- 2. IConfiguration injected into business classes instead of bound options.
- 3. config["Some:Key"]! with a null-forgiving operator and no validation.
- 4. IOptionsSnapshot&lt;T&gt; in a singleton.
- 5. IOptionsMonitor&lt;T&gt;.CurrentValue captured in a constructor field.
- 6. Building a throwaway ConfigurationBuilder mid-request to "get a fresh value."
- 7. Calling WebApplication.CreateBuilder() a second time just to read configuration.
- 8. if (env.IsProduction()) branches in code instead of environment-specific
-    configuration VALUES.
- 9. One Key Vault for every app and environment, separated by secret-name prefixes.
-10. Assuming an array in appsettings.Production.json replaces the base array.
-    It doesn't. (Callback to the array slide - they'll remember.)
-11. Logging GetDebugView() without redaction.</a:t>
+              <a:t>[84-87 min] CHOOSING A STRATEGY - S7.2, S7.3
+60-min: keep - this is the one people photograph. Pause on it.
+LEAVE THIS UP LONGER THAN FEELS COMFORTABLE. Count to five. Let them get the shot.
+  ASP.NET Core on App Service   JSON + App Service settings; KV refs
+                                App Service settings RESTART the app;
+                                App Configuration doesn't
+  Container / AKS               JSON baked in + orchestrator env vars;
+                                key-per-file mount or KV via workload identity
+  Many microservices            App Configuration, labels + per-app key prefix;
+                                KV references; sentinel key + refresh
+  Worker / background service   JSON + env vars; KV via managed identity;
+                                IOptionsMonitor + explicit TryRefreshAsync
+  Console / CLI                 JSON + command line + env vars; user secrets in
+                                dev; NO hot reload - short-lived process
+  Desktop (WinForms/WPF/MAUI)   JSON next to the EXE + per-user AppData;
+                                NO SECRETS IN THE CLIENT
+SIX RULES OF THUMB (S7.3) - read 1, 2, and 5 aloud at minimum:
+  1. One artifact, many environments. A different binary per environment is
+     Web.Release.config again.
+  2. Commit defaults, never secrets. appsettings.json should be safe to publish.
+  3. Reach for cloud configuration when you have a REAL reason: more than one app
+     sharing values, or a need to change without a deploy. One app that redeploys
+     in five minutes does not need App Configuration.
+  4. Prefer restart to hot reload unless someone asked for hot reload.
+  5. Validate at startup, always. Cheapest guardrail on every strategy above.
+  6. Secrets get a rotation story or they aren't secure.
+Rule 2 is on the never-cut list at any talk length.</a:t>
             </a:r>
             <a:endParaRPr lang="en-US" dirty="0"/>
           </a:p>
@@ -5295,6 +5324,111 @@
 </file>
 
 <file path=ppt/notesSlides/notesSlide50.xml><?xml version="1.0" encoding="utf-8"?>
+<p:notes xmlns:a="http://schemas.openxmlformats.org/drawingml/2006/main" xmlns:r="http://schemas.openxmlformats.org/officeDocument/2006/relationships" xmlns:p="http://schemas.openxmlformats.org/presentationml/2006/main">
+  <p:cSld>
+    <p:spTree>
+      <p:nvGrpSpPr>
+        <p:cNvPr id="1" name=""/>
+        <p:cNvGrpSpPr/>
+        <p:nvPr/>
+      </p:nvGrpSpPr>
+      <p:grpSpPr>
+        <a:xfrm>
+          <a:off x="0" y="0"/>
+          <a:ext cx="0" cy="0"/>
+          <a:chOff x="0" y="0"/>
+          <a:chExt cx="0" cy="0"/>
+        </a:xfrm>
+      </p:grpSpPr>
+      <p:sp>
+        <p:nvSpPr>
+          <p:cNvPr id="2" name="Slide Image Placeholder 1"/>
+          <p:cNvSpPr>
+            <a:spLocks noGrp="1" noRot="1" noChangeAspect="1"/>
+          </p:cNvSpPr>
+          <p:nvPr>
+            <p:ph type="sldImg"/>
+          </p:nvPr>
+        </p:nvSpPr>
+        <p:spPr/>
+      </p:sp>
+      <p:sp>
+        <p:nvSpPr>
+          <p:cNvPr id="3" name="Notes Placeholder 2"/>
+          <p:cNvSpPr>
+            <a:spLocks noGrp="1"/>
+          </p:cNvSpPr>
+          <p:nvPr>
+            <p:ph type="body" idx="1"/>
+          </p:nvPr>
+        </p:nvSpPr>
+        <p:spPr/>
+        <p:txBody>
+          <a:bodyPr/>
+          <a:lstStyle/>
+          <a:p>
+            <a:r>
+              <a:rPr lang="en-US" dirty="0"/>
+              <a:t>[87-90 min] ANTI-PATTERNS - S10
+60-min: keep, rapid-fire
+Read these FAST. Don't explain them - by now the audience has seen every one.
+The point is recognition, not instruction. If they're calling out the four
+failure modes before you do, this slide is working.
+ 1. Secrets committed in appsettings.json - or worse, appsettings.Production.json.
+ 2. IConfiguration injected into business classes instead of bound options.
+ 3. config["Some:Key"]! with a null-forgiving operator and no validation.
+ 4. IOptionsSnapshot&lt;T&gt; in a singleton.
+ 5. IOptionsMonitor&lt;T&gt;.CurrentValue captured in a constructor field.
+ 6. Building a throwaway ConfigurationBuilder mid-request to "get a fresh value."
+ 7. Calling WebApplication.CreateBuilder() a second time just to read configuration.
+ 8. if (env.IsProduction()) branches in code instead of environment-specific
+    configuration VALUES.
+ 9. One Key Vault for every app and environment, separated by secret-name prefixes.
+10. Assuming an array in appsettings.Production.json replaces the base array.
+    It doesn't. (Callback to the array slide - they'll remember.)
+11. Logging GetDebugView() without redaction.</a:t>
+            </a:r>
+            <a:endParaRPr lang="en-US" dirty="0"/>
+          </a:p>
+        </p:txBody>
+      </p:sp>
+      <p:sp>
+        <p:nvSpPr>
+          <p:cNvPr id="4" name="Slide Number Placeholder 3"/>
+          <p:cNvSpPr>
+            <a:spLocks noGrp="1"/>
+          </p:cNvSpPr>
+          <p:nvPr>
+            <p:ph type="sldNum" sz="quarter" idx="10"/>
+          </p:nvPr>
+        </p:nvSpPr>
+        <p:spPr/>
+        <p:txBody>
+          <a:bodyPr/>
+          <a:lstStyle/>
+          <a:p>
+            <a:fld id="{F7021451-1387-4CA6-816F-3879F97B5CBC}" type="slidenum">
+              <a:rPr lang="en-US"/>
+              <a:t>50</a:t>
+            </a:fld>
+            <a:endParaRPr lang="en-US"/>
+          </a:p>
+        </p:txBody>
+      </p:sp>
+    </p:spTree>
+    <p:extLst>
+      <p:ext uri="{BB962C8B-B14F-4D97-AF65-F5344CB8AC3E}">
+        <p14:creationId xmlns:p14="http://schemas.microsoft.com/office/powerpoint/2010/main" val="1024086991"/>
+      </p:ext>
+    </p:extLst>
+  </p:cSld>
+  <p:clrMapOvr>
+    <a:masterClrMapping/>
+  </p:clrMapOvr>
+</p:notes>
+</file>
+
+<file path=ppt/notesSlides/notesSlide51.xml><?xml version="1.0" encoding="utf-8"?>
 <p:notes xmlns:a="http://schemas.openxmlformats.org/drawingml/2006/main" xmlns:r="http://schemas.openxmlformats.org/officeDocument/2006/relationships" xmlns:p="http://schemas.openxmlformats.org/presentationml/2006/main">
   <p:cSld>
     <p:spTree>
@@ -5393,115 +5527,6 @@
           <a:p>
             <a:fld id="{F7021451-1387-4CA6-816F-3879F97B5CBC}" type="slidenum">
               <a:rPr lang="en-US"/>
-              <a:t>50</a:t>
-            </a:fld>
-            <a:endParaRPr lang="en-US"/>
-          </a:p>
-        </p:txBody>
-      </p:sp>
-    </p:spTree>
-    <p:extLst>
-      <p:ext uri="{BB962C8B-B14F-4D97-AF65-F5344CB8AC3E}">
-        <p14:creationId xmlns:p14="http://schemas.microsoft.com/office/powerpoint/2010/main" val="1024086991"/>
-      </p:ext>
-    </p:extLst>
-  </p:cSld>
-  <p:clrMapOvr>
-    <a:masterClrMapping/>
-  </p:clrMapOvr>
-</p:notes>
-</file>
-
-<file path=ppt/notesSlides/notesSlide51.xml><?xml version="1.0" encoding="utf-8"?>
-<p:notes xmlns:a="http://schemas.openxmlformats.org/drawingml/2006/main" xmlns:r="http://schemas.openxmlformats.org/officeDocument/2006/relationships" xmlns:p="http://schemas.openxmlformats.org/presentationml/2006/main">
-  <p:cSld>
-    <p:spTree>
-      <p:nvGrpSpPr>
-        <p:cNvPr id="1" name=""/>
-        <p:cNvGrpSpPr/>
-        <p:nvPr/>
-      </p:nvGrpSpPr>
-      <p:grpSpPr>
-        <a:xfrm>
-          <a:off x="0" y="0"/>
-          <a:ext cx="0" cy="0"/>
-          <a:chOff x="0" y="0"/>
-          <a:chExt cx="0" cy="0"/>
-        </a:xfrm>
-      </p:grpSpPr>
-      <p:sp>
-        <p:nvSpPr>
-          <p:cNvPr id="2" name="Slide Image Placeholder 1"/>
-          <p:cNvSpPr>
-            <a:spLocks noGrp="1" noRot="1" noChangeAspect="1"/>
-          </p:cNvSpPr>
-          <p:nvPr>
-            <p:ph type="sldImg"/>
-          </p:nvPr>
-        </p:nvSpPr>
-        <p:spPr/>
-      </p:sp>
-      <p:sp>
-        <p:nvSpPr>
-          <p:cNvPr id="3" name="Notes Placeholder 2"/>
-          <p:cNvSpPr>
-            <a:spLocks noGrp="1"/>
-          </p:cNvSpPr>
-          <p:nvPr>
-            <p:ph type="body" idx="1"/>
-          </p:nvPr>
-        </p:nvSpPr>
-        <p:spPr/>
-        <p:txBody>
-          <a:bodyPr/>
-          <a:lstStyle/>
-          <a:p>
-            <a:r>
-              <a:rPr lang="en-US" dirty="0"/>
-              <a:t>[S9] .NET 10 DELTAS
-60-min: fold into the slides where each one lives; skip as a standalone
-Four talk-relevant deltas from .NET 9:
-1. NULL VALUES ARE PRESERVED - *** BREAKING CHANGE ***
-   Previously a null in configuration was treated as MISSING and skipped by the
-   binder, and the JSON provider converted null to "".
-   In .NET 10 the JSON provider reports null unchanged and the binder binds it
-   like any other value. Binding of null array elements and empty arrays now works.
-   -&gt; A property that used to KEEP ITS DEFAULT when the JSON said null now gets
-      OVERWRITTEN WITH NULL.
-   This is the one that will actually break someone's upgrade. d06 has the
-   before/after. Worth 60 seconds even at 60 minutes.
-2. SEVEN NEW CONNECTION-STRING PREFIXES (11 total) - Postgres, Cosmos, Redis,
-   Service Bus, Event Hubs, Notification Hubs, API Hubs. Covered on the connstr
-   slide; don't repeat it here.
-3. AOT-SAFE ValidationContext CONSTRUCTOR taking an explicit displayName,
-   removing AOT warnings from options validation.
-4. FILE-BASED APPS (dotnet run app.cs) participate in user secrets via a
-   path-hash-derived UserSecretsId and 'dotnet user-secrets --file'.
-OPTIONAL FORWARD-LOOKING CLOSER - label it clearly as .NET 11 PREVIEW:
-generic OptionsBuilder&lt;T&gt;.Validate&lt;TValidator&gt;(), Func&lt;Task&gt; overloads on
-ChangeToken.OnChange, and async DataAnnotations validation.</a:t>
-            </a:r>
-            <a:endParaRPr lang="en-US" dirty="0"/>
-          </a:p>
-        </p:txBody>
-      </p:sp>
-      <p:sp>
-        <p:nvSpPr>
-          <p:cNvPr id="4" name="Slide Number Placeholder 3"/>
-          <p:cNvSpPr>
-            <a:spLocks noGrp="1"/>
-          </p:cNvSpPr>
-          <p:nvPr>
-            <p:ph type="sldNum" sz="quarter" idx="10"/>
-          </p:nvPr>
-        </p:nvSpPr>
-        <p:spPr/>
-        <p:txBody>
-          <a:bodyPr/>
-          <a:lstStyle/>
-          <a:p>
-            <a:fld id="{F7021451-1387-4CA6-816F-3879F97B5CBC}" type="slidenum">
-              <a:rPr lang="en-US"/>
               <a:t>51</a:t>
             </a:fld>
             <a:endParaRPr lang="en-US"/>
@@ -5567,34 +5592,28 @@
           <a:p>
             <a:r>
               <a:rPr lang="en-US" dirty="0"/>
-              <a:t>[Q&amp;A]
-60-min: keep - but see the note below about where questions actually go
-THE ONE-LINE TAKEAWAY, say it BEFORE you open the floor - otherwise the last
-thing the room hears is whatever the final question happened to be:
-"GetDebugView() tells you where the value came from. Validate at startup so the
-wrong value never takes traffic. And name every flag for the day you delete it."
-AT 90 MINUTES: questions have been riding along, so this is a genuine open
-floor with a few minutes of slack.
-AT 60 MINUTES: the running order takes questions at three breath points -
-after the model (14), after Options (31), after flags (48) - so this slide is
-a backstop, not the main event.
-QUESTIONS YOU WILL GET, AND THE SHORT ANSWERS:
-- "When should I NOT use Azure App Configuration?"
-  S7.3 rule 3. One app that redeploys in five minutes doesn't need it.
-  This is the best question, so if nobody asks it, ask it yourself.
-- "What about Aspire?"
-  It shapes how configuration is WIRED between services; the provider chain
-  underneath is the same model in this talk.
-- "Should secrets go in App Configuration?"
-  No - Key Vault references. The store holds the pointer, not the secret.
-- "How do I test any of this?"
-  S4.8 in-memory provider, added last so it beats everything. Same answer for
-  feature flags (S6.7).
-- "Does IOptionsMonitor work in a console app?"
-  Yes, but nothing triggers a refresh for you. That's the S4.6 activity-driven
-  point - call TryRefreshAsync yourself.
-If the room goes quiet, go to the flag-inventory endpoint (d32). It's the
-thing people ask about afterward anyway.</a:t>
+              <a:t>[S9] .NET 10 DELTAS
+60-min: fold into the slides where each one lives; skip as a standalone
+Four talk-relevant deltas from .NET 9:
+1. NULL VALUES ARE PRESERVED - *** BREAKING CHANGE ***
+   Previously a null in configuration was treated as MISSING and skipped by the
+   binder, and the JSON provider converted null to "".
+   In .NET 10 the JSON provider reports null unchanged and the binder binds it
+   like any other value. Binding of null array elements and empty arrays now works.
+   -&gt; A property that used to KEEP ITS DEFAULT when the JSON said null now gets
+      OVERWRITTEN WITH NULL.
+   This is the one that will actually break someone's upgrade. d06 has the
+   before/after. Worth 60 seconds even at 60 minutes.
+2. SEVEN NEW CONNECTION-STRING PREFIXES (11 total) - Postgres, Cosmos, Redis,
+   Service Bus, Event Hubs, Notification Hubs, API Hubs. Covered on the connstr
+   slide; don't repeat it here.
+3. AOT-SAFE ValidationContext CONSTRUCTOR taking an explicit displayName,
+   removing AOT warnings from options validation.
+4. FILE-BASED APPS (dotnet run app.cs) participate in user secrets via a
+   path-hash-derived UserSecretsId and 'dotnet user-secrets --file'.
+OPTIONAL FORWARD-LOOKING CLOSER - label it clearly as .NET 11 PREVIEW:
+generic OptionsBuilder&lt;T&gt;.Validate&lt;TValidator&gt;(), Func&lt;Task&gt; overloads on
+ChangeToken.OnChange, and async DataAnnotations validation.</a:t>
             </a:r>
             <a:endParaRPr lang="en-US" dirty="0"/>
           </a:p>
@@ -5682,6 +5701,121 @@
           <a:p>
             <a:r>
               <a:rPr lang="en-US" dirty="0"/>
+              <a:t>[Q&amp;A]
+60-min: keep - but see the note below about where questions actually go
+THE ONE-LINE TAKEAWAY, say it BEFORE you open the floor - otherwise the last
+thing the room hears is whatever the final question happened to be:
+"GetDebugView() tells you where the value came from. Validate at startup so the
+wrong value never takes traffic. And name every flag for the day you delete it."
+AT 90 MINUTES: questions have been riding along, so this is a genuine open
+floor with a few minutes of slack.
+AT 60 MINUTES: the running order takes questions at three breath points -
+after the model (14), after Options (31), after flags (48) - so this slide is
+a backstop, not the main event.
+QUESTIONS YOU WILL GET, AND THE SHORT ANSWERS:
+- "When should I NOT use Azure App Configuration?"
+  S7.3 rule 3. One app that redeploys in five minutes doesn't need it.
+  This is the best question, so if nobody asks it, ask it yourself.
+- "What about Aspire?"
+  It shapes how configuration is WIRED between services; the provider chain
+  underneath is the same model in this talk.
+- "Should secrets go in App Configuration?"
+  No - Key Vault references. The store holds the pointer, not the secret.
+- "How do I test any of this?"
+  S4.8 in-memory provider, added last so it beats everything. Same answer for
+  feature flags (S6.7).
+- "Does IOptionsMonitor work in a console app?"
+  Yes, but nothing triggers a refresh for you. That's the S4.6 activity-driven
+  point - call TryRefreshAsync yourself.
+If the room goes quiet, go to the flag-inventory endpoint (d32). It's the
+thing people ask about afterward anyway.</a:t>
+            </a:r>
+            <a:endParaRPr lang="en-US" dirty="0"/>
+          </a:p>
+        </p:txBody>
+      </p:sp>
+      <p:sp>
+        <p:nvSpPr>
+          <p:cNvPr id="4" name="Slide Number Placeholder 3"/>
+          <p:cNvSpPr>
+            <a:spLocks noGrp="1"/>
+          </p:cNvSpPr>
+          <p:nvPr>
+            <p:ph type="sldNum" sz="quarter" idx="10"/>
+          </p:nvPr>
+        </p:nvSpPr>
+        <p:spPr/>
+        <p:txBody>
+          <a:bodyPr/>
+          <a:lstStyle/>
+          <a:p>
+            <a:fld id="{F7021451-1387-4CA6-816F-3879F97B5CBC}" type="slidenum">
+              <a:rPr lang="en-US"/>
+              <a:t>53</a:t>
+            </a:fld>
+            <a:endParaRPr lang="en-US"/>
+          </a:p>
+        </p:txBody>
+      </p:sp>
+    </p:spTree>
+    <p:extLst>
+      <p:ext uri="{BB962C8B-B14F-4D97-AF65-F5344CB8AC3E}">
+        <p14:creationId xmlns:p14="http://schemas.microsoft.com/office/powerpoint/2010/main" val="1024086991"/>
+      </p:ext>
+    </p:extLst>
+  </p:cSld>
+  <p:clrMapOvr>
+    <a:masterClrMapping/>
+  </p:clrMapOvr>
+</p:notes>
+</file>
+
+<file path=ppt/notesSlides/notesSlide54.xml><?xml version="1.0" encoding="utf-8"?>
+<p:notes xmlns:a="http://schemas.openxmlformats.org/drawingml/2006/main" xmlns:r="http://schemas.openxmlformats.org/officeDocument/2006/relationships" xmlns:p="http://schemas.openxmlformats.org/presentationml/2006/main">
+  <p:cSld>
+    <p:spTree>
+      <p:nvGrpSpPr>
+        <p:cNvPr id="1" name=""/>
+        <p:cNvGrpSpPr/>
+        <p:nvPr/>
+      </p:nvGrpSpPr>
+      <p:grpSpPr>
+        <a:xfrm>
+          <a:off x="0" y="0"/>
+          <a:ext cx="0" cy="0"/>
+          <a:chOff x="0" y="0"/>
+          <a:chExt cx="0" cy="0"/>
+        </a:xfrm>
+      </p:grpSpPr>
+      <p:sp>
+        <p:nvSpPr>
+          <p:cNvPr id="2" name="Slide Image Placeholder 1"/>
+          <p:cNvSpPr>
+            <a:spLocks noGrp="1" noRot="1" noChangeAspect="1"/>
+          </p:cNvSpPr>
+          <p:nvPr>
+            <p:ph type="sldImg"/>
+          </p:nvPr>
+        </p:nvSpPr>
+        <p:spPr/>
+      </p:sp>
+      <p:sp>
+        <p:nvSpPr>
+          <p:cNvPr id="3" name="Notes Placeholder 2"/>
+          <p:cNvSpPr>
+            <a:spLocks noGrp="1"/>
+          </p:cNvSpPr>
+          <p:nvPr>
+            <p:ph type="body" idx="1"/>
+          </p:nvPr>
+        </p:nvSpPr>
+        <p:spPr/>
+        <p:txBody>
+          <a:bodyPr/>
+          <a:lstStyle/>
+          <a:p>
+            <a:r>
+              <a:rPr lang="en-US" dirty="0"/>
               <a:t>[thanks]
 60-min: keep, 1 min
 LEAVE THIS UP for the rest of the room's time, and through the hallway track.
@@ -5722,7 +5856,7 @@
           <a:p>
             <a:fld id="{F7021451-1387-4CA6-816F-3879F97B5CBC}" type="slidenum">
               <a:rPr lang="en-US"/>
-              <a:t>53</a:t>
+              <a:t>54</a:t>
             </a:fld>
             <a:endParaRPr lang="en-US"/>
           </a:p>
@@ -13111,8 +13245,8 @@
         </p:nvSpPr>
         <p:spPr>
           <a:xfrm>
-            <a:off x="640080" y="2286000"/>
-            <a:ext cx="10881360" cy="1371600"/>
+            <a:off x="640080" y="841248"/>
+            <a:ext cx="10881360" cy="822960"/>
           </a:xfrm>
           <a:prstGeom prst="rect">
             <a:avLst/>
@@ -13128,7 +13262,7 @@
               <a:buNone/>
             </a:pPr>
             <a:r>
-              <a:rPr lang="en-US" sz="3800" b="1" dirty="0">
+              <a:rPr lang="en-US" sz="3200" b="1" dirty="0">
                 <a:solidFill>
                   <a:srgbClr val="16303F"/>
                 </a:solidFill>
@@ -13136,9 +13270,9 @@
                 <a:ea typeface="Manrope" pitchFamily="34" charset="-122"/>
                 <a:cs typeface="Manrope" pitchFamily="34" charset="-120"/>
               </a:rPr>
-              <a:t>User secrets</a:t>
-            </a:r>
-            <a:endParaRPr lang="en-US" sz="3800" dirty="0"/>
+              <a:t>Not encrypted. Not a vault.</a:t>
+            </a:r>
+            <a:endParaRPr lang="en-US" sz="3200" dirty="0"/>
           </a:p>
         </p:txBody>
       </p:sp>
@@ -13200,6 +13334,288 @@
               <a:t>TRUST</a:t>
             </a:r>
             <a:endParaRPr lang="en-US" sz="1100" dirty="0"/>
+          </a:p>
+        </p:txBody>
+      </p:sp>
+      <p:sp>
+        <p:nvSpPr>
+          <p:cNvPr id="6" name="Text 3"/>
+          <p:cNvSpPr txBox="1"/>
+          <p:nvPr/>
+        </p:nvSpPr>
+        <p:spPr>
+          <a:xfrm>
+            <a:off x="640080" y="1965960"/>
+            <a:ext cx="5303520" cy="274320"/>
+          </a:xfrm>
+          <a:prstGeom prst="rect">
+            <a:avLst/>
+          </a:prstGeom>
+          <a:noFill/>
+          <a:ln/>
+        </p:spPr>
+        <p:txBody>
+          <a:bodyPr wrap="square" lIns="0" tIns="0" rIns="0" bIns="0" rtlCol="0" anchor="ctr"/>
+          <a:lstStyle/>
+          <a:p>
+            <a:pPr indent="0" marL="0">
+              <a:buNone/>
+            </a:pPr>
+            <a:r>
+              <a:rPr lang="en-US" sz="1100" b="1" spc="150" kern="0" dirty="0">
+                <a:solidFill>
+                  <a:srgbClr val="8A9299"/>
+                </a:solidFill>
+                <a:latin typeface="Manrope" pitchFamily="34" charset="0"/>
+                <a:ea typeface="Manrope" pitchFamily="34" charset="-122"/>
+                <a:cs typeface="Manrope" pitchFamily="34" charset="-120"/>
+              </a:rPr>
+              <a:t>IN THE REPO</a:t>
+            </a:r>
+            <a:endParaRPr lang="en-US" sz="1100" dirty="0"/>
+          </a:p>
+        </p:txBody>
+      </p:sp>
+      <p:sp>
+        <p:nvSpPr>
+          <p:cNvPr id="7" name="Text 4"/>
+          <p:cNvSpPr txBox="1"/>
+          <p:nvPr/>
+        </p:nvSpPr>
+        <p:spPr>
+          <a:xfrm>
+            <a:off x="640080" y="2267712"/>
+            <a:ext cx="5303520" cy="310896"/>
+          </a:xfrm>
+          <a:prstGeom prst="rect">
+            <a:avLst/>
+          </a:prstGeom>
+          <a:noFill/>
+          <a:ln/>
+        </p:spPr>
+        <p:txBody>
+          <a:bodyPr wrap="square" lIns="0" tIns="0" rIns="0" bIns="0" rtlCol="0" anchor="ctr"/>
+          <a:lstStyle/>
+          <a:p>
+            <a:pPr indent="0" marL="0">
+              <a:buNone/>
+            </a:pPr>
+            <a:r>
+              <a:rPr lang="en-US" sz="1200" dirty="0">
+                <a:solidFill>
+                  <a:srgbClr val="16303F"/>
+                </a:solidFill>
+                <a:latin typeface="JetBrains Mono" pitchFamily="34" charset="0"/>
+                <a:ea typeface="JetBrains Mono" pitchFamily="34" charset="-122"/>
+                <a:cs typeface="JetBrains Mono" pitchFamily="34" charset="-120"/>
+              </a:rPr>
+              <a:t>Weather.csproj</a:t>
+            </a:r>
+            <a:endParaRPr lang="en-US" sz="1200" dirty="0"/>
+          </a:p>
+        </p:txBody>
+      </p:sp>
+      <p:pic>
+        <p:nvPicPr>
+          <p:cNvPr id="8" name="Image 0" descr="C:\Users\kevin\AppData\Local\Temp\claude\G---talks-modern-dotnet-configuration\168b4f6d-c720-4fc0-8834-81425d739f7e\scratchpad\deck/../carbon/22-repo.png">    </p:cNvPr>
+          <p:cNvPicPr>
+            <a:picLocks noChangeAspect="1"/>
+          </p:cNvPicPr>
+          <p:nvPr/>
+        </p:nvPicPr>
+        <p:blipFill>
+          <a:blip r:embed="rId1"/>
+          <a:stretch>
+            <a:fillRect/>
+          </a:stretch>
+        </p:blipFill>
+        <p:spPr>
+          <a:xfrm>
+            <a:off x="640080" y="2697480"/>
+            <a:ext cx="4131076" cy="2240280"/>
+          </a:xfrm>
+          <a:prstGeom prst="rect">
+            <a:avLst/>
+          </a:prstGeom>
+        </p:spPr>
+      </p:pic>
+      <p:sp>
+        <p:nvSpPr>
+          <p:cNvPr id="9" name="Text 5"/>
+          <p:cNvSpPr txBox="1"/>
+          <p:nvPr/>
+        </p:nvSpPr>
+        <p:spPr>
+          <a:xfrm>
+            <a:off x="6245352" y="1965960"/>
+            <a:ext cx="5303520" cy="274320"/>
+          </a:xfrm>
+          <a:prstGeom prst="rect">
+            <a:avLst/>
+          </a:prstGeom>
+          <a:noFill/>
+          <a:ln/>
+        </p:spPr>
+        <p:txBody>
+          <a:bodyPr wrap="square" lIns="0" tIns="0" rIns="0" bIns="0" rtlCol="0" anchor="ctr"/>
+          <a:lstStyle/>
+          <a:p>
+            <a:pPr indent="0" marL="0">
+              <a:buNone/>
+            </a:pPr>
+            <a:r>
+              <a:rPr lang="en-US" sz="1100" b="1" spc="150" kern="0" dirty="0">
+                <a:solidFill>
+                  <a:srgbClr val="8A9299"/>
+                </a:solidFill>
+                <a:latin typeface="Manrope" pitchFamily="34" charset="0"/>
+                <a:ea typeface="Manrope" pitchFamily="34" charset="-122"/>
+                <a:cs typeface="Manrope" pitchFamily="34" charset="-120"/>
+              </a:rPr>
+              <a:t>ON YOUR MACHINE</a:t>
+            </a:r>
+            <a:endParaRPr lang="en-US" sz="1100" dirty="0"/>
+          </a:p>
+        </p:txBody>
+      </p:sp>
+      <p:sp>
+        <p:nvSpPr>
+          <p:cNvPr id="10" name="Text 6"/>
+          <p:cNvSpPr txBox="1"/>
+          <p:nvPr/>
+        </p:nvSpPr>
+        <p:spPr>
+          <a:xfrm>
+            <a:off x="6245352" y="2267712"/>
+            <a:ext cx="5303520" cy="310896"/>
+          </a:xfrm>
+          <a:prstGeom prst="rect">
+            <a:avLst/>
+          </a:prstGeom>
+          <a:noFill/>
+          <a:ln/>
+        </p:spPr>
+        <p:txBody>
+          <a:bodyPr wrap="square" lIns="0" tIns="0" rIns="0" bIns="0" rtlCol="0" anchor="ctr"/>
+          <a:lstStyle/>
+          <a:p>
+            <a:pPr indent="0" marL="0">
+              <a:buNone/>
+            </a:pPr>
+            <a:r>
+              <a:rPr lang="en-US" sz="1200" dirty="0">
+                <a:solidFill>
+                  <a:srgbClr val="16303F"/>
+                </a:solidFill>
+                <a:latin typeface="JetBrains Mono" pitchFamily="34" charset="0"/>
+                <a:ea typeface="JetBrains Mono" pitchFamily="34" charset="-122"/>
+                <a:cs typeface="JetBrains Mono" pitchFamily="34" charset="-120"/>
+              </a:rPr>
+              <a:t>...\UserSecrets\&lt;id&gt;\secrets.json</a:t>
+            </a:r>
+            <a:endParaRPr lang="en-US" sz="1200" dirty="0"/>
+          </a:p>
+        </p:txBody>
+      </p:sp>
+      <p:pic>
+        <p:nvPicPr>
+          <p:cNvPr id="11" name="Image 1" descr="C:\Users\kevin\AppData\Local\Temp\claude\G---talks-modern-dotnet-configuration\168b4f6d-c720-4fc0-8834-81425d739f7e\scratchpad\deck/../carbon/22-machine.png">    </p:cNvPr>
+          <p:cNvPicPr>
+            <a:picLocks noChangeAspect="1"/>
+          </p:cNvPicPr>
+          <p:nvPr/>
+        </p:nvPicPr>
+        <p:blipFill>
+          <a:blip r:embed="rId2"/>
+          <a:stretch>
+            <a:fillRect/>
+          </a:stretch>
+        </p:blipFill>
+        <p:spPr>
+          <a:xfrm>
+            <a:off x="6245352" y="2697480"/>
+            <a:ext cx="5110079" cy="2240280"/>
+          </a:xfrm>
+          <a:prstGeom prst="rect">
+            <a:avLst/>
+          </a:prstGeom>
+        </p:spPr>
+      </p:pic>
+      <p:sp>
+        <p:nvSpPr>
+          <p:cNvPr id="12" name="Text 7"/>
+          <p:cNvSpPr txBox="1"/>
+          <p:nvPr/>
+        </p:nvSpPr>
+        <p:spPr>
+          <a:xfrm>
+            <a:off x="640080" y="5047488"/>
+            <a:ext cx="5303520" cy="310896"/>
+          </a:xfrm>
+          <a:prstGeom prst="rect">
+            <a:avLst/>
+          </a:prstGeom>
+          <a:noFill/>
+          <a:ln/>
+        </p:spPr>
+        <p:txBody>
+          <a:bodyPr wrap="square" lIns="0" tIns="0" rIns="0" bIns="0" rtlCol="0" anchor="ctr"/>
+          <a:lstStyle/>
+          <a:p>
+            <a:pPr indent="0" marL="0">
+              <a:buNone/>
+            </a:pPr>
+            <a:r>
+              <a:rPr lang="en-US" sz="1300" i="1" dirty="0">
+                <a:solidFill>
+                  <a:srgbClr val="8A9299"/>
+                </a:solidFill>
+                <a:latin typeface="Manrope" pitchFamily="34" charset="0"/>
+                <a:ea typeface="Manrope" pitchFamily="34" charset="-122"/>
+                <a:cs typeface="Manrope" pitchFamily="34" charset="-120"/>
+              </a:rPr>
+              <a:t>a pointer, and nothing else</a:t>
+            </a:r>
+            <a:endParaRPr lang="en-US" sz="1300" dirty="0"/>
+          </a:p>
+        </p:txBody>
+      </p:sp>
+      <p:sp>
+        <p:nvSpPr>
+          <p:cNvPr id="13" name="Text 8"/>
+          <p:cNvSpPr txBox="1"/>
+          <p:nvPr/>
+        </p:nvSpPr>
+        <p:spPr>
+          <a:xfrm>
+            <a:off x="6245352" y="5047488"/>
+            <a:ext cx="5303520" cy="310896"/>
+          </a:xfrm>
+          <a:prstGeom prst="rect">
+            <a:avLst/>
+          </a:prstGeom>
+          <a:noFill/>
+          <a:ln/>
+        </p:spPr>
+        <p:txBody>
+          <a:bodyPr wrap="square" lIns="0" tIns="0" rIns="0" bIns="0" rtlCol="0" anchor="ctr"/>
+          <a:lstStyle/>
+          <a:p>
+            <a:pPr indent="0" marL="0">
+              <a:buNone/>
+            </a:pPr>
+            <a:r>
+              <a:rPr lang="en-US" sz="1300" b="1" i="1" dirty="0">
+                <a:solidFill>
+                  <a:srgbClr val="B08900"/>
+                </a:solidFill>
+                <a:latin typeface="Manrope" pitchFamily="34" charset="0"/>
+                <a:ea typeface="Manrope" pitchFamily="34" charset="-122"/>
+                <a:cs typeface="Manrope" pitchFamily="34" charset="-120"/>
+              </a:rPr>
+              <a:t>plaintext, on disk, unencrypted</a:t>
+            </a:r>
+            <a:endParaRPr lang="en-US" sz="1300" dirty="0"/>
           </a:p>
         </p:txBody>
       </p:sp>
@@ -13276,47 +13692,30 @@
           <a:chExt cx="0" cy="0"/>
         </a:xfrm>
       </p:grpSpPr>
-      <p:sp>
-        <p:nvSpPr>
-          <p:cNvPr id="2" name="Text 2"/>
-          <p:cNvSpPr/>
-          <p:nvPr>
-            <p:ph idx="102" type="title" hasCustomPrompt="1"/>
-          </p:nvPr>
-        </p:nvSpPr>
-        <p:spPr>
-          <a:xfrm>
-            <a:off x="640080" y="2286000"/>
-            <a:ext cx="10881360" cy="1371600"/>
-          </a:xfrm>
-          <a:prstGeom prst="rect">
-            <a:avLst/>
-          </a:prstGeom>
-          <a:noFill/>
-          <a:ln/>
-        </p:spPr>
-        <p:txBody>
-          <a:bodyPr wrap="square" lIns="0" tIns="0" rIns="0" bIns="0" rtlCol="0"/>
-          <a:lstStyle/>
-          <a:p>
-            <a:pPr algn="l" indent="0" marL="0">
-              <a:buNone/>
-            </a:pPr>
-            <a:r>
-              <a:rPr lang="en-US" sz="3800" b="1" dirty="0">
-                <a:solidFill>
-                  <a:srgbClr val="16303F"/>
-                </a:solidFill>
-                <a:latin typeface="Manrope" pitchFamily="34" charset="0"/>
-                <a:ea typeface="Manrope" pitchFamily="34" charset="-122"/>
-                <a:cs typeface="Manrope" pitchFamily="34" charset="-120"/>
-              </a:rPr>
-              <a:t>The launchSettings trap</a:t>
-            </a:r>
-            <a:endParaRPr lang="en-US" sz="3800" dirty="0"/>
-          </a:p>
-        </p:txBody>
-      </p:sp>
+      <p:pic>
+        <p:nvPicPr>
+          <p:cNvPr id="2" name="Image 0" descr="C:\Users\kevin\AppData\Local\Temp\claude\G---talks-modern-dotnet-configuration\168b4f6d-c720-4fc0-8834-81425d739f7e\scratchpad\deck/../carbon/23-cli.png">    </p:cNvPr>
+          <p:cNvPicPr>
+            <a:picLocks noChangeAspect="1"/>
+          </p:cNvPicPr>
+          <p:nvPr/>
+        </p:nvPicPr>
+        <p:blipFill>
+          <a:blip r:embed="rId1"/>
+          <a:stretch>
+            <a:fillRect/>
+          </a:stretch>
+        </p:blipFill>
+        <p:spPr>
+          <a:xfrm>
+            <a:off x="516636" y="1409979"/>
+            <a:ext cx="11155680" cy="4038042"/>
+          </a:xfrm>
+          <a:prstGeom prst="rect">
+            <a:avLst/>
+          </a:prstGeom>
+        </p:spPr>
+      </p:pic>
       <p:sp>
         <p:nvSpPr>
           <p:cNvPr id="25" name="Slide Number Placeholder 0"/>
@@ -13347,7 +13746,7 @@
             <a:lvl1pPr>
               <a:defRPr sz="1000">
                 <a:solidFill>
-                  <a:srgbClr val="16303F"/>
+                  <a:srgbClr val="F4C233"/>
                 </a:solidFill>
                 <a:latin typeface="Manrope"/>
                 <a:ea typeface="Manrope"/>
@@ -13395,13 +13794,13 @@
           <p:cNvPr id="2" name="Text 2"/>
           <p:cNvSpPr/>
           <p:nvPr>
-            <p:ph idx="102" type="body" hasCustomPrompt="1"/>
-          </p:nvPr>
-        </p:nvSpPr>
-        <p:spPr>
-          <a:xfrm>
-            <a:off x="640080" y="2331720"/>
-            <a:ext cx="10881360" cy="365760"/>
+            <p:ph idx="102" type="title" hasCustomPrompt="1"/>
+          </p:nvPr>
+        </p:nvSpPr>
+        <p:spPr>
+          <a:xfrm>
+            <a:off x="640080" y="2286000"/>
+            <a:ext cx="10881360" cy="1371600"/>
           </a:xfrm>
           <a:prstGeom prst="rect">
             <a:avLst/>
@@ -13413,62 +13812,21 @@
           <a:bodyPr wrap="square" lIns="0" tIns="0" rIns="0" bIns="0" rtlCol="0"/>
           <a:lstStyle/>
           <a:p>
-            <a:pPr indent="0" marL="0">
-              <a:buNone/>
-            </a:pPr>
-            <a:r>
-              <a:rPr lang="en-US" sz="1400" b="1" spc="200" kern="0" dirty="0">
-                <a:solidFill>
-                  <a:srgbClr val="F4C233"/>
+            <a:pPr algn="l" indent="0" marL="0">
+              <a:buNone/>
+            </a:pPr>
+            <a:r>
+              <a:rPr lang="en-US" sz="3800" b="1" dirty="0">
+                <a:solidFill>
+                  <a:srgbClr val="16303F"/>
                 </a:solidFill>
                 <a:latin typeface="Manrope" pitchFamily="34" charset="0"/>
                 <a:ea typeface="Manrope" pitchFamily="34" charset="-122"/>
                 <a:cs typeface="Manrope" pitchFamily="34" charset="-120"/>
               </a:rPr>
-              <a:t>OPTIONS</a:t>
-            </a:r>
-            <a:endParaRPr lang="en-US" sz="1400" dirty="0"/>
-          </a:p>
-        </p:txBody>
-      </p:sp>
-      <p:sp>
-        <p:nvSpPr>
-          <p:cNvPr id="3" name="Text 2"/>
-          <p:cNvSpPr/>
-          <p:nvPr>
-            <p:ph idx="103" type="title" hasCustomPrompt="1"/>
-          </p:nvPr>
-        </p:nvSpPr>
-        <p:spPr>
-          <a:xfrm>
-            <a:off x="640080" y="3017520"/>
-            <a:ext cx="10881360" cy="1371600"/>
-          </a:xfrm>
-          <a:prstGeom prst="rect">
-            <a:avLst/>
-          </a:prstGeom>
-          <a:noFill/>
-          <a:ln/>
-        </p:spPr>
-        <p:txBody>
-          <a:bodyPr wrap="square" lIns="0" tIns="0" rIns="0" bIns="0" rtlCol="0"/>
-          <a:lstStyle/>
-          <a:p>
-            <a:pPr algn="l" indent="0" marL="0">
-              <a:buNone/>
-            </a:pPr>
-            <a:r>
-              <a:rPr lang="en-US" sz="4400" b="1" dirty="0">
-                <a:solidFill>
-                  <a:srgbClr val="FFFFFF"/>
-                </a:solidFill>
-                <a:latin typeface="Manrope" pitchFamily="34" charset="0"/>
-                <a:ea typeface="Manrope" pitchFamily="34" charset="-122"/>
-                <a:cs typeface="Manrope" pitchFamily="34" charset="-120"/>
-              </a:rPr>
-              <a:t>Binding, and the three interfaces</a:t>
-            </a:r>
-            <a:endParaRPr lang="en-US" sz="4400" dirty="0"/>
+              <a:t>The launchSettings trap</a:t>
+            </a:r>
+            <a:endParaRPr lang="en-US" sz="3800" dirty="0"/>
           </a:p>
         </p:txBody>
       </p:sp>
@@ -13502,7 +13860,7 @@
             <a:lvl1pPr>
               <a:defRPr sz="1000">
                 <a:solidFill>
-                  <a:srgbClr val="F4C233"/>
+                  <a:srgbClr val="16303F"/>
                 </a:solidFill>
                 <a:latin typeface="Manrope"/>
                 <a:ea typeface="Manrope"/>
@@ -13550,13 +13908,13 @@
           <p:cNvPr id="2" name="Text 2"/>
           <p:cNvSpPr/>
           <p:nvPr>
-            <p:ph idx="102" type="title" hasCustomPrompt="1"/>
-          </p:nvPr>
-        </p:nvSpPr>
-        <p:spPr>
-          <a:xfrm>
-            <a:off x="640080" y="2286000"/>
-            <a:ext cx="10881360" cy="1371600"/>
+            <p:ph idx="102" type="body" hasCustomPrompt="1"/>
+          </p:nvPr>
+        </p:nvSpPr>
+        <p:spPr>
+          <a:xfrm>
+            <a:off x="640080" y="2331720"/>
+            <a:ext cx="10881360" cy="365760"/>
           </a:xfrm>
           <a:prstGeom prst="rect">
             <a:avLst/>
@@ -13568,21 +13926,62 @@
           <a:bodyPr wrap="square" lIns="0" tIns="0" rIns="0" bIns="0" rtlCol="0"/>
           <a:lstStyle/>
           <a:p>
-            <a:pPr algn="l" indent="0" marL="0">
-              <a:buNone/>
-            </a:pPr>
-            <a:r>
-              <a:rPr lang="en-US" sz="3800" b="1" dirty="0">
-                <a:solidFill>
-                  <a:srgbClr val="16303F"/>
+            <a:pPr indent="0" marL="0">
+              <a:buNone/>
+            </a:pPr>
+            <a:r>
+              <a:rPr lang="en-US" sz="1400" b="1" spc="200" kern="0" dirty="0">
+                <a:solidFill>
+                  <a:srgbClr val="F4C233"/>
                 </a:solidFill>
                 <a:latin typeface="Manrope" pitchFamily="34" charset="0"/>
                 <a:ea typeface="Manrope" pitchFamily="34" charset="-122"/>
                 <a:cs typeface="Manrope" pitchFamily="34" charset="-120"/>
               </a:rPr>
-              <a:t>Stop injecting IConfiguration</a:t>
-            </a:r>
-            <a:endParaRPr lang="en-US" sz="3800" dirty="0"/>
+              <a:t>OPTIONS</a:t>
+            </a:r>
+            <a:endParaRPr lang="en-US" sz="1400" dirty="0"/>
+          </a:p>
+        </p:txBody>
+      </p:sp>
+      <p:sp>
+        <p:nvSpPr>
+          <p:cNvPr id="3" name="Text 2"/>
+          <p:cNvSpPr/>
+          <p:nvPr>
+            <p:ph idx="103" type="title" hasCustomPrompt="1"/>
+          </p:nvPr>
+        </p:nvSpPr>
+        <p:spPr>
+          <a:xfrm>
+            <a:off x="640080" y="3017520"/>
+            <a:ext cx="10881360" cy="1371600"/>
+          </a:xfrm>
+          <a:prstGeom prst="rect">
+            <a:avLst/>
+          </a:prstGeom>
+          <a:noFill/>
+          <a:ln/>
+        </p:spPr>
+        <p:txBody>
+          <a:bodyPr wrap="square" lIns="0" tIns="0" rIns="0" bIns="0" rtlCol="0"/>
+          <a:lstStyle/>
+          <a:p>
+            <a:pPr algn="l" indent="0" marL="0">
+              <a:buNone/>
+            </a:pPr>
+            <a:r>
+              <a:rPr lang="en-US" sz="4400" b="1" dirty="0">
+                <a:solidFill>
+                  <a:srgbClr val="FFFFFF"/>
+                </a:solidFill>
+                <a:latin typeface="Manrope" pitchFamily="34" charset="0"/>
+                <a:ea typeface="Manrope" pitchFamily="34" charset="-122"/>
+                <a:cs typeface="Manrope" pitchFamily="34" charset="-120"/>
+              </a:rPr>
+              <a:t>Binding, and the three interfaces</a:t>
+            </a:r>
+            <a:endParaRPr lang="en-US" sz="4400" dirty="0"/>
           </a:p>
         </p:txBody>
       </p:sp>
@@ -13616,7 +14015,7 @@
             <a:lvl1pPr>
               <a:defRPr sz="1000">
                 <a:solidFill>
-                  <a:srgbClr val="16303F"/>
+                  <a:srgbClr val="F4C233"/>
                 </a:solidFill>
                 <a:latin typeface="Manrope"/>
                 <a:ea typeface="Manrope"/>
@@ -13694,7 +14093,7 @@
                 <a:ea typeface="Manrope" pitchFamily="34" charset="-122"/>
                 <a:cs typeface="Manrope" pitchFamily="34" charset="-120"/>
               </a:rPr>
-              <a:t>Binding and registration</a:t>
+              <a:t>Stop injecting IConfiguration</a:t>
             </a:r>
             <a:endParaRPr lang="en-US" sz="3800" dirty="0"/>
           </a:p>
@@ -13808,70 +14207,9 @@
                 <a:ea typeface="Manrope" pitchFamily="34" charset="-122"/>
                 <a:cs typeface="Manrope" pitchFamily="34" charset="-120"/>
               </a:rPr>
-              <a:t>IOptions, IOptionsSnapshot, IOptionsMonitor</a:t>
+              <a:t>Binding and registration</a:t>
             </a:r>
             <a:endParaRPr lang="en-US" sz="3800" dirty="0"/>
-          </a:p>
-        </p:txBody>
-      </p:sp>
-      <p:sp>
-        <p:nvSpPr>
-          <p:cNvPr id="4" name="Shape 1"/>
-          <p:cNvSpPr/>
-          <p:nvPr/>
-        </p:nvSpPr>
-        <p:spPr>
-          <a:xfrm>
-            <a:off x="9646920" y="457200"/>
-            <a:ext cx="1901952" cy="420624"/>
-          </a:xfrm>
-          <a:prstGeom prst="roundRect">
-            <a:avLst>
-              <a:gd name="adj" fmla="val 13043"/>
-            </a:avLst>
-          </a:prstGeom>
-          <a:solidFill>
-            <a:srgbClr val="16303F"/>
-          </a:solidFill>
-          <a:ln/>
-        </p:spPr>
-      </p:sp>
-      <p:sp>
-        <p:nvSpPr>
-          <p:cNvPr id="5" name="Text 2"/>
-          <p:cNvSpPr txBox="1"/>
-          <p:nvPr/>
-        </p:nvSpPr>
-        <p:spPr>
-          <a:xfrm>
-            <a:off x="9646920" y="457200"/>
-            <a:ext cx="1901952" cy="420624"/>
-          </a:xfrm>
-          <a:prstGeom prst="rect">
-            <a:avLst/>
-          </a:prstGeom>
-          <a:noFill/>
-          <a:ln/>
-        </p:spPr>
-        <p:txBody>
-          <a:bodyPr wrap="square" lIns="0" tIns="0" rIns="0" bIns="0" rtlCol="0" anchor="ctr"/>
-          <a:lstStyle/>
-          <a:p>
-            <a:pPr algn="ctr" indent="0" marL="0">
-              <a:buNone/>
-            </a:pPr>
-            <a:r>
-              <a:rPr lang="en-US" sz="1100" b="1" spc="150" kern="0" dirty="0">
-                <a:solidFill>
-                  <a:srgbClr val="F4C233"/>
-                </a:solidFill>
-                <a:latin typeface="Manrope" pitchFamily="34" charset="0"/>
-                <a:ea typeface="Manrope" pitchFamily="34" charset="-122"/>
-                <a:cs typeface="Manrope" pitchFamily="34" charset="-120"/>
-              </a:rPr>
-              <a:t>LIFETIME</a:t>
-            </a:r>
-            <a:endParaRPr lang="en-US" sz="1100" dirty="0"/>
           </a:p>
         </p:txBody>
       </p:sp>
@@ -13983,9 +14321,70 @@
                 <a:ea typeface="Manrope" pitchFamily="34" charset="-122"/>
                 <a:cs typeface="Manrope" pitchFamily="34" charset="-120"/>
               </a:rPr>
-              <a:t>Validate at startup</a:t>
+              <a:t>IOptions, IOptionsSnapshot, IOptionsMonitor</a:t>
             </a:r>
             <a:endParaRPr lang="en-US" sz="3800" dirty="0"/>
+          </a:p>
+        </p:txBody>
+      </p:sp>
+      <p:sp>
+        <p:nvSpPr>
+          <p:cNvPr id="4" name="Shape 1"/>
+          <p:cNvSpPr/>
+          <p:nvPr/>
+        </p:nvSpPr>
+        <p:spPr>
+          <a:xfrm>
+            <a:off x="9646920" y="457200"/>
+            <a:ext cx="1901952" cy="420624"/>
+          </a:xfrm>
+          <a:prstGeom prst="roundRect">
+            <a:avLst>
+              <a:gd name="adj" fmla="val 13043"/>
+            </a:avLst>
+          </a:prstGeom>
+          <a:solidFill>
+            <a:srgbClr val="16303F"/>
+          </a:solidFill>
+          <a:ln/>
+        </p:spPr>
+      </p:sp>
+      <p:sp>
+        <p:nvSpPr>
+          <p:cNvPr id="5" name="Text 2"/>
+          <p:cNvSpPr txBox="1"/>
+          <p:nvPr/>
+        </p:nvSpPr>
+        <p:spPr>
+          <a:xfrm>
+            <a:off x="9646920" y="457200"/>
+            <a:ext cx="1901952" cy="420624"/>
+          </a:xfrm>
+          <a:prstGeom prst="rect">
+            <a:avLst/>
+          </a:prstGeom>
+          <a:noFill/>
+          <a:ln/>
+        </p:spPr>
+        <p:txBody>
+          <a:bodyPr wrap="square" lIns="0" tIns="0" rIns="0" bIns="0" rtlCol="0" anchor="ctr"/>
+          <a:lstStyle/>
+          <a:p>
+            <a:pPr algn="ctr" indent="0" marL="0">
+              <a:buNone/>
+            </a:pPr>
+            <a:r>
+              <a:rPr lang="en-US" sz="1100" b="1" spc="150" kern="0" dirty="0">
+                <a:solidFill>
+                  <a:srgbClr val="F4C233"/>
+                </a:solidFill>
+                <a:latin typeface="Manrope" pitchFamily="34" charset="0"/>
+                <a:ea typeface="Manrope" pitchFamily="34" charset="-122"/>
+                <a:cs typeface="Manrope" pitchFamily="34" charset="-120"/>
+              </a:rPr>
+              <a:t>LIFETIME</a:t>
+            </a:r>
+            <a:endParaRPr lang="en-US" sz="1100" dirty="0"/>
           </a:p>
         </p:txBody>
       </p:sp>
@@ -14097,7 +14496,7 @@
                 <a:ea typeface="Manrope" pitchFamily="34" charset="-122"/>
                 <a:cs typeface="Manrope" pitchFamily="34" charset="-120"/>
               </a:rPr>
-              <a:t>Named options and source generators</a:t>
+              <a:t>Validate at startup</a:t>
             </a:r>
             <a:endParaRPr lang="en-US" sz="3800" dirty="0"/>
           </a:p>
@@ -14379,13 +14778,13 @@
           <p:cNvPr id="2" name="Text 2"/>
           <p:cNvSpPr/>
           <p:nvPr>
-            <p:ph idx="102" type="body" hasCustomPrompt="1"/>
-          </p:nvPr>
-        </p:nvSpPr>
-        <p:spPr>
-          <a:xfrm>
-            <a:off x="640080" y="2331720"/>
-            <a:ext cx="10881360" cy="365760"/>
+            <p:ph idx="102" type="title" hasCustomPrompt="1"/>
+          </p:nvPr>
+        </p:nvSpPr>
+        <p:spPr>
+          <a:xfrm>
+            <a:off x="640080" y="2286000"/>
+            <a:ext cx="10881360" cy="1371600"/>
           </a:xfrm>
           <a:prstGeom prst="rect">
             <a:avLst/>
@@ -14397,62 +14796,21 @@
           <a:bodyPr wrap="square" lIns="0" tIns="0" rIns="0" bIns="0" rtlCol="0"/>
           <a:lstStyle/>
           <a:p>
-            <a:pPr indent="0" marL="0">
-              <a:buNone/>
-            </a:pPr>
-            <a:r>
-              <a:rPr lang="en-US" sz="1400" b="1" spc="200" kern="0" dirty="0">
-                <a:solidFill>
-                  <a:srgbClr val="F4C233"/>
+            <a:pPr algn="l" indent="0" marL="0">
+              <a:buNone/>
+            </a:pPr>
+            <a:r>
+              <a:rPr lang="en-US" sz="3800" b="1" dirty="0">
+                <a:solidFill>
+                  <a:srgbClr val="16303F"/>
                 </a:solidFill>
                 <a:latin typeface="Manrope" pitchFamily="34" charset="0"/>
                 <a:ea typeface="Manrope" pitchFamily="34" charset="-122"/>
                 <a:cs typeface="Manrope" pitchFamily="34" charset="-120"/>
               </a:rPr>
-              <a:t>STAGE 2</a:t>
-            </a:r>
-            <a:endParaRPr lang="en-US" sz="1400" dirty="0"/>
-          </a:p>
-        </p:txBody>
-      </p:sp>
-      <p:sp>
-        <p:nvSpPr>
-          <p:cNvPr id="3" name="Text 2"/>
-          <p:cNvSpPr/>
-          <p:nvPr>
-            <p:ph idx="103" type="title" hasCustomPrompt="1"/>
-          </p:nvPr>
-        </p:nvSpPr>
-        <p:spPr>
-          <a:xfrm>
-            <a:off x="640080" y="3017520"/>
-            <a:ext cx="10881360" cy="1371600"/>
-          </a:xfrm>
-          <a:prstGeom prst="rect">
-            <a:avLst/>
-          </a:prstGeom>
-          <a:noFill/>
-          <a:ln/>
-        </p:spPr>
-        <p:txBody>
-          <a:bodyPr wrap="square" lIns="0" tIns="0" rIns="0" bIns="0" rtlCol="0"/>
-          <a:lstStyle/>
-          <a:p>
-            <a:pPr algn="l" indent="0" marL="0">
-              <a:buNone/>
-            </a:pPr>
-            <a:r>
-              <a:rPr lang="en-US" sz="4400" b="1" dirty="0">
-                <a:solidFill>
-                  <a:srgbClr val="FFFFFF"/>
-                </a:solidFill>
-                <a:latin typeface="Manrope" pitchFamily="34" charset="0"/>
-                <a:ea typeface="Manrope" pitchFamily="34" charset="-122"/>
-                <a:cs typeface="Manrope" pitchFamily="34" charset="-120"/>
-              </a:rPr>
-              <a:t>Deployment</a:t>
-            </a:r>
-            <a:endParaRPr lang="en-US" sz="4400" dirty="0"/>
+              <a:t>Named options and source generators</a:t>
+            </a:r>
+            <a:endParaRPr lang="en-US" sz="3800" dirty="0"/>
           </a:p>
         </p:txBody>
       </p:sp>
@@ -14486,7 +14844,7 @@
             <a:lvl1pPr>
               <a:defRPr sz="1000">
                 <a:solidFill>
-                  <a:srgbClr val="F4C233"/>
+                  <a:srgbClr val="16303F"/>
                 </a:solidFill>
                 <a:latin typeface="Manrope"/>
                 <a:ea typeface="Manrope"/>
@@ -14534,13 +14892,13 @@
           <p:cNvPr id="2" name="Text 2"/>
           <p:cNvSpPr/>
           <p:nvPr>
-            <p:ph idx="102" type="title" hasCustomPrompt="1"/>
-          </p:nvPr>
-        </p:nvSpPr>
-        <p:spPr>
-          <a:xfrm>
-            <a:off x="640080" y="2286000"/>
-            <a:ext cx="10881360" cy="1371600"/>
+            <p:ph idx="102" type="body" hasCustomPrompt="1"/>
+          </p:nvPr>
+        </p:nvSpPr>
+        <p:spPr>
+          <a:xfrm>
+            <a:off x="640080" y="2331720"/>
+            <a:ext cx="10881360" cy="365760"/>
           </a:xfrm>
           <a:prstGeom prst="rect">
             <a:avLst/>
@@ -14552,56 +14910,36 @@
           <a:bodyPr wrap="square" lIns="0" tIns="0" rIns="0" bIns="0" rtlCol="0"/>
           <a:lstStyle/>
           <a:p>
-            <a:pPr algn="l" indent="0" marL="0">
-              <a:buNone/>
-            </a:pPr>
-            <a:r>
-              <a:rPr lang="en-US" sz="3800" b="1" dirty="0">
-                <a:solidFill>
-                  <a:srgbClr val="16303F"/>
+            <a:pPr indent="0" marL="0">
+              <a:buNone/>
+            </a:pPr>
+            <a:r>
+              <a:rPr lang="en-US" sz="1400" b="1" spc="200" kern="0" dirty="0">
+                <a:solidFill>
+                  <a:srgbClr val="F4C233"/>
                 </a:solidFill>
                 <a:latin typeface="Manrope" pitchFamily="34" charset="0"/>
                 <a:ea typeface="Manrope" pitchFamily="34" charset="-122"/>
                 <a:cs typeface="Manrope" pitchFamily="34" charset="-120"/>
               </a:rPr>
-              <a:t>Environment variables</a:t>
-            </a:r>
-            <a:endParaRPr lang="en-US" sz="3800" dirty="0"/>
-          </a:p>
-        </p:txBody>
-      </p:sp>
-      <p:sp>
-        <p:nvSpPr>
-          <p:cNvPr id="4" name="Shape 1"/>
+              <a:t>STAGE 2</a:t>
+            </a:r>
+            <a:endParaRPr lang="en-US" sz="1400" dirty="0"/>
+          </a:p>
+        </p:txBody>
+      </p:sp>
+      <p:sp>
+        <p:nvSpPr>
+          <p:cNvPr id="3" name="Text 2"/>
           <p:cNvSpPr/>
-          <p:nvPr/>
-        </p:nvSpPr>
-        <p:spPr>
-          <a:xfrm>
-            <a:off x="9646920" y="457200"/>
-            <a:ext cx="1901952" cy="420624"/>
-          </a:xfrm>
-          <a:prstGeom prst="roundRect">
-            <a:avLst>
-              <a:gd name="adj" fmla="val 13043"/>
-            </a:avLst>
-          </a:prstGeom>
-          <a:solidFill>
-            <a:srgbClr val="16303F"/>
-          </a:solidFill>
-          <a:ln/>
-        </p:spPr>
-      </p:sp>
-      <p:sp>
-        <p:nvSpPr>
-          <p:cNvPr id="5" name="Text 2"/>
-          <p:cNvSpPr txBox="1"/>
-          <p:nvPr/>
-        </p:nvSpPr>
-        <p:spPr>
-          <a:xfrm>
-            <a:off x="9646920" y="457200"/>
-            <a:ext cx="1901952" cy="420624"/>
+          <p:nvPr>
+            <p:ph idx="103" type="title" hasCustomPrompt="1"/>
+          </p:nvPr>
+        </p:nvSpPr>
+        <p:spPr>
+          <a:xfrm>
+            <a:off x="640080" y="3017520"/>
+            <a:ext cx="10881360" cy="1371600"/>
           </a:xfrm>
           <a:prstGeom prst="rect">
             <a:avLst/>
@@ -14610,24 +14948,24 @@
           <a:ln/>
         </p:spPr>
         <p:txBody>
-          <a:bodyPr wrap="square" lIns="0" tIns="0" rIns="0" bIns="0" rtlCol="0" anchor="ctr"/>
-          <a:lstStyle/>
-          <a:p>
-            <a:pPr algn="ctr" indent="0" marL="0">
-              <a:buNone/>
-            </a:pPr>
-            <a:r>
-              <a:rPr lang="en-US" sz="1100" b="1" spc="150" kern="0" dirty="0">
-                <a:solidFill>
-                  <a:srgbClr val="F4C233"/>
+          <a:bodyPr wrap="square" lIns="0" tIns="0" rIns="0" bIns="0" rtlCol="0"/>
+          <a:lstStyle/>
+          <a:p>
+            <a:pPr algn="l" indent="0" marL="0">
+              <a:buNone/>
+            </a:pPr>
+            <a:r>
+              <a:rPr lang="en-US" sz="4400" b="1" dirty="0">
+                <a:solidFill>
+                  <a:srgbClr val="FFFFFF"/>
                 </a:solidFill>
                 <a:latin typeface="Manrope" pitchFamily="34" charset="0"/>
                 <a:ea typeface="Manrope" pitchFamily="34" charset="-122"/>
                 <a:cs typeface="Manrope" pitchFamily="34" charset="-120"/>
               </a:rPr>
-              <a:t>SHAPE</a:t>
-            </a:r>
-            <a:endParaRPr lang="en-US" sz="1100" dirty="0"/>
+              <a:t>Deployment</a:t>
+            </a:r>
+            <a:endParaRPr lang="en-US" sz="4400" dirty="0"/>
           </a:p>
         </p:txBody>
       </p:sp>
@@ -14661,7 +14999,7 @@
             <a:lvl1pPr>
               <a:defRPr sz="1000">
                 <a:solidFill>
-                  <a:srgbClr val="16303F"/>
+                  <a:srgbClr val="F4C233"/>
                 </a:solidFill>
                 <a:latin typeface="Manrope"/>
                 <a:ea typeface="Manrope"/>
@@ -14739,9 +15077,70 @@
                 <a:ea typeface="Manrope" pitchFamily="34" charset="-122"/>
                 <a:cs typeface="Manrope" pitchFamily="34" charset="-120"/>
               </a:rPr>
-              <a:t>Connection-string prefixes</a:t>
+              <a:t>Environment variables</a:t>
             </a:r>
             <a:endParaRPr lang="en-US" sz="3800" dirty="0"/>
+          </a:p>
+        </p:txBody>
+      </p:sp>
+      <p:sp>
+        <p:nvSpPr>
+          <p:cNvPr id="4" name="Shape 1"/>
+          <p:cNvSpPr/>
+          <p:nvPr/>
+        </p:nvSpPr>
+        <p:spPr>
+          <a:xfrm>
+            <a:off x="9646920" y="457200"/>
+            <a:ext cx="1901952" cy="420624"/>
+          </a:xfrm>
+          <a:prstGeom prst="roundRect">
+            <a:avLst>
+              <a:gd name="adj" fmla="val 13043"/>
+            </a:avLst>
+          </a:prstGeom>
+          <a:solidFill>
+            <a:srgbClr val="16303F"/>
+          </a:solidFill>
+          <a:ln/>
+        </p:spPr>
+      </p:sp>
+      <p:sp>
+        <p:nvSpPr>
+          <p:cNvPr id="5" name="Text 2"/>
+          <p:cNvSpPr txBox="1"/>
+          <p:nvPr/>
+        </p:nvSpPr>
+        <p:spPr>
+          <a:xfrm>
+            <a:off x="9646920" y="457200"/>
+            <a:ext cx="1901952" cy="420624"/>
+          </a:xfrm>
+          <a:prstGeom prst="rect">
+            <a:avLst/>
+          </a:prstGeom>
+          <a:noFill/>
+          <a:ln/>
+        </p:spPr>
+        <p:txBody>
+          <a:bodyPr wrap="square" lIns="0" tIns="0" rIns="0" bIns="0" rtlCol="0" anchor="ctr"/>
+          <a:lstStyle/>
+          <a:p>
+            <a:pPr algn="ctr" indent="0" marL="0">
+              <a:buNone/>
+            </a:pPr>
+            <a:r>
+              <a:rPr lang="en-US" sz="1100" b="1" spc="150" kern="0" dirty="0">
+                <a:solidFill>
+                  <a:srgbClr val="F4C233"/>
+                </a:solidFill>
+                <a:latin typeface="Manrope" pitchFamily="34" charset="0"/>
+                <a:ea typeface="Manrope" pitchFamily="34" charset="-122"/>
+                <a:cs typeface="Manrope" pitchFamily="34" charset="-120"/>
+              </a:rPr>
+              <a:t>SHAPE</a:t>
+            </a:r>
+            <a:endParaRPr lang="en-US" sz="1100" dirty="0"/>
           </a:p>
         </p:txBody>
       </p:sp>
@@ -14853,7 +15252,7 @@
                 <a:ea typeface="Manrope" pitchFamily="34" charset="-122"/>
                 <a:cs typeface="Manrope" pitchFamily="34" charset="-120"/>
               </a:rPr>
-              <a:t>Key-per-file</a:t>
+              <a:t>Connection-string prefixes</a:t>
             </a:r>
             <a:endParaRPr lang="en-US" sz="3800" dirty="0"/>
           </a:p>
@@ -14967,7 +15366,7 @@
                 <a:ea typeface="Manrope" pitchFamily="34" charset="-122"/>
                 <a:cs typeface="Manrope" pitchFamily="34" charset="-120"/>
               </a:rPr>
-              <a:t>Azure Key Vault</a:t>
+              <a:t>Key-per-file</a:t>
             </a:r>
             <a:endParaRPr lang="en-US" sz="3800" dirty="0"/>
           </a:p>
@@ -15032,6 +15431,120 @@
 <file path=ppt/slides/slide35.xml><?xml version="1.0" encoding="utf-8"?>
 <p:sld xmlns:a="http://schemas.openxmlformats.org/drawingml/2006/main" xmlns:r="http://schemas.openxmlformats.org/officeDocument/2006/relationships" xmlns:p="http://schemas.openxmlformats.org/presentationml/2006/main">
   <p:cSld name="Slide 35">
+    <p:spTree>
+      <p:nvGrpSpPr>
+        <p:cNvPr id="1" name=""/>
+        <p:cNvGrpSpPr/>
+        <p:nvPr/>
+      </p:nvGrpSpPr>
+      <p:grpSpPr>
+        <a:xfrm>
+          <a:off x="0" y="0"/>
+          <a:ext cx="0" cy="0"/>
+          <a:chOff x="0" y="0"/>
+          <a:chExt cx="0" cy="0"/>
+        </a:xfrm>
+      </p:grpSpPr>
+      <p:sp>
+        <p:nvSpPr>
+          <p:cNvPr id="2" name="Text 2"/>
+          <p:cNvSpPr/>
+          <p:nvPr>
+            <p:ph idx="102" type="title" hasCustomPrompt="1"/>
+          </p:nvPr>
+        </p:nvSpPr>
+        <p:spPr>
+          <a:xfrm>
+            <a:off x="640080" y="2286000"/>
+            <a:ext cx="10881360" cy="1371600"/>
+          </a:xfrm>
+          <a:prstGeom prst="rect">
+            <a:avLst/>
+          </a:prstGeom>
+          <a:noFill/>
+          <a:ln/>
+        </p:spPr>
+        <p:txBody>
+          <a:bodyPr wrap="square" lIns="0" tIns="0" rIns="0" bIns="0" rtlCol="0"/>
+          <a:lstStyle/>
+          <a:p>
+            <a:pPr algn="l" indent="0" marL="0">
+              <a:buNone/>
+            </a:pPr>
+            <a:r>
+              <a:rPr lang="en-US" sz="3800" b="1" dirty="0">
+                <a:solidFill>
+                  <a:srgbClr val="16303F"/>
+                </a:solidFill>
+                <a:latin typeface="Manrope" pitchFamily="34" charset="0"/>
+                <a:ea typeface="Manrope" pitchFamily="34" charset="-122"/>
+                <a:cs typeface="Manrope" pitchFamily="34" charset="-120"/>
+              </a:rPr>
+              <a:t>Azure Key Vault</a:t>
+            </a:r>
+            <a:endParaRPr lang="en-US" sz="3800" dirty="0"/>
+          </a:p>
+        </p:txBody>
+      </p:sp>
+      <p:sp>
+        <p:nvSpPr>
+          <p:cNvPr id="25" name="Slide Number Placeholder 0"/>
+          <p:cNvSpPr>
+            <a:spLocks noGrp="1"/>
+          </p:cNvSpPr>
+          <p:nvPr>
+            <p:ph type="sldNum" sz="quarter" idx="4294967295"/>
+          </p:nvPr>
+        </p:nvSpPr>
+        <p:spPr>
+          <a:xfrm>
+            <a:off x="10881360" y="6199632"/>
+            <a:ext cx="667512" cy="292608"/>
+          </a:xfrm>
+          <a:prstGeom prst="rect">
+            <a:avLst/>
+          </a:prstGeom>
+          <a:extLst>
+            <a:ext uri="{C572A759-6A51-4108-AA02-DFA0A04FC94B}">
+              <ma14:wrappingTextBoxFlag xmlns:ma14="http://schemas.microsoft.com/office/mac/drawingml/2011/main" val="0"/>
+            </a:ext>
+          </a:extLst>
+        </p:spPr>
+        <p:txBody>
+          <a:bodyPr/>
+          <a:lstStyle>
+            <a:lvl1pPr>
+              <a:defRPr sz="1000">
+                <a:solidFill>
+                  <a:srgbClr val="16303F"/>
+                </a:solidFill>
+                <a:latin typeface="Manrope"/>
+                <a:ea typeface="Manrope"/>
+                <a:cs typeface="Manrope"/>
+              </a:defRPr>
+            </a:lvl1pPr>
+          </a:lstStyle>
+          <a:p>
+            <a:pPr algn="r"/>
+            <a:fld id="{F7021451-1387-4CA6-816F-3879F97B5CBC}" type="slidenum">
+              <a:rPr b="1" lang="en-US"/>
+              <a:t>35</a:t>
+            </a:fld>
+            <a:endParaRPr lang="en-US"/>
+          </a:p>
+        </p:txBody>
+      </p:sp>
+    </p:spTree>
+  </p:cSld>
+  <p:clrMapOvr>
+    <a:masterClrMapping/>
+  </p:clrMapOvr>
+</p:sld>
+</file>
+
+<file path=ppt/slides/slide36.xml><?xml version="1.0" encoding="utf-8"?>
+<p:sld xmlns:a="http://schemas.openxmlformats.org/drawingml/2006/main" xmlns:r="http://schemas.openxmlformats.org/officeDocument/2006/relationships" xmlns:p="http://schemas.openxmlformats.org/presentationml/2006/main">
+  <p:cSld name="Slide 36">
     <p:spTree>
       <p:nvGrpSpPr>
         <p:cNvPr id="1" name=""/>
@@ -15112,7 +15625,7 @@
             <a:pPr algn="r"/>
             <a:fld id="{F7021451-1387-4CA6-816F-3879F97B5CBC}" type="slidenum">
               <a:rPr b="1" lang="en-US"/>
-              <a:t>35</a:t>
+              <a:t>36</a:t>
             </a:fld>
             <a:endParaRPr lang="en-US"/>
           </a:p>
@@ -15126,9 +15639,9 @@
 </p:sld>
 </file>
 
-<file path=ppt/slides/slide36.xml><?xml version="1.0" encoding="utf-8"?>
+<file path=ppt/slides/slide37.xml><?xml version="1.0" encoding="utf-8"?>
 <p:sld xmlns:a="http://schemas.openxmlformats.org/drawingml/2006/main" xmlns:r="http://schemas.openxmlformats.org/officeDocument/2006/relationships" xmlns:p="http://schemas.openxmlformats.org/presentationml/2006/main">
-  <p:cSld name="Slide 36">
+  <p:cSld name="Slide 37">
     <p:spTree>
       <p:nvGrpSpPr>
         <p:cNvPr id="1" name=""/>
@@ -15209,161 +15722,6 @@
             <a:pPr algn="r"/>
             <a:fld id="{F7021451-1387-4CA6-816F-3879F97B5CBC}" type="slidenum">
               <a:rPr b="1" lang="en-US"/>
-              <a:t>36</a:t>
-            </a:fld>
-            <a:endParaRPr lang="en-US"/>
-          </a:p>
-        </p:txBody>
-      </p:sp>
-    </p:spTree>
-  </p:cSld>
-  <p:clrMapOvr>
-    <a:masterClrMapping/>
-  </p:clrMapOvr>
-</p:sld>
-</file>
-
-<file path=ppt/slides/slide37.xml><?xml version="1.0" encoding="utf-8"?>
-<p:sld xmlns:a="http://schemas.openxmlformats.org/drawingml/2006/main" xmlns:r="http://schemas.openxmlformats.org/officeDocument/2006/relationships" xmlns:p="http://schemas.openxmlformats.org/presentationml/2006/main">
-  <p:cSld name="Slide 37">
-    <p:spTree>
-      <p:nvGrpSpPr>
-        <p:cNvPr id="1" name=""/>
-        <p:cNvGrpSpPr/>
-        <p:nvPr/>
-      </p:nvGrpSpPr>
-      <p:grpSpPr>
-        <a:xfrm>
-          <a:off x="0" y="0"/>
-          <a:ext cx="0" cy="0"/>
-          <a:chOff x="0" y="0"/>
-          <a:chExt cx="0" cy="0"/>
-        </a:xfrm>
-      </p:grpSpPr>
-      <p:sp>
-        <p:nvSpPr>
-          <p:cNvPr id="2" name="Text 2"/>
-          <p:cNvSpPr/>
-          <p:nvPr>
-            <p:ph idx="102" type="body" hasCustomPrompt="1"/>
-          </p:nvPr>
-        </p:nvSpPr>
-        <p:spPr>
-          <a:xfrm>
-            <a:off x="640080" y="2331720"/>
-            <a:ext cx="10881360" cy="365760"/>
-          </a:xfrm>
-          <a:prstGeom prst="rect">
-            <a:avLst/>
-          </a:prstGeom>
-          <a:noFill/>
-          <a:ln/>
-        </p:spPr>
-        <p:txBody>
-          <a:bodyPr wrap="square" lIns="0" tIns="0" rIns="0" bIns="0" rtlCol="0"/>
-          <a:lstStyle/>
-          <a:p>
-            <a:pPr indent="0" marL="0">
-              <a:buNone/>
-            </a:pPr>
-            <a:r>
-              <a:rPr lang="en-US" sz="1400" b="1" spc="200" kern="0" dirty="0">
-                <a:solidFill>
-                  <a:srgbClr val="F4C233"/>
-                </a:solidFill>
-                <a:latin typeface="Manrope" pitchFamily="34" charset="0"/>
-                <a:ea typeface="Manrope" pitchFamily="34" charset="-122"/>
-                <a:cs typeface="Manrope" pitchFamily="34" charset="-120"/>
-              </a:rPr>
-              <a:t>STAGE 3</a:t>
-            </a:r>
-            <a:endParaRPr lang="en-US" sz="1400" dirty="0"/>
-          </a:p>
-        </p:txBody>
-      </p:sp>
-      <p:sp>
-        <p:nvSpPr>
-          <p:cNvPr id="3" name="Text 2"/>
-          <p:cNvSpPr/>
-          <p:nvPr>
-            <p:ph idx="103" type="title" hasCustomPrompt="1"/>
-          </p:nvPr>
-        </p:nvSpPr>
-        <p:spPr>
-          <a:xfrm>
-            <a:off x="640080" y="3017520"/>
-            <a:ext cx="10881360" cy="1371600"/>
-          </a:xfrm>
-          <a:prstGeom prst="rect">
-            <a:avLst/>
-          </a:prstGeom>
-          <a:noFill/>
-          <a:ln/>
-        </p:spPr>
-        <p:txBody>
-          <a:bodyPr wrap="square" lIns="0" tIns="0" rIns="0" bIns="0" rtlCol="0"/>
-          <a:lstStyle/>
-          <a:p>
-            <a:pPr algn="l" indent="0" marL="0">
-              <a:buNone/>
-            </a:pPr>
-            <a:r>
-              <a:rPr lang="en-US" sz="4400" b="1" dirty="0">
-                <a:solidFill>
-                  <a:srgbClr val="FFFFFF"/>
-                </a:solidFill>
-                <a:latin typeface="Manrope" pitchFamily="34" charset="0"/>
-                <a:ea typeface="Manrope" pitchFamily="34" charset="-122"/>
-                <a:cs typeface="Manrope" pitchFamily="34" charset="-120"/>
-              </a:rPr>
-              <a:t>Shared</a:t>
-            </a:r>
-            <a:endParaRPr lang="en-US" sz="4400" dirty="0"/>
-          </a:p>
-        </p:txBody>
-      </p:sp>
-      <p:sp>
-        <p:nvSpPr>
-          <p:cNvPr id="25" name="Slide Number Placeholder 0"/>
-          <p:cNvSpPr>
-            <a:spLocks noGrp="1"/>
-          </p:cNvSpPr>
-          <p:nvPr>
-            <p:ph type="sldNum" sz="quarter" idx="4294967295"/>
-          </p:nvPr>
-        </p:nvSpPr>
-        <p:spPr>
-          <a:xfrm>
-            <a:off x="10881360" y="6199632"/>
-            <a:ext cx="667512" cy="292608"/>
-          </a:xfrm>
-          <a:prstGeom prst="rect">
-            <a:avLst/>
-          </a:prstGeom>
-          <a:extLst>
-            <a:ext uri="{C572A759-6A51-4108-AA02-DFA0A04FC94B}">
-              <ma14:wrappingTextBoxFlag xmlns:ma14="http://schemas.microsoft.com/office/mac/drawingml/2011/main" val="0"/>
-            </a:ext>
-          </a:extLst>
-        </p:spPr>
-        <p:txBody>
-          <a:bodyPr/>
-          <a:lstStyle>
-            <a:lvl1pPr>
-              <a:defRPr sz="1000">
-                <a:solidFill>
-                  <a:srgbClr val="F4C233"/>
-                </a:solidFill>
-                <a:latin typeface="Manrope"/>
-                <a:ea typeface="Manrope"/>
-                <a:cs typeface="Manrope"/>
-              </a:defRPr>
-            </a:lvl1pPr>
-          </a:lstStyle>
-          <a:p>
-            <a:pPr algn="r"/>
-            <a:fld id="{F7021451-1387-4CA6-816F-3879F97B5CBC}" type="slidenum">
-              <a:rPr b="1" lang="en-US"/>
               <a:t>37</a:t>
             </a:fld>
             <a:endParaRPr lang="en-US"/>
@@ -15400,13 +15758,13 @@
           <p:cNvPr id="2" name="Text 2"/>
           <p:cNvSpPr/>
           <p:nvPr>
-            <p:ph idx="102" type="title" hasCustomPrompt="1"/>
-          </p:nvPr>
-        </p:nvSpPr>
-        <p:spPr>
-          <a:xfrm>
-            <a:off x="640080" y="2286000"/>
-            <a:ext cx="10881360" cy="1371600"/>
+            <p:ph idx="102" type="body" hasCustomPrompt="1"/>
+          </p:nvPr>
+        </p:nvSpPr>
+        <p:spPr>
+          <a:xfrm>
+            <a:off x="640080" y="2331720"/>
+            <a:ext cx="10881360" cy="365760"/>
           </a:xfrm>
           <a:prstGeom prst="rect">
             <a:avLst/>
@@ -15418,21 +15776,62 @@
           <a:bodyPr wrap="square" lIns="0" tIns="0" rIns="0" bIns="0" rtlCol="0"/>
           <a:lstStyle/>
           <a:p>
-            <a:pPr algn="l" indent="0" marL="0">
-              <a:buNone/>
-            </a:pPr>
-            <a:r>
-              <a:rPr lang="en-US" sz="3800" b="1" dirty="0">
-                <a:solidFill>
-                  <a:srgbClr val="16303F"/>
+            <a:pPr indent="0" marL="0">
+              <a:buNone/>
+            </a:pPr>
+            <a:r>
+              <a:rPr lang="en-US" sz="1400" b="1" spc="200" kern="0" dirty="0">
+                <a:solidFill>
+                  <a:srgbClr val="F4C233"/>
                 </a:solidFill>
                 <a:latin typeface="Manrope" pitchFamily="34" charset="0"/>
                 <a:ea typeface="Manrope" pitchFamily="34" charset="-122"/>
                 <a:cs typeface="Manrope" pitchFamily="34" charset="-120"/>
               </a:rPr>
-              <a:t>Azure App Configuration</a:t>
-            </a:r>
-            <a:endParaRPr lang="en-US" sz="3800" dirty="0"/>
+              <a:t>STAGE 3</a:t>
+            </a:r>
+            <a:endParaRPr lang="en-US" sz="1400" dirty="0"/>
+          </a:p>
+        </p:txBody>
+      </p:sp>
+      <p:sp>
+        <p:nvSpPr>
+          <p:cNvPr id="3" name="Text 2"/>
+          <p:cNvSpPr/>
+          <p:nvPr>
+            <p:ph idx="103" type="title" hasCustomPrompt="1"/>
+          </p:nvPr>
+        </p:nvSpPr>
+        <p:spPr>
+          <a:xfrm>
+            <a:off x="640080" y="3017520"/>
+            <a:ext cx="10881360" cy="1371600"/>
+          </a:xfrm>
+          <a:prstGeom prst="rect">
+            <a:avLst/>
+          </a:prstGeom>
+          <a:noFill/>
+          <a:ln/>
+        </p:spPr>
+        <p:txBody>
+          <a:bodyPr wrap="square" lIns="0" tIns="0" rIns="0" bIns="0" rtlCol="0"/>
+          <a:lstStyle/>
+          <a:p>
+            <a:pPr algn="l" indent="0" marL="0">
+              <a:buNone/>
+            </a:pPr>
+            <a:r>
+              <a:rPr lang="en-US" sz="4400" b="1" dirty="0">
+                <a:solidFill>
+                  <a:srgbClr val="FFFFFF"/>
+                </a:solidFill>
+                <a:latin typeface="Manrope" pitchFamily="34" charset="0"/>
+                <a:ea typeface="Manrope" pitchFamily="34" charset="-122"/>
+                <a:cs typeface="Manrope" pitchFamily="34" charset="-120"/>
+              </a:rPr>
+              <a:t>Shared</a:t>
+            </a:r>
+            <a:endParaRPr lang="en-US" sz="4400" dirty="0"/>
           </a:p>
         </p:txBody>
       </p:sp>
@@ -15466,7 +15865,7 @@
             <a:lvl1pPr>
               <a:defRPr sz="1000">
                 <a:solidFill>
-                  <a:srgbClr val="16303F"/>
+                  <a:srgbClr val="F4C233"/>
                 </a:solidFill>
                 <a:latin typeface="Manrope"/>
                 <a:ea typeface="Manrope"/>
@@ -15544,7 +15943,7 @@
                 <a:ea typeface="Manrope" pitchFamily="34" charset="-122"/>
                 <a:cs typeface="Manrope" pitchFamily="34" charset="-120"/>
               </a:rPr>
-              <a:t>What actually reloads</a:t>
+              <a:t>Azure App Configuration</a:t>
             </a:r>
             <a:endParaRPr lang="en-US" sz="3800" dirty="0"/>
           </a:p>
@@ -15862,13 +16261,13 @@
           <p:cNvPr id="2" name="Text 2"/>
           <p:cNvSpPr/>
           <p:nvPr>
-            <p:ph idx="102" type="body" hasCustomPrompt="1"/>
-          </p:nvPr>
-        </p:nvSpPr>
-        <p:spPr>
-          <a:xfrm>
-            <a:off x="640080" y="2331720"/>
-            <a:ext cx="10881360" cy="365760"/>
+            <p:ph idx="102" type="title" hasCustomPrompt="1"/>
+          </p:nvPr>
+        </p:nvSpPr>
+        <p:spPr>
+          <a:xfrm>
+            <a:off x="640080" y="2286000"/>
+            <a:ext cx="10881360" cy="1371600"/>
           </a:xfrm>
           <a:prstGeom prst="rect">
             <a:avLst/>
@@ -15880,62 +16279,21 @@
           <a:bodyPr wrap="square" lIns="0" tIns="0" rIns="0" bIns="0" rtlCol="0"/>
           <a:lstStyle/>
           <a:p>
-            <a:pPr indent="0" marL="0">
-              <a:buNone/>
-            </a:pPr>
-            <a:r>
-              <a:rPr lang="en-US" sz="1400" b="1" spc="200" kern="0" dirty="0">
-                <a:solidFill>
-                  <a:srgbClr val="F4C233"/>
+            <a:pPr algn="l" indent="0" marL="0">
+              <a:buNone/>
+            </a:pPr>
+            <a:r>
+              <a:rPr lang="en-US" sz="3800" b="1" dirty="0">
+                <a:solidFill>
+                  <a:srgbClr val="16303F"/>
                 </a:solidFill>
                 <a:latin typeface="Manrope" pitchFamily="34" charset="0"/>
                 <a:ea typeface="Manrope" pitchFamily="34" charset="-122"/>
                 <a:cs typeface="Manrope" pitchFamily="34" charset="-120"/>
               </a:rPr>
-              <a:t>FEATURE FLAGS</a:t>
-            </a:r>
-            <a:endParaRPr lang="en-US" sz="1400" dirty="0"/>
-          </a:p>
-        </p:txBody>
-      </p:sp>
-      <p:sp>
-        <p:nvSpPr>
-          <p:cNvPr id="3" name="Text 2"/>
-          <p:cNvSpPr/>
-          <p:nvPr>
-            <p:ph idx="103" type="title" hasCustomPrompt="1"/>
-          </p:nvPr>
-        </p:nvSpPr>
-        <p:spPr>
-          <a:xfrm>
-            <a:off x="640080" y="3017520"/>
-            <a:ext cx="10881360" cy="1371600"/>
-          </a:xfrm>
-          <a:prstGeom prst="rect">
-            <a:avLst/>
-          </a:prstGeom>
-          <a:noFill/>
-          <a:ln/>
-        </p:spPr>
-        <p:txBody>
-          <a:bodyPr wrap="square" lIns="0" tIns="0" rIns="0" bIns="0" rtlCol="0"/>
-          <a:lstStyle/>
-          <a:p>
-            <a:pPr algn="l" indent="0" marL="0">
-              <a:buNone/>
-            </a:pPr>
-            <a:r>
-              <a:rPr lang="en-US" sz="4400" b="1" dirty="0">
-                <a:solidFill>
-                  <a:srgbClr val="FFFFFF"/>
-                </a:solidFill>
-                <a:latin typeface="Manrope" pitchFamily="34" charset="0"/>
-                <a:ea typeface="Manrope" pitchFamily="34" charset="-122"/>
-                <a:cs typeface="Manrope" pitchFamily="34" charset="-120"/>
-              </a:rPr>
-              <a:t>The second half of the thesis</a:t>
-            </a:r>
-            <a:endParaRPr lang="en-US" sz="4400" dirty="0"/>
+              <a:t>What actually reloads</a:t>
+            </a:r>
+            <a:endParaRPr lang="en-US" sz="3800" dirty="0"/>
           </a:p>
         </p:txBody>
       </p:sp>
@@ -15969,7 +16327,7 @@
             <a:lvl1pPr>
               <a:defRPr sz="1000">
                 <a:solidFill>
-                  <a:srgbClr val="F4C233"/>
+                  <a:srgbClr val="16303F"/>
                 </a:solidFill>
                 <a:latin typeface="Manrope"/>
                 <a:ea typeface="Manrope"/>
@@ -16017,13 +16375,13 @@
           <p:cNvPr id="2" name="Text 2"/>
           <p:cNvSpPr/>
           <p:nvPr>
-            <p:ph idx="102" type="title" hasCustomPrompt="1"/>
-          </p:nvPr>
-        </p:nvSpPr>
-        <p:spPr>
-          <a:xfrm>
-            <a:off x="640080" y="2286000"/>
-            <a:ext cx="10881360" cy="1371600"/>
+            <p:ph idx="102" type="body" hasCustomPrompt="1"/>
+          </p:nvPr>
+        </p:nvSpPr>
+        <p:spPr>
+          <a:xfrm>
+            <a:off x="640080" y="2331720"/>
+            <a:ext cx="10881360" cy="365760"/>
           </a:xfrm>
           <a:prstGeom prst="rect">
             <a:avLst/>
@@ -16035,21 +16393,62 @@
           <a:bodyPr wrap="square" lIns="0" tIns="0" rIns="0" bIns="0" rtlCol="0"/>
           <a:lstStyle/>
           <a:p>
-            <a:pPr algn="l" indent="0" marL="0">
-              <a:buNone/>
-            </a:pPr>
-            <a:r>
-              <a:rPr lang="en-US" sz="3800" b="1" dirty="0">
-                <a:solidFill>
-                  <a:srgbClr val="16303F"/>
+            <a:pPr indent="0" marL="0">
+              <a:buNone/>
+            </a:pPr>
+            <a:r>
+              <a:rPr lang="en-US" sz="1400" b="1" spc="200" kern="0" dirty="0">
+                <a:solidFill>
+                  <a:srgbClr val="F4C233"/>
                 </a:solidFill>
                 <a:latin typeface="Manrope" pitchFamily="34" charset="0"/>
                 <a:ea typeface="Manrope" pitchFamily="34" charset="-122"/>
                 <a:cs typeface="Manrope" pitchFamily="34" charset="-120"/>
               </a:rPr>
-              <a:t>A feature flag is just configuration</a:t>
-            </a:r>
-            <a:endParaRPr lang="en-US" sz="3800" dirty="0"/>
+              <a:t>FEATURE FLAGS</a:t>
+            </a:r>
+            <a:endParaRPr lang="en-US" sz="1400" dirty="0"/>
+          </a:p>
+        </p:txBody>
+      </p:sp>
+      <p:sp>
+        <p:nvSpPr>
+          <p:cNvPr id="3" name="Text 2"/>
+          <p:cNvSpPr/>
+          <p:nvPr>
+            <p:ph idx="103" type="title" hasCustomPrompt="1"/>
+          </p:nvPr>
+        </p:nvSpPr>
+        <p:spPr>
+          <a:xfrm>
+            <a:off x="640080" y="3017520"/>
+            <a:ext cx="10881360" cy="1371600"/>
+          </a:xfrm>
+          <a:prstGeom prst="rect">
+            <a:avLst/>
+          </a:prstGeom>
+          <a:noFill/>
+          <a:ln/>
+        </p:spPr>
+        <p:txBody>
+          <a:bodyPr wrap="square" lIns="0" tIns="0" rIns="0" bIns="0" rtlCol="0"/>
+          <a:lstStyle/>
+          <a:p>
+            <a:pPr algn="l" indent="0" marL="0">
+              <a:buNone/>
+            </a:pPr>
+            <a:r>
+              <a:rPr lang="en-US" sz="4400" b="1" dirty="0">
+                <a:solidFill>
+                  <a:srgbClr val="FFFFFF"/>
+                </a:solidFill>
+                <a:latin typeface="Manrope" pitchFamily="34" charset="0"/>
+                <a:ea typeface="Manrope" pitchFamily="34" charset="-122"/>
+                <a:cs typeface="Manrope" pitchFamily="34" charset="-120"/>
+              </a:rPr>
+              <a:t>The second half of the thesis</a:t>
+            </a:r>
+            <a:endParaRPr lang="en-US" sz="4400" dirty="0"/>
           </a:p>
         </p:txBody>
       </p:sp>
@@ -16083,7 +16482,7 @@
             <a:lvl1pPr>
               <a:defRPr sz="1000">
                 <a:solidFill>
-                  <a:srgbClr val="16303F"/>
+                  <a:srgbClr val="F4C233"/>
                 </a:solidFill>
                 <a:latin typeface="Manrope"/>
                 <a:ea typeface="Manrope"/>
@@ -16161,7 +16560,7 @@
                 <a:ea typeface="Manrope" pitchFamily="34" charset="-122"/>
                 <a:cs typeface="Manrope" pitchFamily="34" charset="-120"/>
               </a:rPr>
-              <a:t>Flags with no cloud at all</a:t>
+              <a:t>A feature flag is just configuration</a:t>
             </a:r>
             <a:endParaRPr lang="en-US" sz="3800" dirty="0"/>
           </a:p>
@@ -16275,7 +16674,7 @@
                 <a:ea typeface="Manrope" pitchFamily="34" charset="-122"/>
                 <a:cs typeface="Manrope" pitchFamily="34" charset="-120"/>
               </a:rPr>
-              <a:t>Filters — and the percentage gotcha</a:t>
+              <a:t>Flags with no cloud at all</a:t>
             </a:r>
             <a:endParaRPr lang="en-US" sz="3800" dirty="0"/>
           </a:p>
@@ -16389,7 +16788,7 @@
                 <a:ea typeface="Manrope" pitchFamily="34" charset="-122"/>
                 <a:cs typeface="Manrope" pitchFamily="34" charset="-120"/>
               </a:rPr>
-              <a:t>Variants</a:t>
+              <a:t>Filters — and the percentage gotcha</a:t>
             </a:r>
             <a:endParaRPr lang="en-US" sz="3800" dirty="0"/>
           </a:p>
@@ -16503,7 +16902,7 @@
                 <a:ea typeface="Manrope" pitchFamily="34" charset="-122"/>
                 <a:cs typeface="Manrope" pitchFamily="34" charset="-120"/>
               </a:rPr>
-              <a:t>Flag debt</a:t>
+              <a:t>Variants</a:t>
             </a:r>
             <a:endParaRPr lang="en-US" sz="3800" dirty="0"/>
           </a:p>
@@ -16617,7 +17016,7 @@
                 <a:ea typeface="Manrope" pitchFamily="34" charset="-122"/>
                 <a:cs typeface="Manrope" pitchFamily="34" charset="-120"/>
               </a:rPr>
-              <a:t>The honest counterargument</a:t>
+              <a:t>Flag debt</a:t>
             </a:r>
             <a:endParaRPr lang="en-US" sz="3800" dirty="0"/>
           </a:p>
@@ -16731,7 +17130,7 @@
                 <a:ea typeface="Manrope" pitchFamily="34" charset="-122"/>
                 <a:cs typeface="Manrope" pitchFamily="34" charset="-120"/>
               </a:rPr>
-              <a:t>Sort every setting into three buckets</a:t>
+              <a:t>The honest counterargument</a:t>
             </a:r>
             <a:endParaRPr lang="en-US" sz="3800" dirty="0"/>
           </a:p>
@@ -16845,7 +17244,7 @@
                 <a:ea typeface="Manrope" pitchFamily="34" charset="-122"/>
                 <a:cs typeface="Manrope" pitchFamily="34" charset="-120"/>
               </a:rPr>
-              <a:t>By application shape</a:t>
+              <a:t>Sort every setting into three buckets</a:t>
             </a:r>
             <a:endParaRPr lang="en-US" sz="3800" dirty="0"/>
           </a:p>
@@ -16959,7 +17358,7 @@
                 <a:ea typeface="Manrope" pitchFamily="34" charset="-122"/>
                 <a:cs typeface="Manrope" pitchFamily="34" charset="-120"/>
               </a:rPr>
-              <a:t>Don't do this</a:t>
+              <a:t>By application shape</a:t>
             </a:r>
             <a:endParaRPr lang="en-US" sz="3800" dirty="0"/>
           </a:p>
@@ -17443,7 +17842,7 @@
                 <a:ea typeface="Manrope" pitchFamily="34" charset="-122"/>
                 <a:cs typeface="Manrope" pitchFamily="34" charset="-120"/>
               </a:rPr>
-              <a:t>The desktop aside</a:t>
+              <a:t>Don't do this</a:t>
             </a:r>
             <a:endParaRPr lang="en-US" sz="3800" dirty="0"/>
           </a:p>
@@ -17557,7 +17956,7 @@
                 <a:ea typeface="Manrope" pitchFamily="34" charset="-122"/>
                 <a:cs typeface="Manrope" pitchFamily="34" charset="-120"/>
               </a:rPr>
-              <a:t>What changed in .NET 10</a:t>
+              <a:t>The desktop aside</a:t>
             </a:r>
             <a:endParaRPr lang="en-US" sz="3800" dirty="0"/>
           </a:p>
@@ -17641,13 +18040,13 @@
           <p:cNvPr id="2" name="Text 2"/>
           <p:cNvSpPr/>
           <p:nvPr>
-            <p:ph idx="102" type="body" hasCustomPrompt="1"/>
-          </p:nvPr>
-        </p:nvSpPr>
-        <p:spPr>
-          <a:xfrm>
-            <a:off x="640080" y="2331720"/>
-            <a:ext cx="10881360" cy="365760"/>
+            <p:ph idx="102" type="title" hasCustomPrompt="1"/>
+          </p:nvPr>
+        </p:nvSpPr>
+        <p:spPr>
+          <a:xfrm>
+            <a:off x="640080" y="2286000"/>
+            <a:ext cx="10881360" cy="1371600"/>
           </a:xfrm>
           <a:prstGeom prst="rect">
             <a:avLst/>
@@ -17659,51 +18058,21 @@
           <a:bodyPr wrap="square" lIns="0" tIns="0" rIns="0" bIns="0" rtlCol="0"/>
           <a:lstStyle/>
           <a:p>
-            <a:pPr indent="0" marL="0">
-              <a:buNone/>
-            </a:pPr>
-            <a:endParaRPr lang="en-US" sz="1400" dirty="0"/>
-          </a:p>
-        </p:txBody>
-      </p:sp>
-      <p:sp>
-        <p:nvSpPr>
-          <p:cNvPr id="3" name="Text 2"/>
-          <p:cNvSpPr/>
-          <p:nvPr>
-            <p:ph idx="103" type="title" hasCustomPrompt="1"/>
-          </p:nvPr>
-        </p:nvSpPr>
-        <p:spPr>
-          <a:xfrm>
-            <a:off x="640080" y="3017520"/>
-            <a:ext cx="10881360" cy="1371600"/>
-          </a:xfrm>
-          <a:prstGeom prst="rect">
-            <a:avLst/>
-          </a:prstGeom>
-          <a:noFill/>
-          <a:ln/>
-        </p:spPr>
-        <p:txBody>
-          <a:bodyPr wrap="square" lIns="0" tIns="0" rIns="0" bIns="0" rtlCol="0"/>
-          <a:lstStyle/>
-          <a:p>
             <a:pPr algn="l" indent="0" marL="0">
               <a:buNone/>
             </a:pPr>
             <a:r>
-              <a:rPr lang="en-US" sz="4400" b="1" dirty="0">
-                <a:solidFill>
-                  <a:srgbClr val="FFFFFF"/>
+              <a:rPr lang="en-US" sz="3800" b="1" dirty="0">
+                <a:solidFill>
+                  <a:srgbClr val="16303F"/>
                 </a:solidFill>
                 <a:latin typeface="Manrope" pitchFamily="34" charset="0"/>
                 <a:ea typeface="Manrope" pitchFamily="34" charset="-122"/>
                 <a:cs typeface="Manrope" pitchFamily="34" charset="-120"/>
               </a:rPr>
-              <a:t>Questions</a:t>
-            </a:r>
-            <a:endParaRPr lang="en-US" sz="4400" dirty="0"/>
+              <a:t>What changed in .NET 10</a:t>
+            </a:r>
+            <a:endParaRPr lang="en-US" sz="3800" dirty="0"/>
           </a:p>
         </p:txBody>
       </p:sp>
@@ -17737,7 +18106,7 @@
             <a:lvl1pPr>
               <a:defRPr sz="1000">
                 <a:solidFill>
-                  <a:srgbClr val="F4C233"/>
+                  <a:srgbClr val="16303F"/>
                 </a:solidFill>
                 <a:latin typeface="Manrope"/>
                 <a:ea typeface="Manrope"/>
@@ -17766,6 +18135,150 @@
 <file path=ppt/slides/slide53.xml><?xml version="1.0" encoding="utf-8"?>
 <p:sld xmlns:a="http://schemas.openxmlformats.org/drawingml/2006/main" xmlns:r="http://schemas.openxmlformats.org/officeDocument/2006/relationships" xmlns:p="http://schemas.openxmlformats.org/presentationml/2006/main">
   <p:cSld name="Slide 53">
+    <p:spTree>
+      <p:nvGrpSpPr>
+        <p:cNvPr id="1" name=""/>
+        <p:cNvGrpSpPr/>
+        <p:nvPr/>
+      </p:nvGrpSpPr>
+      <p:grpSpPr>
+        <a:xfrm>
+          <a:off x="0" y="0"/>
+          <a:ext cx="0" cy="0"/>
+          <a:chOff x="0" y="0"/>
+          <a:chExt cx="0" cy="0"/>
+        </a:xfrm>
+      </p:grpSpPr>
+      <p:sp>
+        <p:nvSpPr>
+          <p:cNvPr id="2" name="Text 2"/>
+          <p:cNvSpPr/>
+          <p:nvPr>
+            <p:ph idx="102" type="body" hasCustomPrompt="1"/>
+          </p:nvPr>
+        </p:nvSpPr>
+        <p:spPr>
+          <a:xfrm>
+            <a:off x="640080" y="2331720"/>
+            <a:ext cx="10881360" cy="365760"/>
+          </a:xfrm>
+          <a:prstGeom prst="rect">
+            <a:avLst/>
+          </a:prstGeom>
+          <a:noFill/>
+          <a:ln/>
+        </p:spPr>
+        <p:txBody>
+          <a:bodyPr wrap="square" lIns="0" tIns="0" rIns="0" bIns="0" rtlCol="0"/>
+          <a:lstStyle/>
+          <a:p>
+            <a:pPr indent="0" marL="0">
+              <a:buNone/>
+            </a:pPr>
+            <a:endParaRPr lang="en-US" sz="1400" dirty="0"/>
+          </a:p>
+        </p:txBody>
+      </p:sp>
+      <p:sp>
+        <p:nvSpPr>
+          <p:cNvPr id="3" name="Text 2"/>
+          <p:cNvSpPr/>
+          <p:nvPr>
+            <p:ph idx="103" type="title" hasCustomPrompt="1"/>
+          </p:nvPr>
+        </p:nvSpPr>
+        <p:spPr>
+          <a:xfrm>
+            <a:off x="640080" y="3017520"/>
+            <a:ext cx="10881360" cy="1371600"/>
+          </a:xfrm>
+          <a:prstGeom prst="rect">
+            <a:avLst/>
+          </a:prstGeom>
+          <a:noFill/>
+          <a:ln/>
+        </p:spPr>
+        <p:txBody>
+          <a:bodyPr wrap="square" lIns="0" tIns="0" rIns="0" bIns="0" rtlCol="0"/>
+          <a:lstStyle/>
+          <a:p>
+            <a:pPr algn="l" indent="0" marL="0">
+              <a:buNone/>
+            </a:pPr>
+            <a:r>
+              <a:rPr lang="en-US" sz="4400" b="1" dirty="0">
+                <a:solidFill>
+                  <a:srgbClr val="FFFFFF"/>
+                </a:solidFill>
+                <a:latin typeface="Manrope" pitchFamily="34" charset="0"/>
+                <a:ea typeface="Manrope" pitchFamily="34" charset="-122"/>
+                <a:cs typeface="Manrope" pitchFamily="34" charset="-120"/>
+              </a:rPr>
+              <a:t>Questions</a:t>
+            </a:r>
+            <a:endParaRPr lang="en-US" sz="4400" dirty="0"/>
+          </a:p>
+        </p:txBody>
+      </p:sp>
+      <p:sp>
+        <p:nvSpPr>
+          <p:cNvPr id="25" name="Slide Number Placeholder 0"/>
+          <p:cNvSpPr>
+            <a:spLocks noGrp="1"/>
+          </p:cNvSpPr>
+          <p:nvPr>
+            <p:ph type="sldNum" sz="quarter" idx="4294967295"/>
+          </p:nvPr>
+        </p:nvSpPr>
+        <p:spPr>
+          <a:xfrm>
+            <a:off x="10881360" y="6199632"/>
+            <a:ext cx="667512" cy="292608"/>
+          </a:xfrm>
+          <a:prstGeom prst="rect">
+            <a:avLst/>
+          </a:prstGeom>
+          <a:extLst>
+            <a:ext uri="{C572A759-6A51-4108-AA02-DFA0A04FC94B}">
+              <ma14:wrappingTextBoxFlag xmlns:ma14="http://schemas.microsoft.com/office/mac/drawingml/2011/main" val="0"/>
+            </a:ext>
+          </a:extLst>
+        </p:spPr>
+        <p:txBody>
+          <a:bodyPr/>
+          <a:lstStyle>
+            <a:lvl1pPr>
+              <a:defRPr sz="1000">
+                <a:solidFill>
+                  <a:srgbClr val="F4C233"/>
+                </a:solidFill>
+                <a:latin typeface="Manrope"/>
+                <a:ea typeface="Manrope"/>
+                <a:cs typeface="Manrope"/>
+              </a:defRPr>
+            </a:lvl1pPr>
+          </a:lstStyle>
+          <a:p>
+            <a:pPr algn="r"/>
+            <a:fld id="{F7021451-1387-4CA6-816F-3879F97B5CBC}" type="slidenum">
+              <a:rPr b="1" lang="en-US"/>
+              <a:t>53</a:t>
+            </a:fld>
+            <a:endParaRPr lang="en-US"/>
+          </a:p>
+        </p:txBody>
+      </p:sp>
+    </p:spTree>
+  </p:cSld>
+  <p:clrMapOvr>
+    <a:masterClrMapping/>
+  </p:clrMapOvr>
+</p:sld>
+</file>
+
+<file path=ppt/slides/slide54.xml><?xml version="1.0" encoding="utf-8"?>
+<p:sld xmlns:a="http://schemas.openxmlformats.org/drawingml/2006/main" xmlns:r="http://schemas.openxmlformats.org/officeDocument/2006/relationships" xmlns:p="http://schemas.openxmlformats.org/presentationml/2006/main">
+  <p:cSld name="Slide 54">
     <p:spTree>
       <p:nvGrpSpPr>
         <p:cNvPr id="1" name=""/>

--- a/slides/modern-dotnet-configuration.pptx
+++ b/slides/modern-dotnet-configuration.pptx
@@ -977,12 +977,16 @@
           <a:p>
             <a:r>
               <a:rPr lang="en-US" dirty="0"/>
-              <a:t>[16-23 min] EVERYTHING IS A STRING - S2
+              <a:t>[16-23 min] EVERY SCALAR IS TEXT - OR NULL - S2
 60-min: keep - it's 20 seconds and it justifies the whole options block
 Headline only.
 Every int, every bool, every TimeSpan, every Uri you ever read out of
 configuration is a BINDER CONVERSION that happened on your behalf. The
-dictionary holds strings. Only strings. Always strings.
+contract is string? - text, or nothing.
+Be precise about the 'or null'. Before .NET 10 the JSON provider flattened a
+real null to an empty string, so 'always a string' was literally true. It
+preserves null now, which is the breaking change later in the talk. If you
+say 'always a string' here, you contradict yourself at the .NET 10 slide.
 WHY THIS MATTERS ENOUGH FOR ITS OWN SLIDE:
 This is the fact that makes S5 necessary rather than merely tidy. If every
 value is a string, then every value can be the WRONG string - malformed,
@@ -5724,6 +5728,10 @@
 - "How do I test any of this?"
   S4.8 in-memory provider, added last so it beats everything. Same answer for
   feature flags (S6.7).
+- "What about INI or XML?"
+  Cut on purpose, not forgotten. AddIniFile and AddXmlFile exist and are built
+  in. Same provider model, same precedence rules - which is exactly why they
+  did not earn a slide.
 - "Does IOptionsMonitor work in a console app?"
   Yes, but nothing triggers a refresh for you. That's the S4.6 activity-driven
   point - call TryRefreshAsync yourself.
@@ -9229,7 +9237,7 @@
                 <a:ea typeface="Manrope" pitchFamily="34" charset="-122"/>
                 <a:cs typeface="Manrope" pitchFamily="34" charset="-120"/>
               </a:rPr>
-              <a:t>Every value is a string.</a:t>
+              <a:t>Every scalar is text — or null.</a:t>
             </a:r>
             <a:endParaRPr lang="en-US" sz="3800" dirty="0"/>
           </a:p>
@@ -19514,7 +19522,7 @@
                 <a:ea typeface="Manrope" pitchFamily="34" charset="-122"/>
                 <a:cs typeface="Manrope" pitchFamily="34" charset="-120"/>
               </a:rPr>
-              <a:t>If it could ever differ, it belongs in configuration.</a:t>
+              <a:t>If an operational value can differ by environment, deployment or time, configure it.</a:t>
             </a:r>
             <a:endParaRPr lang="en-US" sz="3800" dirty="0"/>
           </a:p>
@@ -19531,7 +19539,7 @@
                 <a:ea typeface="Manrope" pitchFamily="34" charset="-122"/>
                 <a:cs typeface="Manrope" pitchFamily="34" charset="-120"/>
               </a:rPr>
-              <a:t>If it could ever change without a deploy, it belongs behind a flag.</a:t>
+              <a:t>If a code path must be switchable without a deploy, flag it.</a:t>
             </a:r>
             <a:endParaRPr lang="en-US" sz="3800" dirty="0"/>
           </a:p>

--- a/slides/modern-dotnet-configuration.pptx
+++ b/slides/modern-dotnet-configuration.pptx
@@ -567,15 +567,15 @@
               <a:rPr lang="en-US" dirty="0"/>
               <a:t>[COLD OPEN 1 of 2] THE CONTRADICTION
 60-min: keep, ~90 seconds for both cold open slides
-FIRST THING THE ROOM SEES. No title slide yet. No introduction. Say nothing
+first THING THE ROOM SEES. No title slide yet. No introduction. Say nothing
 for a beat, then read it out flatly:
 "The file says one hundred and twenty. The app says ten."
 Then STOP TALKING. Count to ten in your head. Let it be uncomfortable.
-Do NOT explain it. Do NOT say "who can tell me why". Do not take a guess from
+Don't explain it. Don't say "who can tell me why". Do not take a guess from
 the floor. The only line you say is:
 "We'll come back to this."
 Then advance.
-WHY OPEN HERE: "why externalize configuration" and "how do we load it" are
+WHY OPEN here: "why externalize configuration" and "how do we load it" are
 both expository. Two explanatory beats back to back is a flat first ten
 minutes. A small mystery buys attention for the parts that are genuinely just
 exposition - and it gets paid off properly at GetDebugView.
@@ -681,18 +681,18 @@
 SHARED - many apps and instances; values that change without a deploy.
   Azure App Configuration - labels, refresh, sentinel keys, feature flags
 EACH STAGE IS INTRODUCED BY THE FAILURE THAT FORCES YOU TO THE NEXT ONE.
-This is what gives the spine motion instead of making it a list:
+This is what gives the journey motion instead of making it a list:
   Local dev   -&gt; "works on my machine"       (launchSettings overriding your env
                                              var; secrets on one laptop)
   Deployment  -&gt; "the value didn't make it"  (a provider you forgot was winning;
                                              wrong key shape; secret cached)
   Shared      -&gt; "it changed, but not everywhere at once" (stale caches,
                                              half-applied edits, idle instance)
-TWO THINGS TO SAY WITH THIS UP:
+Two things to say with this up:
 - The stages are CUMULATIVE, not alternatives. A stage-three app still has
   appsettings.json for defaults and still takes per-instance values from env vars.
   You add layers; you don't replace them.
-- KNOW WHERE TO STOP. Stage three earns its complexity when more than one app
+- KNOW where TO STOP. Stage three earns its complexity when more than one app
   shares values, or something genuinely must change without a deploy. S7 decides.</a:t>
             </a:r>
             <a:endParaRPr lang="en-US" dirty="0"/>
@@ -790,11 +790,11 @@
 3. LIFETIME - you cached a value that was supposed to change, or didn't cache
               one that wasn't.
 4. TRUST    - a secret is sitting in a file that ships with the app.
-NAME THEM OUT LOUD AS THEY COME UP:
+Name them out loud as they come up:
   order on Same key. Four winners.    shape on Environment variables
   lifetime on the three interfaces    trust on User secrets
 By the anti-patterns slide the audience should be calling them before you do.
-That's the win condition for this slide.</a:t>
+that is when this slide has done its job.</a:t>
             </a:r>
             <a:endParaRPr lang="en-US" dirty="0"/>
           </a:p>
@@ -884,12 +884,12 @@
               <a:rPr lang="en-US" dirty="0"/>
               <a:t>[ACT 1] THE SHARED BASELINE
 60-min: keep, 30 seconds
-FIRST BOUNDARY. Everything from here to the end is one application moving:
+first BOUNDARY. Everything from here to the end is one application moving:
 the baseline everyone shares -&gt; my machine -&gt; a shared dev server -&gt; production.
 The baseline is the part everyone agrees on. It is checked in, it is reviewed,
 and it travels with the artifact. Nothing here is secret and nothing here is
 machine-specific - those come next, and they OVERRIDE this rather than replace it.
-THE QUESTION THIS ACT ANSWERS:
+The question this act answers:
   "Who owns this value, and what does everyone get by default?"
 Weather:TimeoutSeconds is the value to follow. It starts at 30 here and it will
 cross every boundary in the talk.</a:t>
@@ -988,11 +988,11 @@
 - Flat IDictionary&lt;string, string?&gt; with ':' as the hierarchy delimiter.
   {"Db": {"Timeout": 30}} is the single key Db:Timeout with the STRING "30".
 - KEYS ARE CASE-INSENSITIVE. DB:TIMEOUT == db:timeout.
-- VALUES ARE ALWAYS STRINGS. Every int, bool, TimeSpan, Uri is a binder conversion.
-- LAST PROVIDER WINS. Add() appends; reads walk the list in reverse, first hit wins.
+- VALUES ARE always STRINGS. Every int, bool, TimeSpan, Uri is a binder conversion.
+- last PROVIDER WINS. Add() appends; reads walk the list in reverse, first hit wins.
 - ARRAY ELEMENTS ARE KEYS TOO: Servers:0:Host, Servers:1:Host.
-- A duplicate key INSIDE one file provider throws FormatException.
-  A duplicate key ACROSS providers is the whole point of the system.
+- A duplicate key inside one file provider throws FormatException.
+  A duplicate key across providers is the whole point of the system.
 Show that these are all the same read:
   config["Db:Timeout"]
   config.GetSection("Db")["Timeout"]
@@ -1085,13 +1085,13 @@
           <a:p>
             <a:r>
               <a:rPr lang="en-US" dirty="0"/>
-              <a:t>[16-23 min] EVERYTHING IS A STRING - S2
+              <a:t>[16-23 min] everything IS A STRING - S2
 60-min: keep - it's 20 seconds and it justifies the whole options block
 Headline only.
 Every int, every bool, every TimeSpan, every Uri you ever read out of
 configuration is a BINDER CONVERSION that happened on your behalf. The
 dictionary holds strings. Only strings. Always strings.
-WHY THIS MATTERS ENOUGH FOR ITS OWN SLIDE:
+Why this matters enough for its own slide:
 This is the fact that makes S5 necessary rather than merely tidy. If every
 value is a string, then every value can be the WRONG string - malformed,
 empty, or a word where you wanted a number - and nothing in the configuration
@@ -1189,7 +1189,7 @@
               <a:rPr lang="en-US" dirty="0"/>
               <a:t>[S4.1] THE ARRAY SURPRISE
 Snippet: lifted from d03
-60-min: FIRST THING TO CUT if you are running long - it is a gasp, not a
+60-min: first THING TO CUT if you are running long - it is a gasp, not a
 load-bearing idea
 The reliable audible reaction of the talk. Set it up as a question:
 "The base file has three hosts. The Development file has one. How many hosts
@@ -1202,7 +1202,7 @@
 Call back to the flat dictionary slide. This is that slide's consequence, and
 it is the moment people realise the mental model actually predicts behaviour
 rather than just describing it.
-WHAT TO DO INSTEAD - say it, because someone is about to go fix this today:
+what TO DO instead - say it, because someone is about to go fix this today:
 - Prefer an object keyed by name over a positional array.
 - Or replace the whole section deliberately rather than relying on the overlay.
 - Anti-pattern #10 is exactly this assumption in appsettings.Production.json.
@@ -1296,7 +1296,7 @@
               <a:rPr lang="en-US" dirty="0"/>
               <a:t>[31-39 min] STAGE 1 - LOCAL DEV
 60-min: compress to 4 min
-THE PROBLEM THIS STAGE SOLVES:
+The problem this stage solves:
 A developer clones the repo and it runs. Secrets never touch git.
 Sources: appsettings.json, appsettings.Development.json, user secrets,
 launchSettings.json
@@ -1403,7 +1403,7 @@
   framework's well-known values.
 - Build Action = Content, Copy = PreserveNewest - or the file isn't next to the
   DLL at runtime. This one bites people in published output, not in F5.
-IF SOMEONE ASKS about taking full control:
+IF someone ASKS about taking full control:
   builder.Configuration.Sources.Clear();
   then AddJsonFile / AddEnvironmentVariables / AddCommandLine explicitly.
 Mention it exists; don't dwell. Most apps shouldn't.
@@ -1412,7 +1412,7 @@
 is in the wrong bucket.
 ON SCREEN: three panels. Base, the environment overlay, and what the app
 actually sees. Gold marks the values the environment file supplied.
-THE ROW THAT TEACHES IT is TimeoutSeconds. The Development file says nothing
+THE ROW that TEACHES IT is TimeoutSeconds. The Development file says nothing
 about it, so 30 SURVIVES from the base file. That is what "merges key by key"
 means, and it is why this is not a file swap.
 HOUSEKEEPING - say these, do not slide them:
@@ -1512,16 +1512,16 @@
               <a:t>[31-39 min] USER SECRETS - S4.4
 Snippet: lifted from d09
 60-min: keep - mention .NET 10 file-based apps in one line
-WHAT IT IS NOT: not encrypted, not a vault.
+what IT IS not: not encrypted, not a vault.
 THE SINGLE PURPOSE: keeping secrets out of the repo on a dev box.
   dotnet user-secrets init          (adds &lt;UserSecretsId&gt; to the .csproj)
   dotnet user-secrets set "Weather:ApiKey" "dev-key-12345"
   dotnet user-secrets list / remove / clear
 Bulk load by piping JSON into 'dotnet user-secrets set'.
-Storage - mention, but tell them NOT to write code against it:
+Storage - mention, but tell them not to write code against it:
   Windows: %APPDATA%\Microsoft\UserSecrets\&lt;id&gt;\secrets.json
   Linux/macOS: ~/.microsoft/usersecrets/&lt;id&gt;/secrets.json
-Registered automatically by the default builders ONLY in Development.
+Registered automatically by the default builders only in Development.
 It sits ABOVE the JSON files and BELOW environment variables and command line.
 .NET 10 BONUS - file-based apps:
 'dotnet run app.cs' programs get a stable UserSecretsId derived from a hash of
@@ -1532,16 +1532,16 @@
 Failure mode #4: TRUST. Name it.
 ON SCREEN: the repo holds a GUID. Your laptop holds the actual secret, in
 plaintext, in a file anyone with your login can read.
-SAY IT PLAINLY: "This is not encryption. This is not a vault. The whole
+Say: "This is not encryption. This is not a vault. The whole
 feature is a convention for putting the file somewhere git will never see."
 That is not a criticism - it is exactly the right tool for the job it has. But
 half the room believes it is encrypted, and the ones who believe that are the
 ones who will reach for it in production.
-WHERE IT SITS IN THE CHAIN - say it, do not slide it:
-Development environment ONLY. Above the JSON files, below environment
+where IT SITS IN THE CHAIN - say it, do not slide it:
+Development environment only. Above the JSON files, below environment
 variables and the command line. The precedence table already showed the rank;
 point back at it rather than repeating it.
-Storage paths, for the record - and tell them NOT to write code against these:
+Storage paths, for the record - and tell them not to write code against these:
   Windows       %APPDATA%MicrosoftUserSecrets&lt;id&gt;secrets.json
   Linux/macOS   ~/.microsoft/usersecrets/&lt;id&gt;/secrets.json</a:t>
             </a:r>
@@ -1636,7 +1636,7 @@
 60-min: keep, fast
 Five commands and one .NET 10 addition. Do not read them out. Let people
 photograph it and say what matters instead.
-WHAT MATTERS:
+What matters:
 - 'init' writes the UserSecretsId into the .csproj. That id is the only thing
   the repo ever learns about your secrets.
 - Values are set by KEY PATH using the colon form - "Weather:ApiKey", not
@@ -1844,13 +1844,13 @@
 THE #1 "works on my machine" configuration story:
 launchSettings.json environment variables OVERRIDE machine and user environment
 variables during local F5 / dotnet run - and launchSettings.json is a
-DEVELOPMENT-ONLY file that never deploys.
+DEVELOPMENT-only file that never deploys.
 So: you set an env var, you run locally, nothing changes, you conclude env vars
 don't work. Or worse - it works locally because of launchSettings, and the value
 simply isn't there in production.
 Show the two side by side: the env var you set, and the launchSettings entry
 that quietly beats it. Then the same app with that entry deleted.
-CLOSE THE STAGE HERE:
+Close the stage here:
 "That's stage one's signature failure. The fix isn't a better laptop - it's
 letting the platform supply the values. That's stage two."
 Failure mode #1 (ORDER) and #2 (SHAPE) both live here.</a:t>
@@ -1953,7 +1953,7 @@
 That is why this is the number one "works on my machine" configuration story. It
 is not that the machine is different. It is that a development-only file is in
 the chain locally and absent everywhere else.
-CLOSE THE STAGE HERE:
+Close the stage here:
 "That is stage one's signature failure. The fix is not a better laptop - it is
 letting the platform supply the values. That is stage two."</a:t>
             </a:r>
@@ -2045,7 +2045,7 @@
               <a:rPr lang="en-US" dirty="0"/>
               <a:t>[S3.1] DEFAULT PROVIDER ORDER
 60-min: keep - compressed into the order block
-HIGHEST PRIORITY FIRST. Reads top-down as "who wins".
+HIGHEST PRIORITY first. Reads top-down as "who wins".
 The two rows people have never seen are 5 and 6 -
 {ApplicationName}.settings.json and its environment variant. They are real,
 and they apply to WEB APPS TOO, not just workers. WebApplication.CreateBuilder
@@ -2053,13 +2053,13 @@
 The known exception is CreateSlimBuilder, whose slim defaults omit them.
 Verified on SDK 10.0.303: a file-based app web.cs really does probe
 web.settings.json and web.settings.Development.json.
-ROW 1 IS THE OTHER SURPRISE. The chained provider is added LAST, which makes
+ROW 1 IS THE OTHER SURPRISE. The chained provider is added last, which makes
 host configuration the highest-priority source, not the lowest. People assume
 the opposite because it is read first. Read first, applied last.
-ROW 2 - the command-line provider is registered TWICE: once during host
+ROW 2 - the command-line provider is registered twice: once during host
 configuration so --environment can pick which files load, and once at the end
 so it still wins the final read. That is deliberate, not a bug.
-WHEN THE DUMP IS ON SCREEN the audience will count more providers than this
+when THE DUMP IS ON SCREEN the audience will count more providers than this
 table has rows - two MemoryConfigurationProviders and the prefixed env var
 providers. Say that those are host plumbing and move on; do not narrate all
 thirteen.</a:t>
@@ -2153,19 +2153,19 @@
               <a:t>[S3.2] HOST CONFIGURATION - THE TWO-PASS READ
 60-min: keep - one slide, best "aha" in the order block
 A real dump. One command, two effects.
-Host configuration is read FIRST and it decides EnvironmentName. EnvironmentName
-then decides WHICH appsettings.{Environment}.json even gets loaded. So the
-command-line provider is registered TWICE on purpose:
+Host configuration is read first and it decides EnvironmentName. EnvironmentName
+then decides which appsettings.{Environment}.json even gets loaded. So the
+command-line provider is registered twice on purpose:
   pass 1  so --environment Staging can influence which files load
   pass 2  so the same argument still wins the final read
 Point at the two CommandLineConfigurationProvider lines. They are the same
 provider, registered at both ends of the chain. That looks like a bug in the
 framework until you see what it buys.
-THE LINE TO SAY:
+Say:
 "ASPNETCORE_ENVIRONMENT is not just another setting. It is the input that picks
 the rest of your inputs."
 That reframing is what makes the two-phase design look deliberate instead of
-accidental. It also explains why setting the environment variable AFTER the host
+accidental. It also explains why setting the environment variable after the host
 is built does nothing at all.
 For a non-web host it is DOTNET_ENVIRONMENT, not ASPNETCORE_ENVIRONMENT. Say it
 once; someone in the room is writing a worker this week.</a:t>
@@ -2258,7 +2258,7 @@
               <a:rPr lang="en-US" dirty="0"/>
               <a:t>[layering] PRECEDENCE, SHOWN
 Snippets: lifted from d02 and d03
-60-min: keep this; the array slide is the FIRST thing to cut if you run long
+60-min: keep this; the array slide is the first thing to cut if you run long
 Do not read the slide aloud. Walk down the four rows, name the source each
 time, and let the numbers do the work.
 THE LAYERS - JSON, then the environment file, then an env var, then a CLI arg.
@@ -2266,7 +2266,7 @@
 This is what makes "last provider wins" concrete instead of abstract.
 THE ARRAY SURPRISE is the next slide.
 appsettings.json has ["a","b","c"]. The environment file has ["x"].
-Result: ["x","b","c"] - NOT ["x"].
+Result: ["x","b","c"] - not ["x"].
 Why: the environment file MERGES OVER the base file key by key. It is not a
 replacement. Arrays don't merge cleanly because index keys overlay individually:
   Servers:0 = "x"   (overwritten)
@@ -2274,7 +2274,7 @@
   Servers:2 = "c"   (survives)
 This gets an audible reaction every time. But it's a gasp, not a load-bearing
 idea - it's the first cut at 60 minutes.
-WHAT TO DO INSTEAD: prefer an object keyed by name, or replace the section
+what TO DO instead: prefer an object keyed by name, or replace the section
 deliberately. Also: EnvironmentName is arbitrary - appsettings.QA-East.json works
 fine if ASPNETCORE_ENVIRONMENT=QA-East.</a:t>
             </a:r>
@@ -2366,7 +2366,7 @@
               <a:rPr lang="en-US" dirty="0"/>
               <a:t>[16-23 min] THE DIAGNOSTIC - S2.1
 The cold-open dump, now marked
-60-min: NEVER CUT
+60-min: never cut
 This is the show-don't-tell moment of the talk, and it explains the cold open.
 GetDebugView() prints every key, its effective value, AND the provider that
 supplied it.
@@ -2474,20 +2474,20 @@
               <a:rPr lang="en-US" dirty="0"/>
               <a:t>[16-23 min] THE DUMP - S2.1 - THE PAYOFF
 The cold-open dump, marked this time
-60-min: NEVER CUT
+60-min: never cut
 THIS IS THE SLIDE THE COLD OPEN WAS FOR.
 The gold marker is on TimeoutSeconds=10, supplied by
 EnvironmentVariablesConfigurationProvider - even though
 appsettings.Development.json clearly says 120 and that is the file everyone
 in the room was looking at for the last sixteen minutes.
-SAY IT LIKE THIS:
+Say:
 "Sixteen minutes ago I showed you an app with the wrong timeout. Here's why.
 The JSON says 120. An environment variable says 10. The environment variable
 is later in the chain, so the environment variable wins. That's it. That's the
 whole mystery."
 Then name failure mode #1 - ORDER - and point at the badge when it turns up
 two slides from now.
-WHAT THE DUMP GIVES YOU THAT NOTHING ELSE DOES: the provider name in
+what THE DUMP GIVES YOU that nothing ELSE DOES: the provider name in
 parentheses. Not the value - anyone can log the value. The SOURCE.
 Note ApiKey=*** is redacted by the lambda on the previous slide. Say that out
 loud, because someone is about to go add GetDebugView to a production app.</a:t>
@@ -2580,7 +2580,7 @@
               <a:rPr lang="en-US" dirty="0"/>
               <a:t>[51-59 min] STAGE 2 - DEPLOYMENT
 60-min: compress to 4 min, one slide
-THE PROBLEM THIS STAGE SOLVES:
+The problem this stage solves:
 One artifact, many environments. The platform supplies the values.
 Sources: environment variables, command line, key-per-file mounts, Key Vault.
 Close the block on its signature failure - "the value didn't make it" - which is
@@ -2680,12 +2680,12 @@
 Snippet: lifted from d04
 60-min: keep - this is the core of the compressed stage-2 slide
 The workhorse in containers and every PaaS.
-':' IS NOT PORTABLE in env var names. '__' is, and maps to ':'.
+':' IS not PORTABLE in env var names. '__' is, and maps to ':'.
   Weather__ApiBaseUrl        -&gt; Weather:ApiBaseUrl
   ConnectionStrings__Default -&gt; ConnectionStrings:Default
 Arrays use the index as a segment:
   Weather__AllowedOrigins__0, Weather__AllowedOrigins__1
-PREFIXES:
+Prefixes:
   AddEnvironmentVariables(prefix: "MYAPP_") loads only matching variables AND
   STRIPS the prefix from the key.
   MYAPP_Weather__TimeoutSeconds -&gt; Weather:TimeoutSeconds
@@ -2696,7 +2696,7 @@
 the key the binder is looking for. Single underscore instead of double is the
 most common version.
 ALSO SAY (it comes back in S8): changing an environment variable on a running
-container does NOTHING. Env vars are read once at startup. Restart the container.</a:t>
+container does nothing. Env vars are read once at startup. Restart the container.</a:t>
             </a:r>
             <a:endParaRPr lang="en-US" dirty="0"/>
           </a:p>
@@ -2792,12 +2792,12 @@
   builder.Configuration.AddKeyPerFile(directoryPath: "/run/secrets", optional: true);
 File NAME is the key, file CONTENTS are the value, '__' is the delimiter.
 A file named Weather__ApiKey containing abc123 becomes Weather:ApiKey = abc123.
-THE PATH MUST BE ABSOLUTE. Relative paths fail in a way that looks like "the
+THE PATH must BE ABSOLUTE. Relative paths fail in a way that looks like "the
 provider isn't working."
 This is the right answer for AKS and Docker Swarm and it costs nothing. Worth
 naming even when you skip the snippet - half the room is on Kubernetes and has been
 shelling secrets in through env vars.
-RELOAD - GET THIS RIGHT: the 3-argument overload above does NOT reload.
+RELOAD - GET this RIGHT: the 3-argument overload above does not reload.
 AddKeyPerFile(dir, optional) resolves to reloadOnChange: false. You only get
 a watcher from the 4-argument overload. And even then, on Kubernetes those
 mounts are symlink swaps rather than in-place writes, so the watcher may or
@@ -2899,11 +2899,11 @@
 - The GetDebugView() dump on screen shows an unexpected provider won.
 - Let the room sit with it. Fifteen full seconds. Count them.
 - Say only: "We'll come back to this." Move on.
-WHY THIS OPENING:
+Why this opening:
 "Why externalize configuration" and "how do we load it" are both expository.
 Two explanatory beats back to back is a flat first ten minutes. A small mystery
 buys attention for the parts that are genuinely just exposition. S2 pays it off.
-DO NOT take questions here. It only works while it stays unexplained.
+Don't take questions here. It only works while it stays unexplained.
 === THEN BRING UP THIS SLIDE ===
 [title card]
 60-min: keep
@@ -3008,18 +3008,18 @@
       new Uri($"https://{name}.vault.azure.net/"),
       new DefaultAzureCredential());
   - guarded by if (!builder.Environment.IsDevelopment())
-FOUR THINGS THAT ACTUALLY MATTER:
+Four things that actually matter:
 1. SECRET NAMING. Key Vault forbids ':' in secret names. The default
    KeyVaultSecretManager maps '--' to the delimiter:
    secret Weather--ApiKey  -&gt;  key Weather:ApiKey
    This is failure mode #2 (SHAPE) wearing a cloud hat.
-2. REGISTER IT LAST so it overrides the file providers it's meant to replace.
+2. REGISTER IT last so it overrides the file providers it's meant to replace.
 3. NO RELOAD BY DEFAULT. Secrets are cached for the life of the process.
    ReloadInterval defaults to NULL - meaning never. Opt into polling:
      new AzureKeyVaultConfigurationOptions { ReloadInterval = TimeSpan.FromMinutes(30) }
    Tie to S7.3 #6: "It's in Key Vault" plus a process that caches it forever is a
    secret you cannot rotate.
-4. EXPIRED SECRETS ARE STILL LOADED by default. Disabled secrets never are.
+4. EXPIRED SECRETS ARE still LOADED by default. Disabled secrets never are.
    Filter with a custom KeyVaultSecretManager overriding Load(SecretProperties).
 CREDENTIALS: DefaultAzureCredential is the DEV CONVENIENCE chain (CLI, VS, env
 vars, managed identity). In production prefer ManagedIdentityCredential
@@ -3120,9 +3120,9 @@
 "configuration" stops being strings and starts being types you can validate.
 Snippets here: d11 binding, d12 ValidateOnStart, d13 the three interfaces.
 The three-interfaces before/after pair is the longest beat in the talk.
-DO NOT RUSH IT.
+Don't RUSH IT.
 This is also the answer to the thesis objection from S1.3 - "then nothing is
-knowable." Binding plus validation is what makes a configurable value MORE
+knowable." Binding plus validation is what makes a configurable value more
 knowable than a constant.</a:t>
             </a:r>
             <a:endParaRPr lang="en-US" dirty="0"/>
@@ -3213,7 +3213,7 @@
               <a:rPr lang="en-US" dirty="0"/>
               <a:t>[39-51 min] STOP INJECTING ICONFIGURATION - S5.1
 60-min: keep
-THE DON'T:
+The DON'T:
   public sealed class WeatherClient(IConfiguration config)
       =&gt; CallAsync(config["Weather:ApiBaseUrl"]!,
                    int.Parse(config["Weather:TimeoutSeconds"]!));
@@ -3224,7 +3224,7 @@
   [Range(1,300)] TimeoutSeconds, [Range(0,10)] Retries, [Required][MinLength(8)] ApiKey
   - required init properties, defaults where sensible.
   public sealed class WeatherClient(IOptions&lt;WeatherOptions&gt; options)
-THE ARGUMENT: the class now DECLARES EXACTLY WHAT IT NEEDS. You can read the
+THE ARGUMENT: the class now DECLARES EXACTLY what IT NEEDS. You can read the
 options type and know the whole configuration surface of that component. You
 cannot do that with IConfiguration - it's a bag of everything.
 Say the word "seam" again. This is the same ownership argument from S1.1 #5,
@@ -3424,14 +3424,14 @@
               <a:rPr lang="en-US" dirty="0"/>
               <a:t>[39-51 min] VALIDATION - S5.5
 Snippet: lifted from d12
-60-min: NEVER CUT
+60-min: never cut
 FAIL FAST IS THE WHOLE POINT.
 Without ValidateOnStart(), validation runs LAZILY on first .Value access - a bad
 deploy looks healthy until the first request reaches the affected code path. With
 it, the process refuses to start. That's exactly the behavior you want during a
 rolling deployment: the bad instance never takes traffic.
 Bad config = no start. Show the startup exception naming the offending property.
-NESTED OBJECTS AND COLLECTIONS ARE NOT VALIDATED BY DEFAULT. Opt in:
+NESTED OBJECTS AND COLLECTIONS ARE not VALIDATED BY DEFAULT. Opt in:
   [Required, ValidateObjectMembers]  on the nested object
   [ValidateEnumeratedItems]          on the collection
 This surprises people who think [Required] recurses. It doesn't.
@@ -3531,11 +3531,11 @@
               <a:t>[S4.8] IN-MEMORY - THE TESTING PROVIDER
 Snippet: lifted from d24
 60-min: cut the slide, keep the sentence
-Added LAST, so it beats everything. That is the entire trick.
+Added last, so it beats everything. That is the entire trick.
 This is the right answer for WebApplicationFactory integration tests: you get
 the real application, the real provider chain, the real binding and validation
 - and then you overwrite exactly the handful of keys the test cares about.
-WHY IT BEATS THE ALTERNATIVES:
+Why it beats the alternatives:
 - Mocking IConfiguration tests your mock, not your configuration.
 - A test appsettings.json is a second file to keep in sync with the first.
 - Environment variables in a test runner leak between tests.
@@ -3543,11 +3543,11 @@
 AddInMemoryCollection is appended, and reads walk the chain in reverse. It
 does not matter what appsettings.json says. It does not matter what the
 developer has in user secrets. The dictionary wins.
-SAME TRICK FOR FEATURE FLAGS - forward reference to S6.7. A flag is just
+same TRICK FOR FEATURE FLAGS - forward reference to S6.7. A flag is just
 configuration, so you set feature_management:feature_flags:0:enabled here and
 test both sides of the branch. That is the slide people photograph in the
 flags block.
-The other use, if anyone asks: in-memory as code DEFAULTS, added FIRST so
+The other use, if anyone asks: in-memory as code DEFAULTS, added first so
 everything overrides it. Rarer, but it is how you ship a sane fallback
 without a file.</a:t>
             </a:r>
@@ -3639,10 +3639,10 @@
               <a:rPr lang="en-US" dirty="0"/>
               <a:t>[ACT 4] PRODUCTION
 60-min: keep, 45 seconds
-LAST BOUNDARY, and the one with consequences. Same artifact as the shared dev
+last BOUNDARY, and the one with consequences. Same artifact as the shared dev
 server - genuinely the same bytes. What changed is who supplies the values and
 what it costs to get one wrong.
-THREE THINGS ARE TRUE HERE THAT WERE NOT TRUE ON YOUR LAPTOP:
+Three things are true here that were not true on your laptop:
   OWNERSHIP  the person who needs to change a value may not be a developer
   TRUST      a leaked value here is an incident, not an inconvenience
   UPTIME     a restart is a change window, not a keystroke
@@ -3741,7 +3741,7 @@
 On a laptop you restart the app without thinking. In production a restart is an
 event: dropped connections, a cold cache, a change window, maybe an approval.
 So production is the first place the question is worth asking at all:
-  "Can this value change WITHOUT stopping the process?"
+  "Can this value change without stopping the process?"
 That question has exactly three answers in .NET, and they are the three interfaces
 on the next slide. Do not list them here - just land the question and advance.
 This is also the slide to point back to from What Actually Reloads. The interface
@@ -3835,12 +3835,12 @@
             <a:r>
               <a:rPr lang="en-US" dirty="0"/>
               <a:t>[39-51 min] THE THREE INTERFACES - S5.3
-Snippet: lifted from d13. THE LONGEST BEAT IN THE TALK. DO NOT RUSH IT.
-60-min: NEVER CUT
+Snippet: lifted from d13. THE LONGEST BEAT IN THE TALK. Don't RUSH IT.
+60-min: never cut
   IOptions&lt;T&gt;          Singleton  no re-read     value can't change at runtime
   IOptionsSnapshot&lt;T&gt;  SCOPED     once per scope per-request consistency (web)
   IOptionsMonitor&lt;T&gt;   Singleton  yes + OnChange singletons &amp; background services
-BEFORE / AFTER PAIR: all three interfaces on one slide, then the same three
+before / after PAIR: all three interfaces on one slide, then the same three
 after appsettings.json changed underneath the running app.
 Three different answers to the same question. That image is the slide.
 THE CLASSIC BUG: injecting IOptionsSnapshot&lt;T&gt; into a singleton. It's scoped -
@@ -3944,7 +3944,7 @@
               <a:rPr lang="en-US" dirty="0"/>
               <a:t>[OPTIONS] THE SETUP - BEFORE THE EDIT
 Snippet: lifted from d13
-60-min: NEVER CUT
+60-min: never cut
 All three interfaces, same key, same value. Nothing interesting yet - and that
 is the point. Establish the baseline so the reveal has something to move
 against.
@@ -4051,7 +4051,7 @@
 That's the license to be opinionated for the next 85 minutes. It also sets up
 S6.6 (flag debt) and S4.6 (the idle-app refresh surprise) as scars rather than
 trivia.
-Do NOT list every technology you've touched. If they want the resume it's on
+Don't list every technology you've touched. If they want the resume it's on
 the site, and the site is on the last slide.</a:t>
             </a:r>
             <a:endParaRPr lang="en-US" dirty="0"/>
@@ -4142,7 +4142,7 @@
               <a:rPr lang="en-US" dirty="0"/>
               <a:t>[OPTIONS] THE REVEAL - AFTER THE EDIT
 Snippet: lifted from d13
-60-min: NEVER CUT. This is the longest beat in the talk.
+60-min: never cut. This is the longest beat in the talk.
 Three columns, because the honest answer has a middle state:
   IOptions          never moves. Bound once at startup, forever.
   IOptionsSnapshot  moves, but only in a NEW SCOPE - normally the next request.
@@ -4245,25 +4245,25 @@
             <a:r>
               <a:rPr lang="en-US" dirty="0"/>
               <a:t>[S8] RELOAD SEMANTICS
-60-min: show the table, do NOT walk it
+60-min: show the table, do not walk it
   appsettings*.json   YES, when reloadOnChange: true (host default)  FileSystemWatcher
   User secrets        YES                                            file watcher
   Environment vars    NO - read once at startup
   Command line        NO - read once at startup
-  Azure Key Vault     only if ReloadInterval is set (default: NEVER) polling
+  Azure Key Vault     only if ReloadInterval is set (default: never) polling
   App Configuration   YES, with ConfigureRefresh + a trigger         polling on activity
-  Key-per-file        ONLY with the 4-arg overload                   file watcher
+  Key-per-file        only with the 4-arg overload                   file watcher
   In-memory           NO
   Custom              your call - OnReload()
 FOUR CONSEQUENCES - say these out loud, the table alone doesn't land them:
-- Changing an environment variable on a running container does NOTHING.
+- Changing an environment variable on a running container does nothing.
   Restart the container.
 - reloadOnChange on a Kubernetes ConfigMap mount is UNRELIABLE - symlink swaps,
   not in-place writes. The watcher may or may not see them. Treat restart as the
   contract.
-- A single file save often fires the watcher TWICE (write + metadata). Debounce
+- A single file save often fires the watcher twice (write + metadata). Debounce
   anything expensive hanging off OnChange.
-- "CONFIG RELOADED" DOES NOT MEAN "APP RECONFIGURED." Reloading configuration
+- "CONFIG RELOADED" DOES not MEAN "APP RECONFIGURED." Reloading configuration
   does not reconfigure things that read it once at startup: Kestrel endpoints,
   the DI graph, HttpClient handler pipelines.
 RULE OF THUMB (S7.3 #4): prefer restart to hot reload unless hot reload is a
@@ -4358,7 +4358,7 @@
               <a:rPr lang="en-US" dirty="0"/>
               <a:t>[59-64 min] STAGE 3 - SHARED
 60-min: compress to 3 min - labels + sentinel key only
-THE PROBLEM THIS STAGE SOLVES:
+The problem this stage solves:
 Many apps and instances; values that change without a deploy.
 Note this block is only 5 minutes even at 90, because S6 now carries App
 Configuration's most interesting behavior. Show the sentinel key here and let
@@ -4457,16 +4457,16 @@
 60-min: keep, compressed - labels and the sentinel key are the two ideas
 Packages: Microsoft.Extensions.Configuration.AzureAppConfiguration
         + Microsoft.Azure.AppConfiguration.AspNetCore (refresh middleware)
-THE SIX THINGS WORTH SAYING:
+The six things worth saying:
 1. LABELS ARE THE ENVIRONMENT AXIS. One store, Development/Staging/Production
    labels, Selected in order so labeled values overlay unlabeled defaults.
    Select("Weather:*", LabelFilter.Null) then Select("Weather:*", envName).
    Load a SLICE, not the whole store.
-2. REFRESH IS NOT AUTOMATIC. You must call ConfigureRefresh and then RegisterAll()
+2. REFRESH IS not AUTOMATIC. You must call ConfigureRefresh and then RegisterAll()
    or Register(key). Feature flags are the exception - UseFeatureFlags self-registers.
    This trips up everyone exactly once.
 3. REFRESH IS ACTIVITY-DRIVEN in ASP.NET Core. The middleware checks on an
-   incoming request once the interval has elapsed. AN IDLE APP NEVER REFRESHES.
+   incoming request once the interval has elapsed. AN IDLE APP never REFRESHES.
    It is also ASYNCHRONOUS: the request that TRIGGERS the refresh does not
    block on it and may still serve the OLD values. Later requests see the new
    ones. Say this - people assume the triggering request gets the update.
@@ -4475,11 +4475,11 @@
    Also: app.UseAzureAppConfiguration() must go EARLY in the pipeline, or another
    middleware short-circuits before refresh ever runs.
 4. THE SENTINEL KEY PATTERN - the thing to actually take home.
-   Instead of RegisterAll(), watch ONE key you bump AFTER every other edit lands:
+   Instead of RegisterAll(), watch ONE key you bump after every other edit lands:
      refresh.Register("Weather:Sentinel", refreshAll: true)
-   Update the sentinel LAST. Each instance then reloads the selected values
+   Update the sentinel last. Each instance then reloads the selected values
    together in one refresh, so no single process sees a half-applied edit.
-   Do NOT say "atomic" - the store is not transactional across keys, and
+   Don't say "atomic" - the store is not transactional across keys, and
    instances refresh independently, so they do not all switch at the same
    moment. It answers "half-applied", not "everywhere at once".
 5. FAILURE MODE IS GRACEFUL - a failed refresh keeps last known-good and retries.
@@ -4688,9 +4688,9 @@
               <a:t>[64-67 min] FLAGS ARE CONFIGURATION - S6.1
 60-min: keep - this is the load-bearing idea of the whole flags block
 Microsoft.FeatureManagement IS BUILT ON IConfiguration.
-ANY configuration provider can back a feature flag. No new infrastructure, no new
+any configuration provider can back a feature flag. No new infrastructure, no new
 file format, no service dependency.
-That means flags inherit EVERYTHING from S2-S4: the provider chain, precedence,
+That means flags inherit everything from S2-S4: the provider chain, precedence,
 reload semantics, and the debug view. A flag in appsettings.Development.json is
 overridden by the same flag in an environment variable, by the same last-wins
 rule as any other key.
@@ -4794,18 +4794,18 @@
               <a:t>[67-72 min] LOCAL FLAGS - S6.2, S6.3
 Snippet: lifted from d28
 60-min: keep
-THE SCHEMA:
+The schema:
   "feature_management": { "feature_flags": [
       { "id": "NewCheckout", "enabled": false },
       { "id": "BetaBanner",  "enabled": true }
   ]}
   services.AddFeatureManagement();
-SCHEMA NOTES WORTH SAYING OUT LOUD:
+Schema notes worth saying out loud:
 - feature_management / feature_flags is the MICROSOFT SCHEMA, shared across the
   .NET, Go, Python and JavaScript libraries. The older .NET-only FeatureManagement
   section still works; when both are present, feature_management wins.
 - No "conditions" means the flag is simply enabled. WITH conditions, enabled:true
-  means "eligible to be evaluated," NOT "on." That distinction catches people.
+  means "eligible to be evaluated," not "on." That distinction catches people.
 - requirement_type defaults to Any; set All when every filter must pass.
 - A COLON IS FORBIDDEN in a flag name - flag names are configuration keys.
 - Point the library at a custom section with AddFeatureManagement(config.GetSection("MyFlags")).
@@ -4815,7 +4815,7 @@
                                     override with IDisabledFeaturesHandler
   &lt;feature name="BetaBanner"&gt;  and  &lt;feature negate="true" name="BetaBanner"&gt;
   app.UseForFeature("NewCheckout", branch =&gt; branch.UseMiddleware&lt;...&gt;())
-REGISTRATION DETAIL THAT BITES PEOPLE:
+Registration detail that bites people:
 AddFeatureManagement() registers feature management as a SINGLETON. If a filter
 needs scoped services (current user, a DbContext) you must use
 AddScopedFeatureManagement() instead.
@@ -4920,7 +4920,7 @@
 user is:
   services.AddFeatureManagement().WithTargeting&lt;HttpContextTargetingContextAccessor&gt;();
 *** THE SLIDE THAT EARNS ITS OWN MINUTE ***
-PLAIN Microsoft.Percentage IS EVALUATED PER CALL, NOT PER USER.
+PLAIN Microsoft.Percentage IS EVALUATED PER CALL, not PER USER.
 A 50% flag checked twice in one request can answer DIFFERENTLY EACH TIME. A user
 can watch the feature flicker between page loads. Nav bar says new checkout,
 checkout page says old.
@@ -5023,7 +5023,7 @@
 60-min: KEEP THE GOTCHA even if you cut the filter catalogue. Never-cut list.
 Ten checks. One user. One process. The percentage row flickers; the targeting
 row does not. That contrast is the slide.
-SAY IT PLAINLY:
+Say:
 "Microsoft.Percentage does not know who you are. It rolls the dice on every
  call. Fifty percent means half the CALLS, not half the USERS."
 WHY IT IS NASTY: it is invisible in a single test run and invisible in code
@@ -5125,14 +5125,14 @@
 60-min: CUT. Mention in one sentence that flags can return values, move on.
 A variant flag returns a VALUE - string, number, bool, or a whole configuration
 object - instead of a boolean. This is where feature flags and the options
-pattern meet, which is why it belongs in THIS talk and not a generic flags talk.
+pattern meet, which is why it belongs in this talk and not a generic flags talk.
   Variant variant = await features.GetVariantAsync("CheckoutLayout", ct);
   variant.Configuration.Bind(settings);   // it's an IConfigurationSection -
                                           // bind it like anything else
 That last line is the whole point. Land it and you can move on.
 ALLOCATION is evaluated in order: user -&gt; group -&gt; percentile, falling back to
 default_when_enabled, or default_when_disabled when the flag is off.
-A SEED makes percentile assignment stable, and consistent ACROSS flags that share
+A SEED makes percentile assignment stable, and consistent across flags that share
 the same seed. (This is the fix for the S6.4 gotcha.)
 status_override (None / Enabled / Disabled) lets a variant flag also answer
 IsEnabledAsync, so you can adopt variants without rewriting existing call sites.
@@ -5227,15 +5227,15 @@
               <a:t>[roadmap]
 60-min: keep - it's the map, and at 60 minutes the map does more work
 Five beats. Read them fast; it's a map, not a stop. Twenty seconds.
-  01  How the provider chain really resolves        (S2, S3)
-  02  Local dev -&gt; deployment -&gt; shared             (S1.4 spine, S4)
-  03  Binding, options, and failing fast            (S5)
-  04  Feature flags and flag debt                   (S6)
-  05  Choosing a strategy, and where to stop        (S7)
-Point at 02 and say "that's the spine - everything hangs off it."
-Point at 04 and say "this is about a quarter of the talk, and it's the half
-people don't expect."
-Then get off this slide. The cold open is STILL unexplained and that tension is
+  01  The shared baseline - what everyone gets
+  02  My machine - differing without breaking yours
+  03  The shared dev server - it left your laptop
+  04  Production - ownership, trust, change without a deploy
+  05  Where should this value live?
+Say that one key - Weather:TimeoutSeconds - crosses all five, so they have
+something to follow. Point at 04 and say this is about a quarter of the talk,
+and it's the half people don't expect.
+Then get off this slide. The cold open is still unexplained and that tension is
 doing work for you until S2.1.</a:t>
             </a:r>
             <a:endParaRPr lang="en-US" dirty="0"/>
@@ -5326,11 +5326,11 @@
               <a:rPr lang="en-US" dirty="0"/>
               <a:t>[80-84 min] FLAG DEBT - S6.6
 Snippet: lifted from d32, the flag inventory endpoint
-60-min: NEVER CUT. This is the closing argument.
+60-min: never cut. This is the closing argument.
 THIS SECTION IS WHAT SEPARATES THE TALK FROM THE DOCUMENTATION.
 It's the thing nobody else in the room will say.
 Every flag is a permanent if-statement with an owner and an expiry date.
-- A FLAG DOUBLES YOUR CODE PATHS. Ten live flags is up to 1,024 nominal
+- A FLAG DOUBLES your CODE PATHS. Ten live flags is up to 1,024 nominal
   combinations. You test maybe three of them.
 - NAME FLAGS FOR THEIR REMOVAL.
   "NewCheckout" never gets deleted. It'll be there in 2031 and it will still be
@@ -5341,15 +5341,15 @@
     experiment  weeks            delete after the decision
     ops / kill  permanent        and that's fine
     permission  permanent        and arguably not a flag at all - that's authorization
-- DELETING A FLAG IS A CODE CHANGE, NOT A CONFIG CHANGE. Turning it off in the
+- DELETING A FLAG IS A CODE CHANGE, not A CONFIG CHANGE. Turning it off in the
   portal and walking away leaves the dead branch compiling forever. This is the
   sentence people need to hear.
 - INVENTORY THEM. GetFeatureNamesAsync() enumerates every flag the app knows
   about. A health endpoint listing flags and their current state is a five-minute
-  build and THE ONE PEOPLE WILL ACTUALLY STEAL. That's d32.
+  build and THE ONE PEOPLE will actually STEAL. That's d32.
 TESTING (S6.7): flags are configuration, so the in-memory provider is the whole
 story - or substitute IVariantFeatureManager outright.
-THE RULE: test BOTH SIDES of every live flag, or you're shipping an untested
+THE RULE: test both SIDES of every live flag, or you're shipping an untested
 branch behind a switch someone can flip at 2am.</a:t>
             </a:r>
             <a:endParaRPr lang="en-US" dirty="0"/>
@@ -5441,7 +5441,7 @@
               <a:t>[FLAGS] DELETION AND INVENTORY
 Snippet: lifted from d32
 60-min: keep the first line; the endpoint is optional
-THE SENTENCE PEOPLE NEED TO HEAR:
+The sentence people need to hear:
 "Turning a flag off in the portal is not deleting it. The dead branch is still
  there, still compiling, still something the next person has to reason about."
 Deleting a flag is a pull request, not a portal click. If that is not on
@@ -5449,7 +5449,7 @@
 THE ENDPOINT IS THE THING PEOPLE STEAL. Two caveats, say both:
 - Name and a boolean is not enough. The previous slide argued owner and expiry
   are what matter, so the record carries them.
-- For a percentage or targeting flag that boolean is THIS evaluation, for THIS
+- For a percentage or targeting flag that boolean is this evaluation, for this
   context. Slide 44 just proved it can differ on the very next call. It is an
   inventory of what exists, not a global on/off state.
 - Authorize it. An open /flags endpoint hands an attacker your roadmap and your
@@ -5549,8 +5549,8 @@
 A flag flipped in a portal is a PRODUCTION CHANGE WITH NO PR, NO REVIEW, AND NO
 DIFF - unless the store keeps history and you treat flag changes as deploys.
 Azure App Configuration keeps revisions. Use them.
-THE THROUGH-LINE CLOSES HERE:
-That is the SAME TRADE as S1.2's build-time-to-runtime move, one level up.
+The through-line closes here:
+That is the same TRADE as S1.2's build-time-to-runtime move, one level up.
 Constants -&gt; web.config -&gt; Generic Host was trading build-time for runtime.
 Deploys -&gt; feature flags is the same trade again, one level up.
 Call back to the history slide explicitly. This is the moment the talk becomes
@@ -5752,7 +5752,7 @@
   PER-INSTANCE / PER-DEPLOYMENT
     environment name, instance id, port, region
     -&gt; environment variables, set by the platform
-THE LINE TO SAY:
+Say:
 "If a value is in the wrong bucket, no amount of provider tuning fixes it."
 That's the diagnostic. Most configuration pain people bring to you is a bucketing
 error, not a provider error - and they've been trying to solve it with provider
@@ -5846,7 +5846,7 @@
               <a:rPr lang="en-US" dirty="0"/>
               <a:t>[84-87 min] CHOOSING A STRATEGY - S7.2, S7.3
 60-min: keep - this is the one people photograph. Pause on it.
-LEAVE THIS UP LONGER THAN FEELS COMFORTABLE. Count to five. Let them get the shot.
+LEAVE this UP LONGER than FEELS COMFORTABLE. Count to five. Let them get the shot.
   ASP.NET Core on App Service   JSON + App Service settings; KV refs
                                 App Service settings RESTART the app;
                                 App Configuration doesn't
@@ -6066,13 +6066,13 @@
               <a:t>[87-90 min] DESKTOP - S4.11
 60-min: compress to one line inside the choosing slide
 THE ABSTRACT PROMISES "cloud-native microservices OR DESKTOP APPS." This is the
-section that pays it off. If you're short on time, this is the honest thing to cut
+section that pays it off. If you're short on time, this is the first thing to cut
 - but say the one-liner.
-STRUCTURAL HONESTY - name this rather than letting the structure contradict you:
-The S1.4 spine assumes a SERVER. A desktop app has local dev, has "deployment" as
-an INSTALL, and has NO STAGE THREE at all - no orchestrator setting env vars, no
+Worth naming - name this rather than letting the structure contradict you:
+The journey assumes a server. A desktop app has local dev, has "deployment" as an
+install, and has no shared stage at all - no orchestrator setting env vars, no
 central store it should authenticate to, no instance fleet.
-THE LINE: "The spine assumes something that gets deployed. Here's what changes
+Say: "Everything so far assumed something that gets deployed. Here's what changes
 when it gets installed on someone's laptop instead."
 The configuration MODEL is identical. What differs is what's wired up for you.
 - Console apps and workers get the full default chain from the generic host.
@@ -6080,18 +6080,18 @@
   DOTNET_ENVIRONMENT, not ASPNETCORE_ENVIRONMENT, outside ASP.NET Core.
 - WinForms/WPF have no host by default. Either build IConfiguration by hand, or
   (preferred) host the desktop app and get DI, logging, and options for free.
-FOUR DESKTOP REALITIES:
+Four desktop realities:
 - SetBasePath(AppContext.BaseDirectory). The working directory of a double-clicked
-  EXE is NOT the install directory. Directory.GetCurrentDirectory() will bite you.
+  EXE is not the install directory. Directory.GetCurrentDirectory() will bite you.
 - Per-user WRITABLE settings are a different problem. IConfiguration is
   read-optimized and has NO WRITE API. User preferences belong in a JSON file
   under SpecialFolder.ApplicationData that you load as an extra provider and save
   yourself.
 - app.config isn't gone, but ConfigurationManager.AppSettings and IConfiguration
   are two UNRELATED systems. Migrating means moving keys, not bridging them.
-- CLIENT APPS MUST NOT HOLD CLOUD SECRETS. No Key Vault credential ships in a
+- CLIENT APPS must not HOLD CLOUD SECRETS. No Key Vault credential ships in a
   desktop binary. Authenticate the USER, call a backend that holds the secret.
-  SAY THIS OUT LOUD - someone always asks.
+  SAY this OUT LOUD - someone always asks.
 Flags are the interesting exception: a desktop app absolutely can consume flags
 from a file or your own backend. It just can't hold the credential to a flag store.</a:t>
             </a:r>
@@ -6183,7 +6183,7 @@
               <a:rPr lang="en-US" dirty="0"/>
               <a:t>[Q&amp;A]
 60-min: keep - but see the note below about where questions actually go
-THE ONE-LINE TAKEAWAY, say it BEFORE you open the floor - otherwise the last
+THE ONE-LINE TAKEAWAY, say it before you open the floor - otherwise the last
 thing the room hears is whatever the final question happened to be:
 "GetDebugView() tells you where the value came from. Validate at startup so the
 wrong value never takes traffic. And name every flag for the day you delete it."
@@ -6192,8 +6192,8 @@
 AT 60 MINUTES: the running order takes questions at three breath points -
 after the model (14), after Options (31), after flags (48) - so this slide is
 a backstop, not the main event.
-QUESTIONS YOU WILL GET, AND THE SHORT ANSWERS:
-- "When should I NOT use Azure App Configuration?"
+Questions you will get, and the short answers:
+- "When should I not use Azure App Configuration?"
   S7.3 rule 3. One app that redeploys in five minutes doesn't need it.
   This is the best question, so if nobody asks it, ask it yourself.
 - "What about Aspire?"
@@ -6298,7 +6298,7 @@
               <a:rPr lang="en-US" dirty="0"/>
               <a:t>[thanks]
 60-min: keep, 1 min
-LEAVE THIS UP for the rest of the room's time, and through the hallway track.
+LEAVE this UP for the rest of the room's time, and through the hallway track.
 People photograph the last slide. Put the repo QR here.
   Repo:      github.com/1kevgriff - modern-dotnet-configuration
              (slides, all demos numbered in presentation order, each with its
@@ -6407,7 +6407,7 @@
 1. NO HARD-CODING - a value baked into an assembly changes only by editing code,
    rebuilding, retesting, redeploying. Value and logic have completely different
    rates of change. They shouldn't share a lifecycle.
-2. VALUES THAT VARY BY ENVIRONMENT - same binary, local DB / staging API / prod
+2. VALUES that VARY BY ENVIRONMENT - same binary, local DB / staging API / prod
    endpoint. If the CODE differs per environment, you aren't testing what you ship.
 3. CHANGING A VALUE ON THE FLY - timeout, log level, toggle. No deploy window,
    no dropped traffic.
@@ -6730,7 +6730,7 @@
 The options validation generator is ON BY DEFAULT when the project references
 Microsoft.Extensions.Options 8+ or builds an ASP.NET Core app. It rewrites
 [Range], [MinLength], [MaxLength], [Length] into generated equivalents.
-With [OptionsValidator] you do NOT also call ValidateDataAnnotations().
+With [OptionsValidator] you do not also call ValidateDataAnnotations().
 OPTIONAL (d17, 90 min only): PublishAot=true surfaces IL2026 / IL3050 warnings
 from reflection binding; turn both generators on and they disappear.
 Niche. At 60 minutes this is one slide.</a:t>
@@ -6830,7 +6830,7 @@
                            and a virtual Load(). Fill the dictionary.
 Then an extension method so it reads like every other provider:
   builder.Configuration.AddSqlConfiguration(connectionString);
-THREE THINGS TO LAND, THEN MOVE ON:
+Three things to land, then move on:
 1. Load() RUNS ONCE, at build time. It is not lazy. If you want refresh you
    schedule it yourself and call OnReload() - that is what fires the change
    token that makes IOptionsMonitor wake up. Point back at the three
@@ -7052,7 +7052,7 @@
    Transforms (Web.Release.config) ran at BUILD time.
    Wins #1 and #2 - but you built one artifact per environment, and #3 was impossible.
 3. THE .NET GENERIC HOST (2018, .NET Core 2.1) + IConfiguration
-   Provider chain, layering, binding, DI, reload - and the SAME model for a web
+   Provider chain, layering, binding, DI, reload - and the same model for a web
    app, a worker, a console tool, and a WinForms app.
    One artifact, many environments. All five reasons, finally.
 THE THROUGH-LINE - say this out loud, it comes back twice:
@@ -7157,7 +7157,7 @@
 That's the whole reason the rest of the talk has failure modes at all. A
 constant can't be missing, malformed, stale, or arriving from a provider you
 forgot about. A runtime value can be all four.
-COMES BACK TWICE:
+Comes back twice:
 - S4.6, when App Configuration moves the decision later still.
 - S6.8, when feature flags make the same trade one level up: deploys to flags.
   Point at this slide from there. "Same trade, one level up."</a:t>
@@ -7261,7 +7261,7 @@
 HANDLE TWO OBJECTIONS OUT LOUD - both are fair:
 - "Then everything is configurable and nothing is knowable."
   True if you stop at externalizing. That's why S5 binding + ValidateOnStart
-  exist. A configurable value that's validated at startup is MORE knowable than
+  exist. A configurable value that's validated at startup is more knowable than
   a constant buried in code - it's declared, typed, and checked in one place.
 - "That's a lot of flags."
   Yes, and every one is debt. S6.6 is the discipline that makes this position
@@ -8286,7 +8286,7 @@
         <p:spPr>
           <a:xfrm>
             <a:off x="457200" y="439936"/>
-            <a:ext cx="7587109" cy="485775"/>
+            <a:ext cx="7518648" cy="485775"/>
           </a:xfrm>
           <a:prstGeom prst="rect">
             <a:avLst/>
@@ -8310,7 +8310,7 @@
                 <a:ea typeface="Manrope" pitchFamily="34" charset="-122"/>
                 <a:cs typeface="Manrope" pitchFamily="34" charset="-120"/>
               </a:rPr>
-              <a:t>Almost every config bug is one of four things</a:t>
+              <a:t>When config breaks, I check four things first</a:t>
             </a:r>
             <a:endParaRPr lang="en-US" sz="2820" dirty="0"/>
           </a:p>
@@ -10545,7 +10545,7 @@
                 <a:ea typeface="Manrope" pitchFamily="34" charset="-122"/>
                 <a:cs typeface="Manrope" pitchFamily="34" charset="-120"/>
               </a:rPr>
-              <a:t>My setup can differ from yours without either of us editing the other’s.</a:t>
+              <a:t>Your machine can differ from mine — without changing the repo.</a:t>
             </a:r>
             <a:endParaRPr lang="en-US" sz="3000" dirty="0"/>
           </a:p>
@@ -14395,7 +14395,7 @@
         <p:spPr>
           <a:xfrm>
             <a:off x="617190" y="1325166"/>
-            <a:ext cx="3756422" cy="209550"/>
+            <a:ext cx="3654772" cy="209550"/>
           </a:xfrm>
           <a:prstGeom prst="rect">
             <a:avLst/>
@@ -14419,7 +14419,7 @@
                 <a:ea typeface="Manrope" pitchFamily="34" charset="-122"/>
                 <a:cs typeface="Manrope" pitchFamily="34" charset="-120"/>
               </a:rPr>
-              <a:t>HIGHEST PRECEDENCE FIRST — row 1 beats row 8.</a:t>
+              <a:t>HIGHEST PRECEDENCE first — row 1 beats row 8.</a:t>
             </a:r>
             <a:endParaRPr lang="en-US" sz="1200" dirty="0"/>
           </a:p>
@@ -21145,7 +21145,7 @@
                 <a:ea typeface="JetBrains Mono" pitchFamily="34" charset="-122"/>
                 <a:cs typeface="JetBrains Mono" pitchFamily="34" charset="-120"/>
               </a:rPr>
-              <a:t>// does NOT reload</a:t>
+              <a:t>// does not reload</a:t>
             </a:r>
             <a:br/>
             <a:pPr algn="l" indent="0" marL="0">
@@ -21373,8 +21373,8 @@
         </p:nvSpPr>
         <p:spPr>
           <a:xfrm>
-            <a:off x="487561" y="1428452"/>
-            <a:ext cx="3440162" cy="142875"/>
+            <a:off x="487561" y="1510754"/>
+            <a:ext cx="4839444" cy="1122015"/>
           </a:xfrm>
           <a:prstGeom prst="rect">
             <a:avLst/>
@@ -21383,63 +21383,24 @@
           <a:ln/>
         </p:spPr>
         <p:txBody>
-          <a:bodyPr wrap="none" lIns="0" tIns="0" rIns="0" bIns="0" rtlCol="0" anchor="t"/>
-          <a:lstStyle/>
-          <a:p>
-            <a:pPr algn="l" indent="0" marL="0">
-              <a:buNone/>
-            </a:pPr>
-            <a:r>
-              <a:rPr lang="en-US" sz="864" b="1" spc="190" kern="0" dirty="0">
-                <a:solidFill>
-                  <a:srgbClr val="F4C233"/>
+          <a:bodyPr wrap="square" lIns="0" tIns="0" rIns="0" bIns="0" rtlCol="0" anchor="t"/>
+          <a:lstStyle/>
+          <a:p>
+            <a:pPr algn="l" indent="0" marL="0">
+              <a:lnSpc>
+                <a:spcPts val="3960"/>
+              </a:lnSpc>
+              <a:buNone/>
+            </a:pPr>
+            <a:r>
+              <a:rPr lang="en-US" sz="3600" b="1" spc="-72" kern="0" dirty="0">
+                <a:solidFill>
+                  <a:srgbClr val="F7F6F3"/>
                 </a:solidFill>
                 <a:latin typeface="Manrope" pitchFamily="34" charset="0"/>
                 <a:ea typeface="Manrope" pitchFamily="34" charset="-122"/>
                 <a:cs typeface="Manrope" pitchFamily="34" charset="-120"/>
               </a:rPr>
-              <a:t>CONFIGURATION · OPTIONS · FEATURE FLAGS</a:t>
-            </a:r>
-            <a:endParaRPr lang="en-US" sz="864" dirty="0"/>
-          </a:p>
-        </p:txBody>
-      </p:sp>
-      <p:sp>
-        <p:nvSpPr>
-          <p:cNvPr id="4" name="Text 2"/>
-          <p:cNvSpPr txBox="1"/>
-          <p:nvPr/>
-        </p:nvSpPr>
-        <p:spPr>
-          <a:xfrm>
-            <a:off x="487561" y="1669107"/>
-            <a:ext cx="4839444" cy="1122015"/>
-          </a:xfrm>
-          <a:prstGeom prst="rect">
-            <a:avLst/>
-          </a:prstGeom>
-          <a:noFill/>
-          <a:ln/>
-        </p:spPr>
-        <p:txBody>
-          <a:bodyPr wrap="square" lIns="0" tIns="0" rIns="0" bIns="0" rtlCol="0" anchor="t"/>
-          <a:lstStyle/>
-          <a:p>
-            <a:pPr algn="l" indent="0" marL="0">
-              <a:lnSpc>
-                <a:spcPts val="3960"/>
-              </a:lnSpc>
-              <a:buNone/>
-            </a:pPr>
-            <a:r>
-              <a:rPr lang="en-US" sz="3600" b="1" spc="-72" kern="0" dirty="0">
-                <a:solidFill>
-                  <a:srgbClr val="F7F6F3"/>
-                </a:solidFill>
-                <a:latin typeface="Manrope" pitchFamily="34" charset="0"/>
-                <a:ea typeface="Manrope" pitchFamily="34" charset="-122"/>
-                <a:cs typeface="Manrope" pitchFamily="34" charset="-120"/>
-              </a:rPr>
               <a:t>Modern .NET Configuration</a:t>
             </a:r>
             <a:endParaRPr lang="en-US" sz="3600" dirty="0"/>
@@ -21448,13 +21409,13 @@
       </p:sp>
       <p:sp>
         <p:nvSpPr>
-          <p:cNvPr id="5" name="Shape 3"/>
+          <p:cNvPr id="4" name="Shape 2"/>
           <p:cNvSpPr/>
           <p:nvPr/>
         </p:nvSpPr>
         <p:spPr>
           <a:xfrm>
-            <a:off x="487561" y="3072203"/>
+            <a:off x="487561" y="2913850"/>
             <a:ext cx="47625" cy="47625"/>
           </a:xfrm>
           <a:prstGeom prst="roundRect">
@@ -21470,13 +21431,13 @@
       </p:sp>
       <p:sp>
         <p:nvSpPr>
-          <p:cNvPr id="6" name="Text 4"/>
+          <p:cNvPr id="5" name="Text 3"/>
           <p:cNvSpPr txBox="1"/>
           <p:nvPr/>
         </p:nvSpPr>
         <p:spPr>
           <a:xfrm>
-            <a:off x="632222" y="2982516"/>
+            <a:off x="632222" y="2824163"/>
             <a:ext cx="987177" cy="219075"/>
           </a:xfrm>
           <a:prstGeom prst="rect">
@@ -21511,13 +21472,13 @@
       </p:sp>
       <p:sp>
         <p:nvSpPr>
-          <p:cNvPr id="7" name="Shape 5"/>
+          <p:cNvPr id="6" name="Shape 4"/>
           <p:cNvSpPr/>
           <p:nvPr/>
         </p:nvSpPr>
         <p:spPr>
           <a:xfrm>
-            <a:off x="487561" y="3360781"/>
+            <a:off x="487561" y="3202428"/>
             <a:ext cx="47625" cy="47625"/>
           </a:xfrm>
           <a:prstGeom prst="roundRect">
@@ -21533,13 +21494,13 @@
       </p:sp>
       <p:sp>
         <p:nvSpPr>
-          <p:cNvPr id="8" name="Text 6"/>
+          <p:cNvPr id="7" name="Text 5"/>
           <p:cNvSpPr txBox="1"/>
           <p:nvPr/>
         </p:nvSpPr>
         <p:spPr>
           <a:xfrm>
-            <a:off x="632222" y="3271093"/>
+            <a:off x="632222" y="3112740"/>
             <a:ext cx="1183332" cy="219075"/>
           </a:xfrm>
           <a:prstGeom prst="rect">
@@ -21574,13 +21535,13 @@
       </p:sp>
       <p:sp>
         <p:nvSpPr>
-          <p:cNvPr id="9" name="Shape 7"/>
+          <p:cNvPr id="8" name="Shape 6"/>
           <p:cNvSpPr/>
           <p:nvPr/>
         </p:nvSpPr>
         <p:spPr>
           <a:xfrm>
-            <a:off x="487561" y="3649358"/>
+            <a:off x="487561" y="3491005"/>
             <a:ext cx="47625" cy="47625"/>
           </a:xfrm>
           <a:prstGeom prst="roundRect">
@@ -21596,13 +21557,13 @@
       </p:sp>
       <p:sp>
         <p:nvSpPr>
-          <p:cNvPr id="10" name="Text 8"/>
+          <p:cNvPr id="9" name="Text 7"/>
           <p:cNvSpPr txBox="1"/>
           <p:nvPr/>
         </p:nvSpPr>
         <p:spPr>
           <a:xfrm>
-            <a:off x="632222" y="3559671"/>
+            <a:off x="632222" y="3401318"/>
             <a:ext cx="1214289" cy="219075"/>
           </a:xfrm>
           <a:prstGeom prst="rect">
@@ -21637,7 +21598,7 @@
       </p:sp>
       <p:pic>
         <p:nvPicPr>
-          <p:cNvPr id="11" name="Image 0" descr="Rendered as an image because of CSS background-image">    </p:cNvPr>
+          <p:cNvPr id="10" name="Image 0" descr="Rendered as an image because of CSS background-image">    </p:cNvPr>
           <p:cNvPicPr>
             <a:picLocks noChangeAspect="1"/>
           </p:cNvPicPr>
@@ -22759,7 +22720,7 @@
                 <a:ea typeface="Manrope" pitchFamily="34" charset="-122"/>
                 <a:cs typeface="Manrope" pitchFamily="34" charset="-120"/>
               </a:rPr>
-              <a:t>Binding turns loose strings into an application contract.</a:t>
+              <a:t>Stop passing configuration around as strings. Give it a type.</a:t>
             </a:r>
             <a:endParaRPr lang="en-US" sz="3000" dirty="0"/>
           </a:p>
@@ -32298,7 +32259,7 @@
         </p:nvSpPr>
         <p:spPr>
           <a:xfrm>
-            <a:off x="609600" y="2044452"/>
+            <a:off x="609600" y="2257871"/>
             <a:ext cx="2009477" cy="161925"/>
           </a:xfrm>
           <a:prstGeom prst="rect">
@@ -32337,8 +32298,8 @@
         </p:nvSpPr>
         <p:spPr>
           <a:xfrm>
-            <a:off x="609600" y="2302669"/>
-            <a:ext cx="7943850" cy="950565"/>
+            <a:off x="609600" y="2516088"/>
+            <a:ext cx="7549604" cy="523875"/>
           </a:xfrm>
           <a:prstGeom prst="rect">
             <a:avLst/>
@@ -32347,13 +32308,10 @@
           <a:ln/>
         </p:spPr>
         <p:txBody>
-          <a:bodyPr wrap="square" lIns="0" tIns="0" rIns="0" bIns="0" rtlCol="0" anchor="t"/>
-          <a:lstStyle/>
-          <a:p>
-            <a:pPr algn="l" indent="0" marL="0">
-              <a:lnSpc>
-                <a:spcPts val="3360"/>
-              </a:lnSpc>
+          <a:bodyPr wrap="none" lIns="0" tIns="0" rIns="0" bIns="0" rtlCol="0" anchor="t"/>
+          <a:lstStyle/>
+          <a:p>
+            <a:pPr algn="l" indent="0" marL="0">
               <a:buNone/>
             </a:pPr>
             <a:r>
@@ -32365,7 +32323,7 @@
                 <a:ea typeface="Manrope" pitchFamily="34" charset="-122"/>
                 <a:cs typeface="Manrope" pitchFamily="34" charset="-120"/>
               </a:rPr>
-              <a:t>One edit has to reach every instance — or none of them.</a:t>
+              <a:t>One edit now has to reach every instance.</a:t>
             </a:r>
             <a:endParaRPr lang="en-US" sz="3000" dirty="0"/>
           </a:p>
@@ -33203,7 +33161,31 @@
       </p:sp>
       <p:sp>
         <p:nvSpPr>
-          <p:cNvPr id="4" name="Text 2"/>
+          <p:cNvPr id="4" name="Shape 2"/>
+          <p:cNvSpPr/>
+          <p:nvPr/>
+        </p:nvSpPr>
+        <p:spPr>
+          <a:xfrm>
+            <a:off x="7411343" y="2340769"/>
+            <a:ext cx="510629" cy="495300"/>
+          </a:xfrm>
+          <a:prstGeom prst="roundRect">
+            <a:avLst>
+              <a:gd name="adj" fmla="val 7692"/>
+            </a:avLst>
+          </a:prstGeom>
+          <a:solidFill>
+            <a:srgbClr val="F7F6F3">
+              <a:alpha val="16000"/>
+            </a:srgbClr>
+          </a:solidFill>
+          <a:ln/>
+        </p:spPr>
+      </p:sp>
+      <p:sp>
+        <p:nvSpPr>
+          <p:cNvPr id="5" name="Text 3"/>
           <p:cNvSpPr txBox="1"/>
           <p:nvPr/>
         </p:nvSpPr>
@@ -33237,7 +33219,41 @@
                 <a:ea typeface="Manrope" pitchFamily="34" charset="-122"/>
                 <a:cs typeface="Manrope" pitchFamily="34" charset="-120"/>
               </a:rPr>
-              <a:t>Flags are configuration that changes behaviour, not just values.</a:t>
+              <a:t>A feature flag is configuration with an </a:t>
+            </a:r>
+            <a:pPr algn="l" indent="0" marL="0">
+              <a:lnSpc>
+                <a:spcPts val="3360"/>
+              </a:lnSpc>
+              <a:buNone/>
+            </a:pPr>
+            <a:r>
+              <a:rPr lang="en-US" sz="2700" spc="-60" kern="0" dirty="0">
+                <a:solidFill>
+                  <a:srgbClr val="F7F6F3"/>
+                </a:solidFill>
+                <a:latin typeface="JetBrains Mono" pitchFamily="34" charset="0"/>
+                <a:ea typeface="JetBrains Mono" pitchFamily="34" charset="-122"/>
+                <a:cs typeface="JetBrains Mono" pitchFamily="34" charset="-120"/>
+              </a:rPr>
+              <a:t>if</a:t>
+            </a:r>
+            <a:pPr algn="l" indent="0" marL="0">
+              <a:lnSpc>
+                <a:spcPts val="3360"/>
+              </a:lnSpc>
+              <a:buNone/>
+            </a:pPr>
+            <a:r>
+              <a:rPr lang="en-US" sz="3000" b="1" spc="-60" kern="0" dirty="0">
+                <a:solidFill>
+                  <a:srgbClr val="F7F6F3"/>
+                </a:solidFill>
+                <a:latin typeface="Manrope" pitchFamily="34" charset="0"/>
+                <a:ea typeface="Manrope" pitchFamily="34" charset="-122"/>
+                <a:cs typeface="Manrope" pitchFamily="34" charset="-120"/>
+              </a:rPr>
+              <a:t> statement attached.</a:t>
             </a:r>
             <a:endParaRPr lang="en-US" sz="3000" dirty="0"/>
           </a:p>
@@ -40205,7 +40221,7 @@
         <p:spPr>
           <a:xfrm>
             <a:off x="609600" y="2302669"/>
-            <a:ext cx="8062421" cy="950565"/>
+            <a:ext cx="7943850" cy="950565"/>
           </a:xfrm>
           <a:prstGeom prst="rect">
             <a:avLst/>
@@ -40232,7 +40248,7 @@
                 <a:ea typeface="Manrope" pitchFamily="34" charset="-122"/>
                 <a:cs typeface="Manrope" pitchFamily="34" charset="-120"/>
               </a:rPr>
-              <a:t>Decide by ownership, sensitivity, scope, and change cadence.</a:t>
+              <a:t>Who owns it? Is it secret? Who needs it? How fast must it change?</a:t>
             </a:r>
             <a:endParaRPr lang="en-US" sz="3000" dirty="0"/>
           </a:p>
@@ -41278,7 +41294,7 @@
         <p:spPr>
           <a:xfrm>
             <a:off x="457200" y="439936"/>
-            <a:ext cx="3618458" cy="485775"/>
+            <a:ext cx="6537275" cy="485775"/>
           </a:xfrm>
           <a:prstGeom prst="rect">
             <a:avLst/>
@@ -41302,7 +41318,7 @@
                 <a:ea typeface="Manrope" pitchFamily="34" charset="-122"/>
                 <a:cs typeface="Manrope" pitchFamily="34" charset="-120"/>
               </a:rPr>
-              <a:t>By application shape</a:t>
+              <a:t>What I’d use for six common app types</a:t>
             </a:r>
             <a:endParaRPr lang="en-US" sz="2820" dirty="0"/>
           </a:p>
@@ -44314,7 +44330,7 @@
         <p:spPr>
           <a:xfrm>
             <a:off x="457200" y="439936"/>
-            <a:ext cx="8489305" cy="485775"/>
+            <a:ext cx="7262961" cy="485775"/>
           </a:xfrm>
           <a:prstGeom prst="rect">
             <a:avLst/>
@@ -44338,7 +44354,7 @@
                 <a:ea typeface="Manrope" pitchFamily="34" charset="-122"/>
                 <a:cs typeface="Manrope" pitchFamily="34" charset="-120"/>
               </a:rPr>
-              <a:t>The spine assumes something that gets deployed</a:t>
+              <a:t>A desktop app gets installed, not deployed</a:t>
             </a:r>
             <a:endParaRPr lang="en-US" sz="2820" dirty="0"/>
           </a:p>
@@ -46681,7 +46697,7 @@
         </p:nvSpPr>
         <p:spPr>
           <a:xfrm>
-            <a:off x="609600" y="2044452"/>
+            <a:off x="609600" y="2257871"/>
             <a:ext cx="934641" cy="161925"/>
           </a:xfrm>
           <a:prstGeom prst="rect">
@@ -46720,8 +46736,8 @@
         </p:nvSpPr>
         <p:spPr>
           <a:xfrm>
-            <a:off x="609600" y="2302669"/>
-            <a:ext cx="7943850" cy="950565"/>
+            <a:off x="609600" y="2516088"/>
+            <a:ext cx="4791521" cy="523875"/>
           </a:xfrm>
           <a:prstGeom prst="rect">
             <a:avLst/>
@@ -46730,13 +46746,10 @@
           <a:ln/>
         </p:spPr>
         <p:txBody>
-          <a:bodyPr wrap="square" lIns="0" tIns="0" rIns="0" bIns="0" rtlCol="0" anchor="t"/>
-          <a:lstStyle/>
-          <a:p>
-            <a:pPr algn="l" indent="0" marL="0">
-              <a:lnSpc>
-                <a:spcPts val="3360"/>
-              </a:lnSpc>
+          <a:bodyPr wrap="none" lIns="0" tIns="0" rIns="0" bIns="0" rtlCol="0" anchor="t"/>
+          <a:lstStyle/>
+          <a:p>
+            <a:pPr algn="l" indent="0" marL="0">
               <a:buNone/>
             </a:pPr>
             <a:r>
@@ -46748,7 +46761,7 @@
                 <a:ea typeface="Manrope" pitchFamily="34" charset="-122"/>
                 <a:cs typeface="Manrope" pitchFamily="34" charset="-120"/>
               </a:rPr>
-              <a:t>Things worth knowing that the journey did not need.</a:t>
+              <a:t>Useful details we skipped.</a:t>
             </a:r>
             <a:endParaRPr lang="en-US" sz="3000" dirty="0"/>
           </a:p>
@@ -52152,8 +52165,8 @@
         </p:nvSpPr>
         <p:spPr>
           <a:xfrm>
-            <a:off x="685800" y="1532930"/>
-            <a:ext cx="7029450" cy="1218902"/>
+            <a:off x="685800" y="1728192"/>
+            <a:ext cx="7029450" cy="828526"/>
           </a:xfrm>
           <a:prstGeom prst="rect">
             <a:avLst/>
@@ -52180,7 +52193,7 @@
                 <a:ea typeface="Manrope" pitchFamily="34" charset="-122"/>
                 <a:cs typeface="Manrope" pitchFamily="34" charset="-120"/>
               </a:rPr>
-              <a:t>If an operational value can differ by environment, deployment, or time, configure it.</a:t>
+              <a:t>If two environments need different answers, it’s configuration.</a:t>
             </a:r>
             <a:endParaRPr lang="en-US" sz="2520" dirty="0"/>
           </a:p>
@@ -52194,7 +52207,7 @@
         </p:nvSpPr>
         <p:spPr>
           <a:xfrm>
-            <a:off x="685800" y="2795439"/>
+            <a:off x="685800" y="2600325"/>
             <a:ext cx="7029450" cy="828526"/>
           </a:xfrm>
           <a:prstGeom prst="rect">
@@ -52222,7 +52235,7 @@
                 <a:ea typeface="Manrope" pitchFamily="34" charset="-122"/>
                 <a:cs typeface="Manrope" pitchFamily="34" charset="-120"/>
               </a:rPr>
-              <a:t>If a code path must be switchable without a deploy, flag it.</a:t>
+              <a:t>If behaviour must change without shipping, it’s a flag.</a:t>
             </a:r>
             <a:endParaRPr lang="en-US" sz="2520" dirty="0"/>
           </a:p>
